--- a/docs/entrega/presentacion-defensa-tfg.pptx
+++ b/docs/entrega/presentacion-defensa-tfg.pptx
@@ -3403,8 +3403,8 @@
         </p:nvSpPr>
         <p:spPr>
           <a:xfrm>
-            <a:off x="603504" y="347472"/>
-            <a:ext cx="9692640" cy="502920"/>
+            <a:off x="566928" y="320040"/>
+            <a:ext cx="10058400" cy="502920"/>
           </a:xfrm>
           <a:prstGeom prst="rect">
             <a:avLst/>
@@ -3436,8 +3436,8 @@
         </p:nvSpPr>
         <p:spPr>
           <a:xfrm>
-            <a:off x="621792" y="868680"/>
-            <a:ext cx="9692640" cy="320040"/>
+            <a:off x="585216" y="841248"/>
+            <a:ext cx="10058400" cy="320040"/>
           </a:xfrm>
           <a:prstGeom prst="rect">
             <a:avLst/>
@@ -3469,8 +3469,8 @@
         </p:nvSpPr>
         <p:spPr>
           <a:xfrm>
-            <a:off x="603504" y="1243584"/>
-            <a:ext cx="11018520" cy="27432"/>
+            <a:off x="566928" y="1207008"/>
+            <a:ext cx="11064240" cy="27432"/>
           </a:xfrm>
           <a:prstGeom prst="rect">
             <a:avLst/>
@@ -3526,40 +3526,36 @@
           </a:bodyPr>
           <a:lstStyle/>
           <a:p>
-            <a:pPr/>
             <a:r>
               <a:rPr sz="2300">
                 <a:solidFill>
                   <a:srgbClr val="334155"/>
                 </a:solidFill>
               </a:rPr>
-              <a:t>• Abrir el portal desplegado y crear una solicitud de acceso o incidencia.</a:t>
-            </a:r>
-          </a:p>
-          <a:p>
-            <a:pPr/>
+              <a:t>• Abrir el portal desplegado y crear una solicitud.</a:t>
+            </a:r>
+          </a:p>
+          <a:p>
             <a:r>
               <a:rPr sz="2300">
                 <a:solidFill>
                   <a:srgbClr val="334155"/>
                 </a:solidFill>
               </a:rPr>
-              <a:t>• Mostrar la clasificación, SLA, responsable e historial generado.</a:t>
-            </a:r>
-          </a:p>
-          <a:p>
-            <a:pPr/>
+              <a:t>• Mostrar clasificación, SLA, responsable e historial generado.</a:t>
+            </a:r>
+          </a:p>
+          <a:p>
             <a:r>
               <a:rPr sz="2300">
                 <a:solidFill>
                   <a:srgbClr val="334155"/>
                 </a:solidFill>
               </a:rPr>
-              <a:t>• Ejecutar o mostrar Logic App como entrada automática desde otro sistema.</a:t>
-            </a:r>
-          </a:p>
-          <a:p>
-            <a:pPr/>
+              <a:t>• Mostrar Logic App como entrada automática desde otro sistema.</a:t>
+            </a:r>
+          </a:p>
+          <a:p>
             <a:r>
               <a:rPr sz="2300">
                 <a:solidFill>
@@ -3570,7 +3566,6 @@
             </a:r>
           </a:p>
           <a:p>
-            <a:pPr/>
             <a:r>
               <a:rPr sz="2300">
                 <a:solidFill>
@@ -3590,8 +3585,8 @@
         </p:nvSpPr>
         <p:spPr>
           <a:xfrm>
-            <a:off x="603504" y="6510528"/>
-            <a:ext cx="8595360" cy="201168"/>
+            <a:off x="566928" y="6510528"/>
+            <a:ext cx="8686800" cy="182880"/>
           </a:xfrm>
           <a:prstGeom prst="rect">
             <a:avLst/>
@@ -3623,8 +3618,8 @@
         </p:nvSpPr>
         <p:spPr>
           <a:xfrm>
-            <a:off x="10972800" y="6510528"/>
-            <a:ext cx="548640" cy="201168"/>
+            <a:off x="11064240" y="6510528"/>
+            <a:ext cx="457200" cy="182880"/>
           </a:xfrm>
           <a:prstGeom prst="rect">
             <a:avLst/>
@@ -3683,8 +3678,8 @@
         </p:nvSpPr>
         <p:spPr>
           <a:xfrm>
-            <a:off x="603504" y="347472"/>
-            <a:ext cx="9692640" cy="502920"/>
+            <a:off x="566928" y="320040"/>
+            <a:ext cx="10058400" cy="502920"/>
           </a:xfrm>
           <a:prstGeom prst="rect">
             <a:avLst/>
@@ -3716,8 +3711,8 @@
         </p:nvSpPr>
         <p:spPr>
           <a:xfrm>
-            <a:off x="621792" y="868680"/>
-            <a:ext cx="9692640" cy="320040"/>
+            <a:off x="585216" y="841248"/>
+            <a:ext cx="10058400" cy="320040"/>
           </a:xfrm>
           <a:prstGeom prst="rect">
             <a:avLst/>
@@ -3749,8 +3744,8 @@
         </p:nvSpPr>
         <p:spPr>
           <a:xfrm>
-            <a:off x="603504" y="1243584"/>
-            <a:ext cx="11018520" cy="27432"/>
+            <a:off x="566928" y="1207008"/>
+            <a:ext cx="11064240" cy="27432"/>
           </a:xfrm>
           <a:prstGeom prst="rect">
             <a:avLst/>
@@ -3792,7 +3787,7 @@
         </p:nvSpPr>
         <p:spPr>
           <a:xfrm>
-            <a:off x="777240" y="1645920"/>
+            <a:off x="777240" y="1600200"/>
             <a:ext cx="5669280" cy="2560320"/>
           </a:xfrm>
           <a:prstGeom prst="rect">
@@ -3806,7 +3801,6 @@
           </a:bodyPr>
           <a:lstStyle/>
           <a:p>
-            <a:pPr/>
             <a:r>
               <a:rPr sz="2200">
                 <a:solidFill>
@@ -3817,7 +3811,6 @@
             </a:r>
           </a:p>
           <a:p>
-            <a:pPr/>
             <a:r>
               <a:rPr sz="2200">
                 <a:solidFill>
@@ -3828,7 +3821,6 @@
             </a:r>
           </a:p>
           <a:p>
-            <a:pPr/>
             <a:r>
               <a:rPr sz="2200">
                 <a:solidFill>
@@ -3859,7 +3851,7 @@
           </a:solidFill>
           <a:ln>
             <a:solidFill>
-              <a:srgbClr val="DBEAFE"/>
+              <a:srgbClr val="D2E1F0"/>
             </a:solidFill>
           </a:ln>
         </p:spPr>
@@ -3893,8 +3885,8 @@
         </p:nvSpPr>
         <p:spPr>
           <a:xfrm>
-            <a:off x="7205472" y="1746504"/>
-            <a:ext cx="3328416" cy="292608"/>
+            <a:off x="7205472" y="1737360"/>
+            <a:ext cx="3328416" cy="274320"/>
           </a:xfrm>
           <a:prstGeom prst="rect">
             <a:avLst/>
@@ -3908,7 +3900,7 @@
           <a:lstStyle/>
           <a:p>
             <a:r>
-              <a:rPr sz="1900" b="1">
+              <a:rPr sz="1800" b="1">
                 <a:solidFill>
                   <a:srgbClr val="149496"/>
                 </a:solidFill>
@@ -3926,8 +3918,8 @@
         </p:nvSpPr>
         <p:spPr>
           <a:xfrm>
-            <a:off x="7205472" y="2130552"/>
-            <a:ext cx="3328416" cy="1901952"/>
+            <a:off x="7205472" y="2103120"/>
+            <a:ext cx="3328416" cy="1965960"/>
           </a:xfrm>
           <a:prstGeom prst="rect">
             <a:avLst/>
@@ -3941,12 +3933,12 @@
           <a:lstStyle/>
           <a:p>
             <a:r>
-              <a:rPr sz="1450" b="0">
+              <a:rPr sz="1400" b="0">
                 <a:solidFill>
                   <a:srgbClr val="334155"/>
                 </a:solidFill>
               </a:rPr>
-              <a:t>Un flujo empresarial completo: portal, API, base documental, secretos en Key Vault, orquestación con Logic App, monitorización y calidad continua.</a:t>
+              <a:t>Portal, API, Cosmos DB, Key Vault, Logic App, observabilidad y calidad continua integrados en un flujo empresarial.</a:t>
             </a:r>
           </a:p>
         </p:txBody>
@@ -3959,8 +3951,8 @@
         </p:nvSpPr>
         <p:spPr>
           <a:xfrm>
-            <a:off x="603504" y="6510528"/>
-            <a:ext cx="8595360" cy="201168"/>
+            <a:off x="566928" y="6510528"/>
+            <a:ext cx="8686800" cy="182880"/>
           </a:xfrm>
           <a:prstGeom prst="rect">
             <a:avLst/>
@@ -3992,8 +3984,8 @@
         </p:nvSpPr>
         <p:spPr>
           <a:xfrm>
-            <a:off x="10972800" y="6510528"/>
-            <a:ext cx="548640" cy="201168"/>
+            <a:off x="11064240" y="6510528"/>
+            <a:ext cx="457200" cy="182880"/>
           </a:xfrm>
           <a:prstGeom prst="rect">
             <a:avLst/>
@@ -4052,8 +4044,8 @@
         </p:nvSpPr>
         <p:spPr>
           <a:xfrm>
-            <a:off x="603504" y="347472"/>
-            <a:ext cx="9692640" cy="502920"/>
+            <a:off x="566928" y="320040"/>
+            <a:ext cx="10058400" cy="502920"/>
           </a:xfrm>
           <a:prstGeom prst="rect">
             <a:avLst/>
@@ -4085,8 +4077,8 @@
         </p:nvSpPr>
         <p:spPr>
           <a:xfrm>
-            <a:off x="621792" y="868680"/>
-            <a:ext cx="9692640" cy="320040"/>
+            <a:off x="585216" y="841248"/>
+            <a:ext cx="10058400" cy="320040"/>
           </a:xfrm>
           <a:prstGeom prst="rect">
             <a:avLst/>
@@ -4118,8 +4110,8 @@
         </p:nvSpPr>
         <p:spPr>
           <a:xfrm>
-            <a:off x="603504" y="1243584"/>
-            <a:ext cx="11018520" cy="27432"/>
+            <a:off x="566928" y="1207008"/>
+            <a:ext cx="11064240" cy="27432"/>
           </a:xfrm>
           <a:prstGeom prst="rect">
             <a:avLst/>
@@ -4185,8 +4177,8 @@
         </p:nvSpPr>
         <p:spPr>
           <a:xfrm>
-            <a:off x="603504" y="6510528"/>
-            <a:ext cx="8595360" cy="201168"/>
+            <a:off x="566928" y="6510528"/>
+            <a:ext cx="8686800" cy="182880"/>
           </a:xfrm>
           <a:prstGeom prst="rect">
             <a:avLst/>
@@ -4218,8 +4210,8 @@
         </p:nvSpPr>
         <p:spPr>
           <a:xfrm>
-            <a:off x="10972800" y="6510528"/>
-            <a:ext cx="548640" cy="201168"/>
+            <a:off x="11064240" y="6510528"/>
+            <a:ext cx="457200" cy="182880"/>
           </a:xfrm>
           <a:prstGeom prst="rect">
             <a:avLst/>
@@ -4278,8 +4270,8 @@
         </p:nvSpPr>
         <p:spPr>
           <a:xfrm>
-            <a:off x="603504" y="347472"/>
-            <a:ext cx="9692640" cy="502920"/>
+            <a:off x="566928" y="320040"/>
+            <a:ext cx="10058400" cy="502920"/>
           </a:xfrm>
           <a:prstGeom prst="rect">
             <a:avLst/>
@@ -4311,8 +4303,8 @@
         </p:nvSpPr>
         <p:spPr>
           <a:xfrm>
-            <a:off x="621792" y="868680"/>
-            <a:ext cx="9692640" cy="320040"/>
+            <a:off x="585216" y="841248"/>
+            <a:ext cx="10058400" cy="320040"/>
           </a:xfrm>
           <a:prstGeom prst="rect">
             <a:avLst/>
@@ -4344,8 +4336,8 @@
         </p:nvSpPr>
         <p:spPr>
           <a:xfrm>
-            <a:off x="603504" y="1243584"/>
-            <a:ext cx="11018520" cy="27432"/>
+            <a:off x="566928" y="1207008"/>
+            <a:ext cx="11064240" cy="27432"/>
           </a:xfrm>
           <a:prstGeom prst="rect">
             <a:avLst/>
@@ -4387,8 +4379,8 @@
         </p:nvSpPr>
         <p:spPr>
           <a:xfrm>
-            <a:off x="685800" y="1600200"/>
-            <a:ext cx="3154680" cy="2331720"/>
+            <a:off x="640080" y="1554480"/>
+            <a:ext cx="3200400" cy="2194560"/>
           </a:xfrm>
           <a:prstGeom prst="roundRect">
             <a:avLst/>
@@ -4398,7 +4390,7 @@
           </a:solidFill>
           <a:ln>
             <a:solidFill>
-              <a:srgbClr val="DBEAFE"/>
+              <a:srgbClr val="D2E1F0"/>
             </a:solidFill>
           </a:ln>
         </p:spPr>
@@ -4432,8 +4424,8 @@
         </p:nvSpPr>
         <p:spPr>
           <a:xfrm>
-            <a:off x="850392" y="1746504"/>
-            <a:ext cx="2825496" cy="292608"/>
+            <a:off x="804671" y="1691639"/>
+            <a:ext cx="2871216" cy="274320"/>
           </a:xfrm>
           <a:prstGeom prst="rect">
             <a:avLst/>
@@ -4447,7 +4439,7 @@
           <a:lstStyle/>
           <a:p>
             <a:r>
-              <a:rPr sz="1900" b="1">
+              <a:rPr sz="1800" b="1">
                 <a:solidFill>
                   <a:srgbClr val="0078D4"/>
                 </a:solidFill>
@@ -4465,8 +4457,8 @@
         </p:nvSpPr>
         <p:spPr>
           <a:xfrm>
-            <a:off x="850392" y="2130552"/>
-            <a:ext cx="2825496" cy="1673351"/>
+            <a:off x="804671" y="2057400"/>
+            <a:ext cx="2871216" cy="1600200"/>
           </a:xfrm>
           <a:prstGeom prst="rect">
             <a:avLst/>
@@ -4480,12 +4472,12 @@
           <a:lstStyle/>
           <a:p>
             <a:r>
-              <a:rPr sz="1450" b="0">
+              <a:rPr sz="1400" b="0">
                 <a:solidFill>
                   <a:srgbClr val="334155"/>
                 </a:solidFill>
               </a:rPr>
-              <a:t>El único blob JSON era suficiente para el prototipo, pero limitaba concurrencia, consulta y crecimiento. Cosmos DB encaja mejor con datos semiestructurados.</a:t>
+              <a:t>El blob único era suficiente para el prototipo inicial, pero limitaba concurrencia, consulta y crecimiento.</a:t>
             </a:r>
           </a:p>
         </p:txBody>
@@ -4498,8 +4490,8 @@
         </p:nvSpPr>
         <p:spPr>
           <a:xfrm>
-            <a:off x="4480560" y="1600200"/>
-            <a:ext cx="3154680" cy="2331720"/>
+            <a:off x="4480560" y="1554480"/>
+            <a:ext cx="3200400" cy="2194560"/>
           </a:xfrm>
           <a:prstGeom prst="roundRect">
             <a:avLst/>
@@ -4509,7 +4501,7 @@
           </a:solidFill>
           <a:ln>
             <a:solidFill>
-              <a:srgbClr val="DBEAFE"/>
+              <a:srgbClr val="D2E1F0"/>
             </a:solidFill>
           </a:ln>
         </p:spPr>
@@ -4543,8 +4535,8 @@
         </p:nvSpPr>
         <p:spPr>
           <a:xfrm>
-            <a:off x="4645152" y="1746504"/>
-            <a:ext cx="2825496" cy="292608"/>
+            <a:off x="4645152" y="1691639"/>
+            <a:ext cx="2871216" cy="274320"/>
           </a:xfrm>
           <a:prstGeom prst="rect">
             <a:avLst/>
@@ -4558,7 +4550,7 @@
           <a:lstStyle/>
           <a:p>
             <a:r>
-              <a:rPr sz="1900" b="1">
+              <a:rPr sz="1800" b="1">
                 <a:solidFill>
                   <a:srgbClr val="149496"/>
                 </a:solidFill>
@@ -4576,8 +4568,8 @@
         </p:nvSpPr>
         <p:spPr>
           <a:xfrm>
-            <a:off x="4645152" y="2130552"/>
-            <a:ext cx="2825496" cy="1673351"/>
+            <a:off x="4645152" y="2057400"/>
+            <a:ext cx="2871216" cy="1600200"/>
           </a:xfrm>
           <a:prstGeom prst="rect">
             <a:avLst/>
@@ -4591,12 +4583,12 @@
           <a:lstStyle/>
           <a:p>
             <a:r>
-              <a:rPr sz="1450" b="0">
+              <a:rPr sz="1400" b="0">
                 <a:solidFill>
                   <a:srgbClr val="334155"/>
                 </a:solidFill>
               </a:rPr>
-              <a:t>Se añadió un backend opcional, se creó la cuenta Free Tier, se migraron las solicitudes existentes y se cambió STORAGE_MODE a cosmos.</a:t>
+              <a:t>Se creó Cosmos DB Free Tier, se migraron 20 solicitudes y App Service quedó con STORAGE_MODE=cosmos.</a:t>
             </a:r>
           </a:p>
         </p:txBody>
@@ -4609,8 +4601,8 @@
         </p:nvSpPr>
         <p:spPr>
           <a:xfrm>
-            <a:off x="8275320" y="1600200"/>
-            <a:ext cx="3154680" cy="2331720"/>
+            <a:off x="8321040" y="1554480"/>
+            <a:ext cx="3200400" cy="2194560"/>
           </a:xfrm>
           <a:prstGeom prst="roundRect">
             <a:avLst/>
@@ -4620,7 +4612,7 @@
           </a:solidFill>
           <a:ln>
             <a:solidFill>
-              <a:srgbClr val="DBEAFE"/>
+              <a:srgbClr val="D2E1F0"/>
             </a:solidFill>
           </a:ln>
         </p:spPr>
@@ -4654,8 +4646,8 @@
         </p:nvSpPr>
         <p:spPr>
           <a:xfrm>
-            <a:off x="8439912" y="1746504"/>
-            <a:ext cx="2825496" cy="292608"/>
+            <a:off x="8485632" y="1691639"/>
+            <a:ext cx="2871216" cy="274320"/>
           </a:xfrm>
           <a:prstGeom prst="rect">
             <a:avLst/>
@@ -4669,9 +4661,9 @@
           <a:lstStyle/>
           <a:p>
             <a:r>
-              <a:rPr sz="1900" b="1">
-                <a:solidFill>
-                  <a:srgbClr val="168048"/>
+              <a:rPr sz="1800" b="1">
+                <a:solidFill>
+                  <a:srgbClr val="228B53"/>
                 </a:solidFill>
               </a:rPr>
               <a:t>Qué mejora</a:t>
@@ -4687,8 +4679,8 @@
         </p:nvSpPr>
         <p:spPr>
           <a:xfrm>
-            <a:off x="8439912" y="2130552"/>
-            <a:ext cx="2825496" cy="1673351"/>
+            <a:off x="8485632" y="2057400"/>
+            <a:ext cx="2871216" cy="1600200"/>
           </a:xfrm>
           <a:prstGeom prst="rect">
             <a:avLst/>
@@ -4702,12 +4694,12 @@
           <a:lstStyle/>
           <a:p>
             <a:r>
-              <a:rPr sz="1450" b="0">
+              <a:rPr sz="1400" b="0">
                 <a:solidFill>
                   <a:srgbClr val="334155"/>
                 </a:solidFill>
               </a:rPr>
-              <a:t>Cada solicitud se almacena como documento independiente, con partición por tipo, manteniendo el mismo contrato de API y portal.</a:t>
+              <a:t>Cada solicitud se almacena como documento independiente en tfg-solicitudes/solicitudes.</a:t>
             </a:r>
           </a:p>
         </p:txBody>
@@ -4728,8 +4720,8 @@
         </p:blipFill>
         <p:spPr>
           <a:xfrm>
-            <a:off x="1051560" y="4343400"/>
-            <a:ext cx="10058400" cy="1417320"/>
+            <a:off x="1051560" y="4160520"/>
+            <a:ext cx="10058400" cy="1508760"/>
           </a:xfrm>
           <a:prstGeom prst="rect">
             <a:avLst/>
@@ -4744,8 +4736,8 @@
         </p:nvSpPr>
         <p:spPr>
           <a:xfrm>
-            <a:off x="603504" y="6510528"/>
-            <a:ext cx="8595360" cy="201168"/>
+            <a:off x="566928" y="6510528"/>
+            <a:ext cx="8686800" cy="182880"/>
           </a:xfrm>
           <a:prstGeom prst="rect">
             <a:avLst/>
@@ -4777,8 +4769,8 @@
         </p:nvSpPr>
         <p:spPr>
           <a:xfrm>
-            <a:off x="10972800" y="6510528"/>
-            <a:ext cx="548640" cy="201168"/>
+            <a:off x="11064240" y="6510528"/>
+            <a:ext cx="457200" cy="182880"/>
           </a:xfrm>
           <a:prstGeom prst="rect">
             <a:avLst/>
@@ -4837,8 +4829,8 @@
         </p:nvSpPr>
         <p:spPr>
           <a:xfrm>
-            <a:off x="603504" y="347472"/>
-            <a:ext cx="9692640" cy="502920"/>
+            <a:off x="566928" y="320040"/>
+            <a:ext cx="10058400" cy="502920"/>
           </a:xfrm>
           <a:prstGeom prst="rect">
             <a:avLst/>
@@ -4870,8 +4862,8 @@
         </p:nvSpPr>
         <p:spPr>
           <a:xfrm>
-            <a:off x="621792" y="868680"/>
-            <a:ext cx="9692640" cy="320040"/>
+            <a:off x="585216" y="841248"/>
+            <a:ext cx="10058400" cy="320040"/>
           </a:xfrm>
           <a:prstGeom prst="rect">
             <a:avLst/>
@@ -4903,8 +4895,8 @@
         </p:nvSpPr>
         <p:spPr>
           <a:xfrm>
-            <a:off x="603504" y="1243584"/>
-            <a:ext cx="11018520" cy="27432"/>
+            <a:off x="566928" y="1207008"/>
+            <a:ext cx="11064240" cy="27432"/>
           </a:xfrm>
           <a:prstGeom prst="rect">
             <a:avLst/>
@@ -4960,7 +4952,6 @@
           </a:bodyPr>
           <a:lstStyle/>
           <a:p>
-            <a:pPr/>
             <a:r>
               <a:rPr sz="2200">
                 <a:solidFill>
@@ -4971,7 +4962,6 @@
             </a:r>
           </a:p>
           <a:p>
-            <a:pPr/>
             <a:r>
               <a:rPr sz="2200">
                 <a:solidFill>
@@ -4982,18 +4972,16 @@
             </a:r>
           </a:p>
           <a:p>
-            <a:pPr/>
             <a:r>
               <a:rPr sz="2200">
                 <a:solidFill>
                   <a:srgbClr val="334155"/>
                 </a:solidFill>
               </a:rPr>
-              <a:t>• Bandeja de gestión para el equipo TI con filtros, detalle y cambios de estado.</a:t>
-            </a:r>
-          </a:p>
-          <a:p>
-            <a:pPr/>
+              <a:t>• Bandeja de gestión protegida con filtros, detalle y cambios de estado.</a:t>
+            </a:r>
+          </a:p>
+          <a:p>
             <a:r>
               <a:rPr sz="2200">
                 <a:solidFill>
@@ -5004,14 +4992,13 @@
             </a:r>
           </a:p>
           <a:p>
-            <a:pPr/>
             <a:r>
               <a:rPr sz="2200">
                 <a:solidFill>
                   <a:srgbClr val="334155"/>
                 </a:solidFill>
               </a:rPr>
-              <a:t>• Exportación CSV, métricas operativas, health check y pruebas automáticas.</a:t>
+              <a:t>• Exportación CSV, métricas operativas, health check y OpenAPI.</a:t>
             </a:r>
           </a:p>
         </p:txBody>
@@ -5024,8 +5011,8 @@
         </p:nvSpPr>
         <p:spPr>
           <a:xfrm>
-            <a:off x="603504" y="6510528"/>
-            <a:ext cx="8595360" cy="201168"/>
+            <a:off x="566928" y="6510528"/>
+            <a:ext cx="8686800" cy="182880"/>
           </a:xfrm>
           <a:prstGeom prst="rect">
             <a:avLst/>
@@ -5057,8 +5044,8 @@
         </p:nvSpPr>
         <p:spPr>
           <a:xfrm>
-            <a:off x="10972800" y="6510528"/>
-            <a:ext cx="548640" cy="201168"/>
+            <a:off x="11064240" y="6510528"/>
+            <a:ext cx="457200" cy="182880"/>
           </a:xfrm>
           <a:prstGeom prst="rect">
             <a:avLst/>
@@ -5117,8 +5104,8 @@
         </p:nvSpPr>
         <p:spPr>
           <a:xfrm>
-            <a:off x="603504" y="347472"/>
-            <a:ext cx="9692640" cy="502920"/>
+            <a:off x="566928" y="320040"/>
+            <a:ext cx="10058400" cy="502920"/>
           </a:xfrm>
           <a:prstGeom prst="rect">
             <a:avLst/>
@@ -5137,7 +5124,7 @@
                   <a:srgbClr val="0F2F4A"/>
                 </a:solidFill>
               </a:rPr>
-              <a:t>Seguridad</a:t>
+              <a:t>Seguridad y datos</a:t>
             </a:r>
           </a:p>
         </p:txBody>
@@ -5150,8 +5137,8 @@
         </p:nvSpPr>
         <p:spPr>
           <a:xfrm>
-            <a:off x="621792" y="868680"/>
-            <a:ext cx="9692640" cy="320040"/>
+            <a:off x="585216" y="841248"/>
+            <a:ext cx="10058400" cy="320040"/>
           </a:xfrm>
           <a:prstGeom prst="rect">
             <a:avLst/>
@@ -5183,8 +5170,8 @@
         </p:nvSpPr>
         <p:spPr>
           <a:xfrm>
-            <a:off x="603504" y="1243584"/>
-            <a:ext cx="11018520" cy="27432"/>
+            <a:off x="566928" y="1207008"/>
+            <a:ext cx="11064240" cy="27432"/>
           </a:xfrm>
           <a:prstGeom prst="rect">
             <a:avLst/>
@@ -5237,7 +5224,7 @@
           </a:solidFill>
           <a:ln>
             <a:solidFill>
-              <a:srgbClr val="DBEAFE"/>
+              <a:srgbClr val="D2E1F0"/>
             </a:solidFill>
           </a:ln>
         </p:spPr>
@@ -5271,8 +5258,8 @@
         </p:nvSpPr>
         <p:spPr>
           <a:xfrm>
-            <a:off x="850392" y="1746504"/>
-            <a:ext cx="2825496" cy="292608"/>
+            <a:off x="850392" y="1737360"/>
+            <a:ext cx="2825496" cy="274320"/>
           </a:xfrm>
           <a:prstGeom prst="rect">
             <a:avLst/>
@@ -5286,7 +5273,7 @@
           <a:lstStyle/>
           <a:p>
             <a:r>
-              <a:rPr sz="1900" b="1">
+              <a:rPr sz="1800" b="1">
                 <a:solidFill>
                   <a:srgbClr val="0078D4"/>
                 </a:solidFill>
@@ -5304,8 +5291,8 @@
         </p:nvSpPr>
         <p:spPr>
           <a:xfrm>
-            <a:off x="850392" y="2130552"/>
-            <a:ext cx="2825496" cy="1856232"/>
+            <a:off x="850392" y="2103120"/>
+            <a:ext cx="2825496" cy="1920240"/>
           </a:xfrm>
           <a:prstGeom prst="rect">
             <a:avLst/>
@@ -5319,12 +5306,12 @@
           <a:lstStyle/>
           <a:p>
             <a:r>
-              <a:rPr sz="1450" b="0">
+              <a:rPr sz="1400" b="0">
                 <a:solidFill>
                   <a:srgbClr val="334155"/>
                 </a:solidFill>
               </a:rPr>
-              <a:t>Los endpoints operativos requieren Bearer token. La clave se custodia en Key Vault y se facilita al tribunal en el documento de enlaces.</a:t>
+              <a:t>Los endpoints operativos requieren Bearer token. La clave se custodia en Key Vault.</a:t>
             </a:r>
           </a:p>
         </p:txBody>
@@ -5348,7 +5335,7 @@
           </a:solidFill>
           <a:ln>
             <a:solidFill>
-              <a:srgbClr val="DBEAFE"/>
+              <a:srgbClr val="D2E1F0"/>
             </a:solidFill>
           </a:ln>
         </p:spPr>
@@ -5382,8 +5369,8 @@
         </p:nvSpPr>
         <p:spPr>
           <a:xfrm>
-            <a:off x="4645152" y="1746504"/>
-            <a:ext cx="2825496" cy="292608"/>
+            <a:off x="4645152" y="1737360"/>
+            <a:ext cx="2825496" cy="274320"/>
           </a:xfrm>
           <a:prstGeom prst="rect">
             <a:avLst/>
@@ -5397,7 +5384,7 @@
           <a:lstStyle/>
           <a:p>
             <a:r>
-              <a:rPr sz="1900" b="1">
+              <a:rPr sz="1800" b="1">
                 <a:solidFill>
                   <a:srgbClr val="149496"/>
                 </a:solidFill>
@@ -5415,8 +5402,8 @@
         </p:nvSpPr>
         <p:spPr>
           <a:xfrm>
-            <a:off x="4645152" y="2130552"/>
-            <a:ext cx="2825496" cy="1856232"/>
+            <a:off x="4645152" y="2103120"/>
+            <a:ext cx="2825496" cy="1920240"/>
           </a:xfrm>
           <a:prstGeom prst="rect">
             <a:avLst/>
@@ -5430,12 +5417,12 @@
           <a:lstStyle/>
           <a:p>
             <a:r>
-              <a:rPr sz="1450" b="0">
+              <a:rPr sz="1400" b="0">
                 <a:solidFill>
                   <a:srgbClr val="334155"/>
                 </a:solidFill>
               </a:rPr>
-              <a:t>App Service utiliza Managed Identity para acceder a secretos sin guardar credenciales en código fuente.</a:t>
+              <a:t>App Service accede a secretos sin credenciales cloud embebidas en el código.</a:t>
             </a:r>
           </a:p>
         </p:txBody>
@@ -5459,7 +5446,7 @@
           </a:solidFill>
           <a:ln>
             <a:solidFill>
-              <a:srgbClr val="DBEAFE"/>
+              <a:srgbClr val="D2E1F0"/>
             </a:solidFill>
           </a:ln>
         </p:spPr>
@@ -5493,8 +5480,8 @@
         </p:nvSpPr>
         <p:spPr>
           <a:xfrm>
-            <a:off x="8439912" y="1746504"/>
-            <a:ext cx="2825496" cy="292608"/>
+            <a:off x="8439912" y="1737360"/>
+            <a:ext cx="2825496" cy="274320"/>
           </a:xfrm>
           <a:prstGeom prst="rect">
             <a:avLst/>
@@ -5508,12 +5495,12 @@
           <a:lstStyle/>
           <a:p>
             <a:r>
-              <a:rPr sz="1900" b="1">
-                <a:solidFill>
-                  <a:srgbClr val="168048"/>
-                </a:solidFill>
-              </a:rPr>
-              <a:t>Datos</a:t>
+              <a:rPr sz="1800" b="1">
+                <a:solidFill>
+                  <a:srgbClr val="228B53"/>
+                </a:solidFill>
+              </a:rPr>
+              <a:t>Cosmos DB</a:t>
             </a:r>
           </a:p>
         </p:txBody>
@@ -5526,8 +5513,8 @@
         </p:nvSpPr>
         <p:spPr>
           <a:xfrm>
-            <a:off x="8439912" y="2130552"/>
-            <a:ext cx="2825496" cy="1856232"/>
+            <a:off x="8439912" y="2103120"/>
+            <a:ext cx="2825496" cy="1920240"/>
           </a:xfrm>
           <a:prstGeom prst="rect">
             <a:avLst/>
@@ -5541,12 +5528,12 @@
           <a:lstStyle/>
           <a:p>
             <a:r>
-              <a:rPr sz="1450" b="0">
+              <a:rPr sz="1400" b="0">
                 <a:solidFill>
                   <a:srgbClr val="334155"/>
                 </a:solidFill>
               </a:rPr>
-              <a:t>Cosmos DB almacena documentos privados; el portal y la Logic App nunca acceden directamente a la base de datos.</a:t>
+              <a:t>El portal y la Logic App no acceden directamente a la base de datos; toda la lógica pasa por la API.</a:t>
             </a:r>
           </a:p>
         </p:txBody>
@@ -5559,8 +5546,8 @@
         </p:nvSpPr>
         <p:spPr>
           <a:xfrm>
-            <a:off x="603504" y="6510528"/>
-            <a:ext cx="8595360" cy="201168"/>
+            <a:off x="566928" y="6510528"/>
+            <a:ext cx="8686800" cy="182880"/>
           </a:xfrm>
           <a:prstGeom prst="rect">
             <a:avLst/>
@@ -5592,8 +5579,8 @@
         </p:nvSpPr>
         <p:spPr>
           <a:xfrm>
-            <a:off x="10972800" y="6510528"/>
-            <a:ext cx="548640" cy="201168"/>
+            <a:off x="11064240" y="6510528"/>
+            <a:ext cx="457200" cy="182880"/>
           </a:xfrm>
           <a:prstGeom prst="rect">
             <a:avLst/>
@@ -5652,8 +5639,8 @@
         </p:nvSpPr>
         <p:spPr>
           <a:xfrm>
-            <a:off x="603504" y="347472"/>
-            <a:ext cx="9692640" cy="502920"/>
+            <a:off x="566928" y="320040"/>
+            <a:ext cx="10058400" cy="502920"/>
           </a:xfrm>
           <a:prstGeom prst="rect">
             <a:avLst/>
@@ -5685,8 +5672,8 @@
         </p:nvSpPr>
         <p:spPr>
           <a:xfrm>
-            <a:off x="621792" y="868680"/>
-            <a:ext cx="9692640" cy="320040"/>
+            <a:off x="585216" y="841248"/>
+            <a:ext cx="10058400" cy="320040"/>
           </a:xfrm>
           <a:prstGeom prst="rect">
             <a:avLst/>
@@ -5718,8 +5705,8 @@
         </p:nvSpPr>
         <p:spPr>
           <a:xfrm>
-            <a:off x="603504" y="1243584"/>
-            <a:ext cx="11018520" cy="27432"/>
+            <a:off x="566928" y="1207008"/>
+            <a:ext cx="11064240" cy="27432"/>
           </a:xfrm>
           <a:prstGeom prst="rect">
             <a:avLst/>
@@ -5790,7 +5777,7 @@
           </a:solidFill>
           <a:ln>
             <a:solidFill>
-              <a:srgbClr val="DBEAFE"/>
+              <a:srgbClr val="D2E1F0"/>
             </a:solidFill>
           </a:ln>
         </p:spPr>
@@ -5824,8 +5811,8 @@
         </p:nvSpPr>
         <p:spPr>
           <a:xfrm>
-            <a:off x="8485632" y="1883664"/>
-            <a:ext cx="2231136" cy="292608"/>
+            <a:off x="8485632" y="1874519"/>
+            <a:ext cx="2231136" cy="274320"/>
           </a:xfrm>
           <a:prstGeom prst="rect">
             <a:avLst/>
@@ -5839,7 +5826,7 @@
           <a:lstStyle/>
           <a:p>
             <a:r>
-              <a:rPr sz="1900" b="1">
+              <a:rPr sz="1800" b="1">
                 <a:solidFill>
                   <a:srgbClr val="149496"/>
                 </a:solidFill>
@@ -5857,8 +5844,8 @@
         </p:nvSpPr>
         <p:spPr>
           <a:xfrm>
-            <a:off x="8485632" y="2267712"/>
-            <a:ext cx="2231136" cy="1673351"/>
+            <a:off x="8485632" y="2240280"/>
+            <a:ext cx="2231136" cy="1737360"/>
           </a:xfrm>
           <a:prstGeom prst="rect">
             <a:avLst/>
@@ -5872,12 +5859,12 @@
           <a:lstStyle/>
           <a:p>
             <a:r>
-              <a:rPr sz="1450" b="0">
+              <a:rPr sz="1400" b="0">
                 <a:solidFill>
                   <a:srgbClr val="334155"/>
                 </a:solidFill>
               </a:rPr>
-              <a:t>Zube recoge sprints, HU, prioridades y story points. GitHub aporta histórico de commits y releases.</a:t>
+              <a:t>Zube recoge sprints, HU, prioridades y story points. GitHub aporta commits y releases.</a:t>
             </a:r>
           </a:p>
         </p:txBody>
@@ -5890,8 +5877,8 @@
         </p:nvSpPr>
         <p:spPr>
           <a:xfrm>
-            <a:off x="603504" y="6510528"/>
-            <a:ext cx="8595360" cy="201168"/>
+            <a:off x="566928" y="6510528"/>
+            <a:ext cx="8686800" cy="182880"/>
           </a:xfrm>
           <a:prstGeom prst="rect">
             <a:avLst/>
@@ -5923,8 +5910,8 @@
         </p:nvSpPr>
         <p:spPr>
           <a:xfrm>
-            <a:off x="10972800" y="6510528"/>
-            <a:ext cx="548640" cy="201168"/>
+            <a:off x="11064240" y="6510528"/>
+            <a:ext cx="457200" cy="182880"/>
           </a:xfrm>
           <a:prstGeom prst="rect">
             <a:avLst/>
@@ -5983,8 +5970,8 @@
         </p:nvSpPr>
         <p:spPr>
           <a:xfrm>
-            <a:off x="603504" y="347472"/>
-            <a:ext cx="9692640" cy="502920"/>
+            <a:off x="566928" y="320040"/>
+            <a:ext cx="10058400" cy="502920"/>
           </a:xfrm>
           <a:prstGeom prst="rect">
             <a:avLst/>
@@ -6016,8 +6003,8 @@
         </p:nvSpPr>
         <p:spPr>
           <a:xfrm>
-            <a:off x="621792" y="868680"/>
-            <a:ext cx="9692640" cy="320040"/>
+            <a:off x="585216" y="841248"/>
+            <a:ext cx="10058400" cy="320040"/>
           </a:xfrm>
           <a:prstGeom prst="rect">
             <a:avLst/>
@@ -6049,8 +6036,8 @@
         </p:nvSpPr>
         <p:spPr>
           <a:xfrm>
-            <a:off x="603504" y="1243584"/>
-            <a:ext cx="11018520" cy="27432"/>
+            <a:off x="566928" y="1207008"/>
+            <a:ext cx="11064240" cy="27432"/>
           </a:xfrm>
           <a:prstGeom prst="rect">
             <a:avLst/>
@@ -6103,7 +6090,7 @@
           </a:solidFill>
           <a:ln>
             <a:solidFill>
-              <a:srgbClr val="DBEAFE"/>
+              <a:srgbClr val="D2E1F0"/>
             </a:solidFill>
           </a:ln>
         </p:spPr>
@@ -6137,8 +6124,8 @@
         </p:nvSpPr>
         <p:spPr>
           <a:xfrm>
-            <a:off x="896112" y="1746504"/>
-            <a:ext cx="2596896" cy="292608"/>
+            <a:off x="896112" y="1737360"/>
+            <a:ext cx="2596896" cy="274320"/>
           </a:xfrm>
           <a:prstGeom prst="rect">
             <a:avLst/>
@@ -6152,9 +6139,9 @@
           <a:lstStyle/>
           <a:p>
             <a:r>
-              <a:rPr sz="1900" b="1">
-                <a:solidFill>
-                  <a:srgbClr val="168048"/>
+              <a:rPr sz="1800" b="1">
+                <a:solidFill>
+                  <a:srgbClr val="228B53"/>
                 </a:solidFill>
               </a:rPr>
               <a:t>Pruebas</a:t>
@@ -6170,8 +6157,8 @@
         </p:nvSpPr>
         <p:spPr>
           <a:xfrm>
-            <a:off x="896112" y="2130552"/>
-            <a:ext cx="2596896" cy="1490472"/>
+            <a:off x="896112" y="2103120"/>
+            <a:ext cx="2596896" cy="1554480"/>
           </a:xfrm>
           <a:prstGeom prst="rect">
             <a:avLst/>
@@ -6185,7 +6172,7 @@
           <a:lstStyle/>
           <a:p>
             <a:r>
-              <a:rPr sz="1450" b="0">
+              <a:rPr sz="1400" b="0">
                 <a:solidFill>
                   <a:srgbClr val="334155"/>
                 </a:solidFill>
@@ -6214,7 +6201,7 @@
           </a:solidFill>
           <a:ln>
             <a:solidFill>
-              <a:srgbClr val="DBEAFE"/>
+              <a:srgbClr val="D2E1F0"/>
             </a:solidFill>
           </a:ln>
         </p:spPr>
@@ -6248,8 +6235,8 @@
         </p:nvSpPr>
         <p:spPr>
           <a:xfrm>
-            <a:off x="4690872" y="1746504"/>
-            <a:ext cx="2596896" cy="292608"/>
+            <a:off x="4690872" y="1737360"/>
+            <a:ext cx="2596896" cy="274320"/>
           </a:xfrm>
           <a:prstGeom prst="rect">
             <a:avLst/>
@@ -6263,7 +6250,7 @@
           <a:lstStyle/>
           <a:p>
             <a:r>
-              <a:rPr sz="1900" b="1">
+              <a:rPr sz="1800" b="1">
                 <a:solidFill>
                   <a:srgbClr val="0078D4"/>
                 </a:solidFill>
@@ -6281,8 +6268,8 @@
         </p:nvSpPr>
         <p:spPr>
           <a:xfrm>
-            <a:off x="4690872" y="2130552"/>
-            <a:ext cx="2596896" cy="1490472"/>
+            <a:off x="4690872" y="2103120"/>
+            <a:ext cx="2596896" cy="1554480"/>
           </a:xfrm>
           <a:prstGeom prst="rect">
             <a:avLst/>
@@ -6296,12 +6283,12 @@
           <a:lstStyle/>
           <a:p>
             <a:r>
-              <a:rPr sz="1450" b="0">
+              <a:rPr sz="1400" b="0">
                 <a:solidFill>
                   <a:srgbClr val="334155"/>
                 </a:solidFill>
               </a:rPr>
-              <a:t>Quality Gate aprobado, sin issues de seguridad abiertos y duplicación controlada.</a:t>
+              <a:t>Quality Gate aprobado en el análisis final del 30 de junio.</a:t>
             </a:r>
           </a:p>
         </p:txBody>
@@ -6325,7 +6312,7 @@
           </a:solidFill>
           <a:ln>
             <a:solidFill>
-              <a:srgbClr val="DBEAFE"/>
+              <a:srgbClr val="D2E1F0"/>
             </a:solidFill>
           </a:ln>
         </p:spPr>
@@ -6359,8 +6346,8 @@
         </p:nvSpPr>
         <p:spPr>
           <a:xfrm>
-            <a:off x="8485632" y="1746504"/>
-            <a:ext cx="2596896" cy="292608"/>
+            <a:off x="8485632" y="1737360"/>
+            <a:ext cx="2596896" cy="274320"/>
           </a:xfrm>
           <a:prstGeom prst="rect">
             <a:avLst/>
@@ -6374,7 +6361,7 @@
           <a:lstStyle/>
           <a:p>
             <a:r>
-              <a:rPr sz="1900" b="1">
+              <a:rPr sz="1800" b="1">
                 <a:solidFill>
                   <a:srgbClr val="149496"/>
                 </a:solidFill>
@@ -6392,8 +6379,8 @@
         </p:nvSpPr>
         <p:spPr>
           <a:xfrm>
-            <a:off x="8485632" y="2130552"/>
-            <a:ext cx="2596896" cy="1490472"/>
+            <a:off x="8485632" y="2103120"/>
+            <a:ext cx="2596896" cy="1554480"/>
           </a:xfrm>
           <a:prstGeom prst="rect">
             <a:avLst/>
@@ -6407,12 +6394,12 @@
           <a:lstStyle/>
           <a:p>
             <a:r>
-              <a:rPr sz="1450" b="0">
+              <a:rPr sz="1400" b="0">
                 <a:solidFill>
                   <a:srgbClr val="334155"/>
                 </a:solidFill>
               </a:rPr>
-              <a:t>/health confirma la persistencia activa en Cosmos DB y los endpoints de demo responden en la nube.</a:t>
+              <a:t>/health confirma storage_mode=cosmos y los endpoints responden en la nube.</a:t>
             </a:r>
           </a:p>
         </p:txBody>
@@ -6449,8 +6436,8 @@
         </p:nvSpPr>
         <p:spPr>
           <a:xfrm>
-            <a:off x="603504" y="6510528"/>
-            <a:ext cx="8595360" cy="201168"/>
+            <a:off x="566928" y="6510528"/>
+            <a:ext cx="8686800" cy="182880"/>
           </a:xfrm>
           <a:prstGeom prst="rect">
             <a:avLst/>
@@ -6482,8 +6469,8 @@
         </p:nvSpPr>
         <p:spPr>
           <a:xfrm>
-            <a:off x="10972800" y="6510528"/>
-            <a:ext cx="548640" cy="201168"/>
+            <a:off x="11064240" y="6510528"/>
+            <a:ext cx="457200" cy="182880"/>
           </a:xfrm>
           <a:prstGeom prst="rect">
             <a:avLst/>
@@ -6542,8 +6529,8 @@
         </p:nvSpPr>
         <p:spPr>
           <a:xfrm>
-            <a:off x="603504" y="347472"/>
-            <a:ext cx="9692640" cy="502920"/>
+            <a:off x="566928" y="320040"/>
+            <a:ext cx="10058400" cy="502920"/>
           </a:xfrm>
           <a:prstGeom prst="rect">
             <a:avLst/>
@@ -6562,7 +6549,7 @@
                   <a:srgbClr val="0F2F4A"/>
                 </a:solidFill>
               </a:rPr>
-              <a:t>Limitaciones y decisiones</a:t>
+              <a:t>Costes y buenas prácticas</a:t>
             </a:r>
           </a:p>
         </p:txBody>
@@ -6575,8 +6562,8 @@
         </p:nvSpPr>
         <p:spPr>
           <a:xfrm>
-            <a:off x="621792" y="868680"/>
-            <a:ext cx="9692640" cy="320040"/>
+            <a:off x="585216" y="841248"/>
+            <a:ext cx="10058400" cy="320040"/>
           </a:xfrm>
           <a:prstGeom prst="rect">
             <a:avLst/>
@@ -6595,7 +6582,7 @@
                   <a:srgbClr val="334155"/>
                 </a:solidFill>
               </a:rPr>
-              <a:t>Alcance realista y justificable</a:t>
+              <a:t>Alcance académico con recursos controlados</a:t>
             </a:r>
           </a:p>
         </p:txBody>
@@ -6608,8 +6595,8 @@
         </p:nvSpPr>
         <p:spPr>
           <a:xfrm>
-            <a:off x="603504" y="1243584"/>
-            <a:ext cx="11018520" cy="27432"/>
+            <a:off x="566928" y="1207008"/>
+            <a:ext cx="11064240" cy="27432"/>
           </a:xfrm>
           <a:prstGeom prst="rect">
             <a:avLst/>
@@ -6643,16 +6630,40 @@
           </a:p>
         </p:txBody>
       </p:sp>
-      <p:sp>
-        <p:nvSpPr>
-          <p:cNvPr id="5" name="TextBox 4"/>
+      <p:pic>
+        <p:nvPicPr>
+          <p:cNvPr id="5" name="Picture 4" descr="grafico_costes_estimados.png"/>
+          <p:cNvPicPr>
+            <a:picLocks noChangeAspect="1"/>
+          </p:cNvPicPr>
+          <p:nvPr/>
+        </p:nvPicPr>
+        <p:blipFill>
+          <a:blip r:embed="rId2"/>
+          <a:stretch>
+            <a:fillRect/>
+          </a:stretch>
+        </p:blipFill>
+        <p:spPr>
+          <a:xfrm>
+            <a:off x="502920" y="1325880"/>
+            <a:ext cx="10972800" cy="4892040"/>
+          </a:xfrm>
+          <a:prstGeom prst="rect">
+            <a:avLst/>
+          </a:prstGeom>
+        </p:spPr>
+      </p:pic>
+      <p:sp>
+        <p:nvSpPr>
+          <p:cNvPr id="6" name="TextBox 5"/>
           <p:cNvSpPr txBox="1"/>
           <p:nvPr/>
         </p:nvSpPr>
         <p:spPr>
           <a:xfrm>
-            <a:off x="868680" y="1600200"/>
-            <a:ext cx="10241280" cy="3383280"/>
+            <a:off x="566928" y="6510528"/>
+            <a:ext cx="8686800" cy="182880"/>
           </a:xfrm>
           <a:prstGeom prst="rect">
             <a:avLst/>
@@ -6665,73 +6676,6 @@
           </a:bodyPr>
           <a:lstStyle/>
           <a:p>
-            <a:pPr/>
-            <a:r>
-              <a:rPr sz="2200">
-                <a:solidFill>
-                  <a:srgbClr val="334155"/>
-                </a:solidFill>
-              </a:rPr>
-              <a:t>• No sustituye a una plataforma ITSM comercial; es un prototipo cloud académico validado.</a:t>
-            </a:r>
-          </a:p>
-          <a:p>
-            <a:pPr/>
-            <a:r>
-              <a:rPr sz="2200">
-                <a:solidFill>
-                  <a:srgbClr val="334155"/>
-                </a:solidFill>
-              </a:rPr>
-              <a:t>• La clasificación es ligera y basada en reglas, adecuada para explicar el valor sin depender de modelos externos.</a:t>
-            </a:r>
-          </a:p>
-          <a:p>
-            <a:pPr/>
-            <a:r>
-              <a:rPr sz="2200">
-                <a:solidFill>
-                  <a:srgbClr val="334155"/>
-                </a:solidFill>
-              </a:rPr>
-              <a:t>• Cosmos DB mejora concurrencia y escalabilidad frente al blob inicial, manteniendo bajo coste con Free Tier.</a:t>
-            </a:r>
-          </a:p>
-          <a:p>
-            <a:pPr/>
-            <a:r>
-              <a:rPr sz="2200">
-                <a:solidFill>
-                  <a:srgbClr val="334155"/>
-                </a:solidFill>
-              </a:rPr>
-              <a:t>• La solución se diseñó para demostración segura: sin datos personales reales ni secretos en repositorio.</a:t>
-            </a:r>
-          </a:p>
-        </p:txBody>
-      </p:sp>
-      <p:sp>
-        <p:nvSpPr>
-          <p:cNvPr id="6" name="TextBox 5"/>
-          <p:cNvSpPr txBox="1"/>
-          <p:nvPr/>
-        </p:nvSpPr>
-        <p:spPr>
-          <a:xfrm>
-            <a:off x="603504" y="6510528"/>
-            <a:ext cx="8595360" cy="201168"/>
-          </a:xfrm>
-          <a:prstGeom prst="rect">
-            <a:avLst/>
-          </a:prstGeom>
-          <a:noFill/>
-        </p:spPr>
-        <p:txBody>
-          <a:bodyPr wrap="none">
-            <a:spAutoFit/>
-          </a:bodyPr>
-          <a:lstStyle/>
-          <a:p>
             <a:r>
               <a:rPr sz="1000" b="0">
                 <a:solidFill>
@@ -6751,8 +6695,8 @@
         </p:nvSpPr>
         <p:spPr>
           <a:xfrm>
-            <a:off x="10972800" y="6510528"/>
-            <a:ext cx="548640" cy="201168"/>
+            <a:off x="11064240" y="6510528"/>
+            <a:ext cx="457200" cy="182880"/>
           </a:xfrm>
           <a:prstGeom prst="rect">
             <a:avLst/>

--- a/docs/entrega/presentacion-defensa-tfg.pptx
+++ b/docs/entrega/presentacion-defensa-tfg.pptx
@@ -114,128 +114,6 @@
     </a:lvl9pPr>
   </p:defaultTextStyle>
 </p:presentation>
-</file>
-
-<file path=ppt/charts/chart1.xml><?xml version="1.0" encoding="utf-8"?>
-<c:chartSpace xmlns:c="http://schemas.openxmlformats.org/drawingml/2006/chart" xmlns:a="http://schemas.openxmlformats.org/drawingml/2006/main" xmlns:r="http://schemas.openxmlformats.org/officeDocument/2006/relationships">
-  <c:date1904 val="0"/>
-  <c:chart>
-    <c:autoTitleDeleted val="0"/>
-    <c:plotArea>
-      <c:barChart>
-        <c:barDir val="col"/>
-        <c:grouping val="clustered"/>
-        <c:ser>
-          <c:idx val="0"/>
-          <c:order val="0"/>
-          <c:tx>
-            <c:strRef>
-              <c:f>Sheet1!$B$1</c:f>
-              <c:strCache>
-                <c:ptCount val="1"/>
-                <c:pt idx="0">
-                  <c:v>Story points cerrados</c:v>
-                </c:pt>
-              </c:strCache>
-            </c:strRef>
-          </c:tx>
-          <c:cat>
-            <c:strRef>
-              <c:f>Sheet1!$A$2:$A$6</c:f>
-              <c:strCache>
-                <c:ptCount val="5"/>
-                <c:pt idx="0">
-                  <c:v>Sprint 1</c:v>
-                </c:pt>
-                <c:pt idx="1">
-                  <c:v>Sprint 2</c:v>
-                </c:pt>
-                <c:pt idx="2">
-                  <c:v>Sprint 3</c:v>
-                </c:pt>
-                <c:pt idx="3">
-                  <c:v>Sprint 4</c:v>
-                </c:pt>
-                <c:pt idx="4">
-                  <c:v>Sprint 5</c:v>
-                </c:pt>
-              </c:strCache>
-            </c:strRef>
-          </c:cat>
-          <c:val>
-            <c:numRef>
-              <c:f>Sheet1!$B$2:$B$6</c:f>
-              <c:numCache>
-                <c:formatCode>General</c:formatCode>
-                <c:ptCount val="5"/>
-                <c:pt idx="0">
-                  <c:v>21</c:v>
-                </c:pt>
-                <c:pt idx="1">
-                  <c:v>31</c:v>
-                </c:pt>
-                <c:pt idx="2">
-                  <c:v>5</c:v>
-                </c:pt>
-                <c:pt idx="3">
-                  <c:v>34</c:v>
-                </c:pt>
-                <c:pt idx="4">
-                  <c:v>23</c:v>
-                </c:pt>
-              </c:numCache>
-            </c:numRef>
-          </c:val>
-        </c:ser>
-        <c:axId val="-2068027336"/>
-        <c:axId val="-2113994440"/>
-      </c:barChart>
-      <c:catAx>
-        <c:axId val="-2068027336"/>
-        <c:scaling>
-          <c:orientation val="minMax"/>
-        </c:scaling>
-        <c:delete val="0"/>
-        <c:axPos val="b"/>
-        <c:majorTickMark val="out"/>
-        <c:minorTickMark val="none"/>
-        <c:tickLblPos val="nextTo"/>
-        <c:crossAx val="-2113994440"/>
-        <c:crosses val="autoZero"/>
-        <c:auto val="1"/>
-        <c:lblAlgn val="ctr"/>
-        <c:lblOffset val="100"/>
-        <c:noMultiLvlLbl val="0"/>
-      </c:catAx>
-      <c:valAx>
-        <c:axId val="-2113994440"/>
-        <c:scaling/>
-        <c:delete val="0"/>
-        <c:axPos val="l"/>
-        <c:majorGridlines/>
-        <c:majorTickMark val="out"/>
-        <c:minorTickMark val="none"/>
-        <c:tickLblPos val="nextTo"/>
-        <c:crossAx val="-2068027336"/>
-        <c:crosses val="autoZero"/>
-      </c:valAx>
-    </c:plotArea>
-    <c:dispBlanksAs val="gap"/>
-  </c:chart>
-  <c:txPr>
-    <a:bodyPr/>
-    <a:lstStyle/>
-    <a:p>
-      <a:pPr>
-        <a:defRPr sz="1800"/>
-      </a:pPr>
-      <a:endParaRPr lang="en-US"/>
-    </a:p>
-  </c:txPr>
-  <c:externalData r:id="rId1">
-    <c:autoUpdate val="0"/>
-  </c:externalData>
-</c:chartSpace>
 </file>
 
 <file path=ppt/slideLayouts/slideLayout1.xml><?xml version="1.0" encoding="utf-8"?>
@@ -3215,7 +3093,7 @@
     <p:bg>
       <p:bgPr>
         <a:solidFill>
-          <a:srgbClr val="0C1220"/>
+          <a:srgbClr val="EEF7FF"/>
         </a:solidFill>
         <a:effectLst/>
       </p:bgPr>
@@ -3227,46 +3105,22 @@
         <p:nvPr/>
       </p:nvGrpSpPr>
       <p:grpSpPr/>
-      <p:pic>
-        <p:nvPicPr>
-          <p:cNvPr id="2" name="Picture 1" descr="cartel-a3-final.png"/>
-          <p:cNvPicPr>
-            <a:picLocks noChangeAspect="1"/>
-          </p:cNvPicPr>
-          <p:nvPr/>
-        </p:nvPicPr>
-        <p:blipFill>
-          <a:blip r:embed="rId2"/>
-          <a:stretch>
-            <a:fillRect/>
-          </a:stretch>
-        </p:blipFill>
+      <p:sp>
+        <p:nvSpPr>
+          <p:cNvPr id="2" name="Rectangle 1"/>
+          <p:cNvSpPr/>
+          <p:nvPr/>
+        </p:nvSpPr>
         <p:spPr>
           <a:xfrm>
             <a:off x="0" y="0"/>
-            <a:ext cx="12191695" cy="6858000"/>
-          </a:xfrm>
-          <a:prstGeom prst="rect">
-            <a:avLst/>
-          </a:prstGeom>
-        </p:spPr>
-      </p:pic>
-      <p:sp>
-        <p:nvSpPr>
-          <p:cNvPr id="3" name="Rectangle 2"/>
-          <p:cNvSpPr/>
-          <p:nvPr/>
-        </p:nvSpPr>
-        <p:spPr>
-          <a:xfrm>
-            <a:off x="0" y="0"/>
-            <a:ext cx="12191695" cy="6858000"/>
+            <a:ext cx="12191695" cy="1143000"/>
           </a:xfrm>
           <a:prstGeom prst="rect">
             <a:avLst/>
           </a:prstGeom>
           <a:solidFill>
-            <a:srgbClr val="0B1220"/>
+            <a:srgbClr val="0078D4"/>
           </a:solidFill>
           <a:ln>
             <a:noFill/>
@@ -3296,14 +3150,57 @@
       </p:sp>
       <p:sp>
         <p:nvSpPr>
+          <p:cNvPr id="3" name="Rectangle 2"/>
+          <p:cNvSpPr/>
+          <p:nvPr/>
+        </p:nvSpPr>
+        <p:spPr>
+          <a:xfrm>
+            <a:off x="0" y="6172200"/>
+            <a:ext cx="12191695" cy="685800"/>
+          </a:xfrm>
+          <a:prstGeom prst="rect">
+            <a:avLst/>
+          </a:prstGeom>
+          <a:solidFill>
+            <a:srgbClr val="12304A"/>
+          </a:solidFill>
+          <a:ln>
+            <a:noFill/>
+          </a:ln>
+        </p:spPr>
+        <p:style>
+          <a:lnRef idx="1">
+            <a:schemeClr val="accent1"/>
+          </a:lnRef>
+          <a:fillRef idx="3">
+            <a:schemeClr val="accent1"/>
+          </a:fillRef>
+          <a:effectRef idx="2">
+            <a:schemeClr val="accent1"/>
+          </a:effectRef>
+          <a:fontRef idx="minor">
+            <a:schemeClr val="lt1"/>
+          </a:fontRef>
+        </p:style>
+        <p:txBody>
+          <a:bodyPr rtlCol="0" anchor="ctr"/>
+          <a:lstStyle/>
+          <a:p>
+            <a:pPr algn="ctr"/>
+          </a:p>
+        </p:txBody>
+      </p:sp>
+      <p:sp>
+        <p:nvSpPr>
           <p:cNvPr id="4" name="TextBox 3"/>
           <p:cNvSpPr txBox="1"/>
           <p:nvPr/>
         </p:nvSpPr>
         <p:spPr>
           <a:xfrm>
-            <a:off x="685800" y="914400"/>
-            <a:ext cx="8046720" cy="1554480"/>
+            <a:off x="594360" y="384048"/>
+            <a:ext cx="10789920" cy="411480"/>
           </a:xfrm>
           <a:prstGeom prst="rect">
             <a:avLst/>
@@ -3311,18 +3208,20 @@
           <a:noFill/>
         </p:spPr>
         <p:txBody>
-          <a:bodyPr wrap="none">
+          <a:bodyPr wrap="square" lIns="45720" rIns="45720">
             <a:spAutoFit/>
           </a:bodyPr>
           <a:lstStyle/>
           <a:p>
-            <a:r>
-              <a:rPr sz="4800" b="1">
+            <a:pPr>
+              <a:defRPr sz="1600" b="1">
                 <a:solidFill>
                   <a:srgbClr val="FFFFFF"/>
                 </a:solidFill>
-              </a:rPr>
-              <a:t>Servicio empresarial seguro en Microsoft Azure</a:t>
+              </a:defRPr>
+            </a:pPr>
+            <a:r>
+              <a:t>Trabajo Fin de Grado · Universidad de Burgos</a:t>
             </a:r>
           </a:p>
         </p:txBody>
@@ -3335,8 +3234,8 @@
         </p:nvSpPr>
         <p:spPr>
           <a:xfrm>
-            <a:off x="713232" y="2651760"/>
-            <a:ext cx="7132320" cy="822960"/>
+            <a:off x="685800" y="1508760"/>
+            <a:ext cx="7498079" cy="1417320"/>
           </a:xfrm>
           <a:prstGeom prst="rect">
             <a:avLst/>
@@ -3344,27 +3243,114 @@
           <a:noFill/>
         </p:spPr>
         <p:txBody>
-          <a:bodyPr wrap="none">
+          <a:bodyPr wrap="square" lIns="45720" rIns="45720">
             <a:spAutoFit/>
           </a:bodyPr>
           <a:lstStyle/>
           <a:p>
-            <a:r>
-              <a:rPr sz="2300" b="0">
-                <a:solidFill>
-                  <a:srgbClr val="E2E8F0"/>
-                </a:solidFill>
-              </a:rPr>
-              <a:t>TFG · Grado en Ingeniería Informática</a:t>
-            </a:r>
-            <a:br/>
-            <a:r>
-              <a:rPr sz="2300" b="0">
-                <a:solidFill>
-                  <a:srgbClr val="E2E8F0"/>
-                </a:solidFill>
-              </a:rPr>
-              <a:t>Karima Drafli Rico</a:t>
+            <a:pPr>
+              <a:defRPr sz="3000" b="1">
+                <a:solidFill>
+                  <a:srgbClr val="12304A"/>
+                </a:solidFill>
+              </a:defRPr>
+            </a:pPr>
+            <a:r>
+              <a:t>Cloud Computing: Análisis, Diseño y Despliegue de un Servicio Empresarial Seguro en Microsoft Azure</a:t>
+            </a:r>
+          </a:p>
+        </p:txBody>
+      </p:sp>
+      <p:sp>
+        <p:nvSpPr>
+          <p:cNvPr id="6" name="TextBox 5"/>
+          <p:cNvSpPr txBox="1"/>
+          <p:nvPr/>
+        </p:nvSpPr>
+        <p:spPr>
+          <a:xfrm>
+            <a:off x="713232" y="3063240"/>
+            <a:ext cx="6400800" cy="685800"/>
+          </a:xfrm>
+          <a:prstGeom prst="rect">
+            <a:avLst/>
+          </a:prstGeom>
+          <a:noFill/>
+        </p:spPr>
+        <p:txBody>
+          <a:bodyPr wrap="square" lIns="45720" rIns="45720">
+            <a:spAutoFit/>
+          </a:bodyPr>
+          <a:lstStyle/>
+          <a:p>
+            <a:pPr>
+              <a:defRPr sz="1800" b="0">
+                <a:solidFill>
+                  <a:srgbClr val="4E5B6C"/>
+                </a:solidFill>
+              </a:defRPr>
+            </a:pPr>
+            <a:r>
+              <a:t>Plataforma cloud para automatizar solicitudes TI con portal web, API Flask, Cosmos DB, Key Vault, Logic App, Zube y SonarCloud.</a:t>
+            </a:r>
+          </a:p>
+        </p:txBody>
+      </p:sp>
+      <p:pic>
+        <p:nvPicPr>
+          <p:cNvPr id="7" name="Picture 6" descr="arquitectura_integral_tfg_azure.png"/>
+          <p:cNvPicPr>
+            <a:picLocks noChangeAspect="1"/>
+          </p:cNvPicPr>
+          <p:nvPr/>
+        </p:nvPicPr>
+        <p:blipFill>
+          <a:blip r:embed="rId2"/>
+          <a:stretch>
+            <a:fillRect/>
+          </a:stretch>
+        </p:blipFill>
+        <p:spPr>
+          <a:xfrm>
+            <a:off x="6741160" y="2926080"/>
+            <a:ext cx="4714239" cy="2651760"/>
+          </a:xfrm>
+          <a:prstGeom prst="rect">
+            <a:avLst/>
+          </a:prstGeom>
+        </p:spPr>
+      </p:pic>
+      <p:sp>
+        <p:nvSpPr>
+          <p:cNvPr id="8" name="TextBox 7"/>
+          <p:cNvSpPr txBox="1"/>
+          <p:nvPr/>
+        </p:nvSpPr>
+        <p:spPr>
+          <a:xfrm>
+            <a:off x="713232" y="6291072"/>
+            <a:ext cx="5303520" cy="274320"/>
+          </a:xfrm>
+          <a:prstGeom prst="rect">
+            <a:avLst/>
+          </a:prstGeom>
+          <a:noFill/>
+        </p:spPr>
+        <p:txBody>
+          <a:bodyPr wrap="square" lIns="45720" rIns="45720">
+            <a:spAutoFit/>
+          </a:bodyPr>
+          <a:lstStyle/>
+          <a:p>
+            <a:pPr>
+              <a:defRPr sz="1100" b="0">
+                <a:solidFill>
+                  <a:srgbClr val="FFFFFF"/>
+                </a:solidFill>
+              </a:defRPr>
+            </a:pPr>
+            <a:r>
+              <a:t>Karima Drafli Rico · Grado en Ingeniería Informática Online · Curso 2025-2026</a:t>
             </a:r>
           </a:p>
         </p:txBody>
@@ -3383,7 +3369,7 @@
     <p:bg>
       <p:bgPr>
         <a:solidFill>
-          <a:srgbClr val="F8FAFC"/>
+          <a:srgbClr val="FFFFFF"/>
         </a:solidFill>
         <a:effectLst/>
       </p:bgPr>
@@ -3397,80 +3383,14 @@
       <p:grpSpPr/>
       <p:sp>
         <p:nvSpPr>
-          <p:cNvPr id="2" name="TextBox 1"/>
-          <p:cNvSpPr txBox="1"/>
-          <p:nvPr/>
-        </p:nvSpPr>
-        <p:spPr>
-          <a:xfrm>
-            <a:off x="566928" y="320040"/>
-            <a:ext cx="10058400" cy="502920"/>
-          </a:xfrm>
-          <a:prstGeom prst="rect">
-            <a:avLst/>
-          </a:prstGeom>
-          <a:noFill/>
-        </p:spPr>
-        <p:txBody>
-          <a:bodyPr wrap="none">
-            <a:spAutoFit/>
-          </a:bodyPr>
-          <a:lstStyle/>
-          <a:p>
-            <a:r>
-              <a:rPr sz="3400" b="1">
-                <a:solidFill>
-                  <a:srgbClr val="0F2F4A"/>
-                </a:solidFill>
-              </a:rPr>
-              <a:t>Demostración propuesta</a:t>
-            </a:r>
-          </a:p>
-        </p:txBody>
-      </p:sp>
-      <p:sp>
-        <p:nvSpPr>
-          <p:cNvPr id="3" name="TextBox 2"/>
-          <p:cNvSpPr txBox="1"/>
-          <p:nvPr/>
-        </p:nvSpPr>
-        <p:spPr>
-          <a:xfrm>
-            <a:off x="585216" y="841248"/>
-            <a:ext cx="10058400" cy="320040"/>
-          </a:xfrm>
-          <a:prstGeom prst="rect">
-            <a:avLst/>
-          </a:prstGeom>
-          <a:noFill/>
-        </p:spPr>
-        <p:txBody>
-          <a:bodyPr wrap="none">
-            <a:spAutoFit/>
-          </a:bodyPr>
-          <a:lstStyle/>
-          <a:p>
-            <a:r>
-              <a:rPr sz="1700" b="0">
-                <a:solidFill>
-                  <a:srgbClr val="334155"/>
-                </a:solidFill>
-              </a:rPr>
-              <a:t>Recorrido para defensa y vídeo</a:t>
-            </a:r>
-          </a:p>
-        </p:txBody>
-      </p:sp>
-      <p:sp>
-        <p:nvSpPr>
-          <p:cNvPr id="4" name="Rectangle 3"/>
+          <p:cNvPr id="2" name="Rectangle 1"/>
           <p:cNvSpPr/>
           <p:nvPr/>
         </p:nvSpPr>
         <p:spPr>
           <a:xfrm>
-            <a:off x="566928" y="1207008"/>
-            <a:ext cx="11064240" cy="27432"/>
+            <a:off x="0" y="0"/>
+            <a:ext cx="12191695" cy="146304"/>
           </a:xfrm>
           <a:prstGeom prst="rect">
             <a:avLst/>
@@ -3506,14 +3426,14 @@
       </p:sp>
       <p:sp>
         <p:nvSpPr>
-          <p:cNvPr id="5" name="TextBox 4"/>
+          <p:cNvPr id="3" name="TextBox 2"/>
           <p:cNvSpPr txBox="1"/>
           <p:nvPr/>
         </p:nvSpPr>
         <p:spPr>
           <a:xfrm>
-            <a:off x="868680" y="1600200"/>
-            <a:ext cx="10241280" cy="3657600"/>
+            <a:off x="502920" y="6446520"/>
+            <a:ext cx="11155680" cy="228600"/>
           </a:xfrm>
           <a:prstGeom prst="rect">
             <a:avLst/>
@@ -3526,67 +3446,29 @@
           </a:bodyPr>
           <a:lstStyle/>
           <a:p>
-            <a:r>
-              <a:rPr sz="2300">
-                <a:solidFill>
-                  <a:srgbClr val="334155"/>
-                </a:solidFill>
-              </a:rPr>
-              <a:t>• Abrir el portal desplegado y crear una solicitud.</a:t>
-            </a:r>
-          </a:p>
-          <a:p>
-            <a:r>
-              <a:rPr sz="2300">
-                <a:solidFill>
-                  <a:srgbClr val="334155"/>
-                </a:solidFill>
-              </a:rPr>
-              <a:t>• Mostrar clasificación, SLA, responsable e historial generado.</a:t>
-            </a:r>
-          </a:p>
-          <a:p>
-            <a:r>
-              <a:rPr sz="2300">
-                <a:solidFill>
-                  <a:srgbClr val="334155"/>
-                </a:solidFill>
-              </a:rPr>
-              <a:t>• Mostrar Logic App como entrada automática desde otro sistema.</a:t>
-            </a:r>
-          </a:p>
-          <a:p>
-            <a:r>
-              <a:rPr sz="2300">
-                <a:solidFill>
-                  <a:srgbClr val="334155"/>
-                </a:solidFill>
-              </a:rPr>
-              <a:t>• Comprobar /health con STORAGE_MODE=cosmos y la evidencia en Cosmos DB.</a:t>
-            </a:r>
-          </a:p>
-          <a:p>
-            <a:r>
-              <a:rPr sz="2300">
-                <a:solidFill>
-                  <a:srgbClr val="334155"/>
-                </a:solidFill>
-              </a:rPr>
-              <a:t>• Cerrar con SonarCloud, Zube y releases como evidencias de proceso.</a:t>
-            </a:r>
-          </a:p>
-        </p:txBody>
-      </p:sp>
-      <p:sp>
-        <p:nvSpPr>
-          <p:cNvPr id="6" name="TextBox 5"/>
+            <a:pPr>
+              <a:defRPr sz="800">
+                <a:solidFill>
+                  <a:srgbClr val="788291"/>
+                </a:solidFill>
+              </a:defRPr>
+            </a:pPr>
+            <a:r>
+              <a:t>Cloud Computing: servicio empresarial seguro en Microsoft Azure · Karima Drafli Rico</a:t>
+            </a:r>
+          </a:p>
+        </p:txBody>
+      </p:sp>
+      <p:sp>
+        <p:nvSpPr>
+          <p:cNvPr id="4" name="TextBox 3"/>
           <p:cNvSpPr txBox="1"/>
           <p:nvPr/>
         </p:nvSpPr>
         <p:spPr>
           <a:xfrm>
-            <a:off x="566928" y="6510528"/>
-            <a:ext cx="8686800" cy="182880"/>
+            <a:off x="502920" y="384048"/>
+            <a:ext cx="10972800" cy="548640"/>
           </a:xfrm>
           <a:prstGeom prst="rect">
             <a:avLst/>
@@ -3599,27 +3481,29 @@
           </a:bodyPr>
           <a:lstStyle/>
           <a:p>
-            <a:r>
-              <a:rPr sz="1000" b="0">
-                <a:solidFill>
-                  <a:srgbClr val="64748B"/>
-                </a:solidFill>
-              </a:rPr>
-              <a:t>Cloud Computing: servicio empresarial seguro en Microsoft Azure</a:t>
-            </a:r>
-          </a:p>
-        </p:txBody>
-      </p:sp>
-      <p:sp>
-        <p:nvSpPr>
-          <p:cNvPr id="7" name="TextBox 6"/>
+            <a:pPr>
+              <a:defRPr b="1" sz="3000">
+                <a:solidFill>
+                  <a:srgbClr val="12304A"/>
+                </a:solidFill>
+              </a:defRPr>
+            </a:pPr>
+            <a:r>
+              <a:t>Conclusiones</a:t>
+            </a:r>
+          </a:p>
+        </p:txBody>
+      </p:sp>
+      <p:sp>
+        <p:nvSpPr>
+          <p:cNvPr id="5" name="TextBox 4"/>
           <p:cNvSpPr txBox="1"/>
           <p:nvPr/>
         </p:nvSpPr>
         <p:spPr>
           <a:xfrm>
-            <a:off x="11064240" y="6510528"/>
-            <a:ext cx="457200" cy="182880"/>
+            <a:off x="530352" y="932688"/>
+            <a:ext cx="10789920" cy="320040"/>
           </a:xfrm>
           <a:prstGeom prst="rect">
             <a:avLst/>
@@ -3632,14 +3516,237 @@
           </a:bodyPr>
           <a:lstStyle/>
           <a:p>
-            <a:pPr algn="r"/>
-            <a:r>
-              <a:rPr sz="1000" b="0">
-                <a:solidFill>
-                  <a:srgbClr val="64748B"/>
-                </a:solidFill>
-              </a:rPr>
-              <a:t>10</a:t>
+            <a:pPr>
+              <a:defRPr sz="1400">
+                <a:solidFill>
+                  <a:srgbClr val="4E5B6C"/>
+                </a:solidFill>
+              </a:defRPr>
+            </a:pPr>
+            <a:r>
+              <a:t>Una solución cloud empresarial completa y defendible</a:t>
+            </a:r>
+          </a:p>
+        </p:txBody>
+      </p:sp>
+      <p:sp>
+        <p:nvSpPr>
+          <p:cNvPr id="6" name="TextBox 5"/>
+          <p:cNvSpPr txBox="1"/>
+          <p:nvPr/>
+        </p:nvSpPr>
+        <p:spPr>
+          <a:xfrm>
+            <a:off x="822960" y="1325880"/>
+            <a:ext cx="5486400" cy="3840480"/>
+          </a:xfrm>
+          <a:prstGeom prst="rect">
+            <a:avLst/>
+          </a:prstGeom>
+          <a:noFill/>
+        </p:spPr>
+        <p:txBody>
+          <a:bodyPr wrap="square">
+            <a:spAutoFit/>
+          </a:bodyPr>
+          <a:lstStyle/>
+          <a:p>
+            <a:pPr>
+              <a:spcAft>
+                <a:spcPts val="700"/>
+              </a:spcAft>
+              <a:defRPr sz="1800">
+                <a:solidFill>
+                  <a:srgbClr val="12304A"/>
+                </a:solidFill>
+              </a:defRPr>
+            </a:pPr>
+            <a:r>
+              <a:t>El prototipo cubre el flujo completo: solicitud, clasificación, aprobación, SLA, persistencia y métricas.</a:t>
+            </a:r>
+          </a:p>
+          <a:p>
+            <a:pPr>
+              <a:spcAft>
+                <a:spcPts val="700"/>
+              </a:spcAft>
+              <a:defRPr sz="1800">
+                <a:solidFill>
+                  <a:srgbClr val="12304A"/>
+                </a:solidFill>
+              </a:defRPr>
+            </a:pPr>
+            <a:r>
+              <a:t>Azure aporta despliegue real, seguridad de secretos, automatización y observabilidad.</a:t>
+            </a:r>
+          </a:p>
+          <a:p>
+            <a:pPr>
+              <a:spcAft>
+                <a:spcPts val="700"/>
+              </a:spcAft>
+              <a:defRPr sz="1800">
+                <a:solidFill>
+                  <a:srgbClr val="12304A"/>
+                </a:solidFill>
+              </a:defRPr>
+            </a:pPr>
+            <a:r>
+              <a:t>Cosmos DB mejora el diseño de datos respecto al blob único inicial.</a:t>
+            </a:r>
+          </a:p>
+          <a:p>
+            <a:pPr>
+              <a:spcAft>
+                <a:spcPts val="700"/>
+              </a:spcAft>
+              <a:defRPr sz="1800">
+                <a:solidFill>
+                  <a:srgbClr val="12304A"/>
+                </a:solidFill>
+              </a:defRPr>
+            </a:pPr>
+            <a:r>
+              <a:t>La validación combina pruebas automáticas, SonarCloud, Zube, GitHub y evidencias del despliegue.</a:t>
+            </a:r>
+          </a:p>
+        </p:txBody>
+      </p:sp>
+      <p:pic>
+        <p:nvPicPr>
+          <p:cNvPr id="7" name="Picture 6" descr="cartel-a3-final.png"/>
+          <p:cNvPicPr>
+            <a:picLocks noChangeAspect="1"/>
+          </p:cNvPicPr>
+          <p:nvPr/>
+        </p:nvPicPr>
+        <p:blipFill>
+          <a:blip r:embed="rId2"/>
+          <a:stretch>
+            <a:fillRect/>
+          </a:stretch>
+        </p:blipFill>
+        <p:spPr>
+          <a:xfrm>
+            <a:off x="6766560" y="2201439"/>
+            <a:ext cx="4114800" cy="2820881"/>
+          </a:xfrm>
+          <a:prstGeom prst="rect">
+            <a:avLst/>
+          </a:prstGeom>
+        </p:spPr>
+      </p:pic>
+      <p:sp>
+        <p:nvSpPr>
+          <p:cNvPr id="8" name="Rounded Rectangle 7"/>
+          <p:cNvSpPr/>
+          <p:nvPr/>
+        </p:nvSpPr>
+        <p:spPr>
+          <a:xfrm>
+            <a:off x="868680" y="5440680"/>
+            <a:ext cx="5303520" cy="685800"/>
+          </a:xfrm>
+          <a:prstGeom prst="roundRect">
+            <a:avLst/>
+          </a:prstGeom>
+          <a:solidFill>
+            <a:srgbClr val="F8FBFF"/>
+          </a:solidFill>
+          <a:ln w="16510">
+            <a:solidFill>
+              <a:srgbClr val="008A45"/>
+            </a:solidFill>
+          </a:ln>
+        </p:spPr>
+        <p:style>
+          <a:lnRef idx="1">
+            <a:schemeClr val="accent1"/>
+          </a:lnRef>
+          <a:fillRef idx="3">
+            <a:schemeClr val="accent1"/>
+          </a:fillRef>
+          <a:effectRef idx="2">
+            <a:schemeClr val="accent1"/>
+          </a:effectRef>
+          <a:fontRef idx="minor">
+            <a:schemeClr val="lt1"/>
+          </a:fontRef>
+        </p:style>
+        <p:txBody>
+          <a:bodyPr rtlCol="0" anchor="ctr"/>
+          <a:lstStyle/>
+          <a:p>
+            <a:pPr algn="ctr"/>
+          </a:p>
+        </p:txBody>
+      </p:sp>
+      <p:sp>
+        <p:nvSpPr>
+          <p:cNvPr id="9" name="TextBox 8"/>
+          <p:cNvSpPr txBox="1"/>
+          <p:nvPr/>
+        </p:nvSpPr>
+        <p:spPr>
+          <a:xfrm>
+            <a:off x="1033271" y="5550408"/>
+            <a:ext cx="4974336" cy="320040"/>
+          </a:xfrm>
+          <a:prstGeom prst="rect">
+            <a:avLst/>
+          </a:prstGeom>
+          <a:noFill/>
+        </p:spPr>
+        <p:txBody>
+          <a:bodyPr wrap="none">
+            <a:spAutoFit/>
+          </a:bodyPr>
+          <a:lstStyle/>
+          <a:p>
+            <a:pPr>
+              <a:defRPr b="1" sz="1500">
+                <a:solidFill>
+                  <a:srgbClr val="008A45"/>
+                </a:solidFill>
+              </a:defRPr>
+            </a:pPr>
+            <a:r>
+              <a:t>Cierre</a:t>
+            </a:r>
+          </a:p>
+        </p:txBody>
+      </p:sp>
+      <p:sp>
+        <p:nvSpPr>
+          <p:cNvPr id="10" name="TextBox 9"/>
+          <p:cNvSpPr txBox="1"/>
+          <p:nvPr/>
+        </p:nvSpPr>
+        <p:spPr>
+          <a:xfrm>
+            <a:off x="1033271" y="5943600"/>
+            <a:ext cx="4974336" cy="91439"/>
+          </a:xfrm>
+          <a:prstGeom prst="rect">
+            <a:avLst/>
+          </a:prstGeom>
+          <a:noFill/>
+        </p:spPr>
+        <p:txBody>
+          <a:bodyPr wrap="square">
+            <a:spAutoFit/>
+          </a:bodyPr>
+          <a:lstStyle/>
+          <a:p>
+            <a:pPr>
+              <a:defRPr sz="1250">
+                <a:solidFill>
+                  <a:srgbClr val="12304A"/>
+                </a:solidFill>
+              </a:defRPr>
+            </a:pPr>
+            <a:r>
+              <a:t>Versión final v1.2.0 · Memoria y anexos generados · Pendiente solo de incorporar las URLs de vídeo al PDF de enlaces.</a:t>
             </a:r>
           </a:p>
         </p:txBody>
@@ -3658,7 +3765,7 @@
     <p:bg>
       <p:bgPr>
         <a:solidFill>
-          <a:srgbClr val="F8FAFC"/>
+          <a:srgbClr val="FFFFFF"/>
         </a:solidFill>
         <a:effectLst/>
       </p:bgPr>
@@ -3672,80 +3779,14 @@
       <p:grpSpPr/>
       <p:sp>
         <p:nvSpPr>
-          <p:cNvPr id="2" name="TextBox 1"/>
-          <p:cNvSpPr txBox="1"/>
-          <p:nvPr/>
-        </p:nvSpPr>
-        <p:spPr>
-          <a:xfrm>
-            <a:off x="566928" y="320040"/>
-            <a:ext cx="10058400" cy="502920"/>
-          </a:xfrm>
-          <a:prstGeom prst="rect">
-            <a:avLst/>
-          </a:prstGeom>
-          <a:noFill/>
-        </p:spPr>
-        <p:txBody>
-          <a:bodyPr wrap="none">
-            <a:spAutoFit/>
-          </a:bodyPr>
-          <a:lstStyle/>
-          <a:p>
-            <a:r>
-              <a:rPr sz="3400" b="1">
-                <a:solidFill>
-                  <a:srgbClr val="0F2F4A"/>
-                </a:solidFill>
-              </a:rPr>
-              <a:t>Problema y objetivo</a:t>
-            </a:r>
-          </a:p>
-        </p:txBody>
-      </p:sp>
-      <p:sp>
-        <p:nvSpPr>
-          <p:cNvPr id="3" name="TextBox 2"/>
-          <p:cNvSpPr txBox="1"/>
-          <p:nvPr/>
-        </p:nvSpPr>
-        <p:spPr>
-          <a:xfrm>
-            <a:off x="585216" y="841248"/>
-            <a:ext cx="10058400" cy="320040"/>
-          </a:xfrm>
-          <a:prstGeom prst="rect">
-            <a:avLst/>
-          </a:prstGeom>
-          <a:noFill/>
-        </p:spPr>
-        <p:txBody>
-          <a:bodyPr wrap="none">
-            <a:spAutoFit/>
-          </a:bodyPr>
-          <a:lstStyle/>
-          <a:p>
-            <a:r>
-              <a:rPr sz="1700" b="0">
-                <a:solidFill>
-                  <a:srgbClr val="334155"/>
-                </a:solidFill>
-              </a:rPr>
-              <a:t>Automatización segura de solicitudes TI en un entorno cloud</a:t>
-            </a:r>
-          </a:p>
-        </p:txBody>
-      </p:sp>
-      <p:sp>
-        <p:nvSpPr>
-          <p:cNvPr id="4" name="Rectangle 3"/>
+          <p:cNvPr id="2" name="Rectangle 1"/>
           <p:cNvSpPr/>
           <p:nvPr/>
         </p:nvSpPr>
         <p:spPr>
           <a:xfrm>
-            <a:off x="566928" y="1207008"/>
-            <a:ext cx="11064240" cy="27432"/>
+            <a:off x="0" y="0"/>
+            <a:ext cx="12191695" cy="146304"/>
           </a:xfrm>
           <a:prstGeom prst="rect">
             <a:avLst/>
@@ -3781,14 +3822,14 @@
       </p:sp>
       <p:sp>
         <p:nvSpPr>
-          <p:cNvPr id="5" name="TextBox 4"/>
+          <p:cNvPr id="3" name="TextBox 2"/>
           <p:cNvSpPr txBox="1"/>
           <p:nvPr/>
         </p:nvSpPr>
         <p:spPr>
           <a:xfrm>
-            <a:off x="777240" y="1600200"/>
-            <a:ext cx="5669280" cy="2560320"/>
+            <a:off x="502920" y="6446520"/>
+            <a:ext cx="11155680" cy="228600"/>
           </a:xfrm>
           <a:prstGeom prst="rect">
             <a:avLst/>
@@ -3801,57 +3842,192 @@
           </a:bodyPr>
           <a:lstStyle/>
           <a:p>
-            <a:r>
-              <a:rPr sz="2200">
-                <a:solidFill>
-                  <a:srgbClr val="334155"/>
-                </a:solidFill>
-              </a:rPr>
-              <a:t>• La gestión manual dispersa dificulta trazabilidad, seguridad y priorización.</a:t>
-            </a:r>
-          </a:p>
-          <a:p>
-            <a:r>
-              <a:rPr sz="2200">
-                <a:solidFill>
-                  <a:srgbClr val="334155"/>
-                </a:solidFill>
-              </a:rPr>
-              <a:t>• El prototipo centraliza solicitudes, clasificación, aprobación y seguimiento.</a:t>
-            </a:r>
-          </a:p>
-          <a:p>
-            <a:r>
-              <a:rPr sz="2200">
-                <a:solidFill>
-                  <a:srgbClr val="334155"/>
-                </a:solidFill>
-              </a:rPr>
-              <a:t>• La solución se valida en Azure con una instancia real accesible para el tribunal.</a:t>
-            </a:r>
-          </a:p>
-        </p:txBody>
-      </p:sp>
-      <p:sp>
-        <p:nvSpPr>
-          <p:cNvPr id="6" name="Rounded Rectangle 5"/>
+            <a:pPr>
+              <a:defRPr sz="800">
+                <a:solidFill>
+                  <a:srgbClr val="788291"/>
+                </a:solidFill>
+              </a:defRPr>
+            </a:pPr>
+            <a:r>
+              <a:t>Cloud Computing: servicio empresarial seguro en Microsoft Azure · Karima Drafli Rico</a:t>
+            </a:r>
+          </a:p>
+        </p:txBody>
+      </p:sp>
+      <p:sp>
+        <p:nvSpPr>
+          <p:cNvPr id="4" name="TextBox 3"/>
+          <p:cNvSpPr txBox="1"/>
+          <p:nvPr/>
+        </p:nvSpPr>
+        <p:spPr>
+          <a:xfrm>
+            <a:off x="502920" y="384048"/>
+            <a:ext cx="10972800" cy="548640"/>
+          </a:xfrm>
+          <a:prstGeom prst="rect">
+            <a:avLst/>
+          </a:prstGeom>
+          <a:noFill/>
+        </p:spPr>
+        <p:txBody>
+          <a:bodyPr wrap="none">
+            <a:spAutoFit/>
+          </a:bodyPr>
+          <a:lstStyle/>
+          <a:p>
+            <a:pPr>
+              <a:defRPr b="1" sz="3000">
+                <a:solidFill>
+                  <a:srgbClr val="12304A"/>
+                </a:solidFill>
+              </a:defRPr>
+            </a:pPr>
+            <a:r>
+              <a:t>Problema y objetivo</a:t>
+            </a:r>
+          </a:p>
+        </p:txBody>
+      </p:sp>
+      <p:sp>
+        <p:nvSpPr>
+          <p:cNvPr id="5" name="TextBox 4"/>
+          <p:cNvSpPr txBox="1"/>
+          <p:nvPr/>
+        </p:nvSpPr>
+        <p:spPr>
+          <a:xfrm>
+            <a:off x="530352" y="932688"/>
+            <a:ext cx="10789920" cy="320040"/>
+          </a:xfrm>
+          <a:prstGeom prst="rect">
+            <a:avLst/>
+          </a:prstGeom>
+          <a:noFill/>
+        </p:spPr>
+        <p:txBody>
+          <a:bodyPr wrap="none">
+            <a:spAutoFit/>
+          </a:bodyPr>
+          <a:lstStyle/>
+          <a:p>
+            <a:pPr>
+              <a:defRPr sz="1400">
+                <a:solidFill>
+                  <a:srgbClr val="4E5B6C"/>
+                </a:solidFill>
+              </a:defRPr>
+            </a:pPr>
+            <a:r>
+              <a:t>Automatización segura de solicitudes internas de TI</a:t>
+            </a:r>
+          </a:p>
+        </p:txBody>
+      </p:sp>
+      <p:sp>
+        <p:nvSpPr>
+          <p:cNvPr id="6" name="TextBox 5"/>
+          <p:cNvSpPr txBox="1"/>
+          <p:nvPr/>
+        </p:nvSpPr>
+        <p:spPr>
+          <a:xfrm>
+            <a:off x="685800" y="1508760"/>
+            <a:ext cx="4754880" cy="3474720"/>
+          </a:xfrm>
+          <a:prstGeom prst="rect">
+            <a:avLst/>
+          </a:prstGeom>
+          <a:noFill/>
+        </p:spPr>
+        <p:txBody>
+          <a:bodyPr wrap="square">
+            <a:spAutoFit/>
+          </a:bodyPr>
+          <a:lstStyle/>
+          <a:p>
+            <a:pPr>
+              <a:spcAft>
+                <a:spcPts val="700"/>
+              </a:spcAft>
+              <a:defRPr sz="1800">
+                <a:solidFill>
+                  <a:srgbClr val="12304A"/>
+                </a:solidFill>
+              </a:defRPr>
+            </a:pPr>
+            <a:r>
+              <a:t>Solicitudes repartidas entre correos, chats y hojas de cálculo.</a:t>
+            </a:r>
+          </a:p>
+          <a:p>
+            <a:pPr>
+              <a:spcAft>
+                <a:spcPts val="700"/>
+              </a:spcAft>
+              <a:defRPr sz="1800">
+                <a:solidFill>
+                  <a:srgbClr val="12304A"/>
+                </a:solidFill>
+              </a:defRPr>
+            </a:pPr>
+            <a:r>
+              <a:t>Dificultad para priorizar, aprobar y medir el trabajo del equipo TI.</a:t>
+            </a:r>
+          </a:p>
+          <a:p>
+            <a:pPr>
+              <a:spcAft>
+                <a:spcPts val="700"/>
+              </a:spcAft>
+              <a:defRPr sz="1800">
+                <a:solidFill>
+                  <a:srgbClr val="12304A"/>
+                </a:solidFill>
+              </a:defRPr>
+            </a:pPr>
+            <a:r>
+              <a:t>Necesidad de separar secretos, automatizar entradas y mantener trazabilidad.</a:t>
+            </a:r>
+          </a:p>
+          <a:p>
+            <a:pPr>
+              <a:spcAft>
+                <a:spcPts val="700"/>
+              </a:spcAft>
+              <a:defRPr sz="1800">
+                <a:solidFill>
+                  <a:srgbClr val="12304A"/>
+                </a:solidFill>
+              </a:defRPr>
+            </a:pPr>
+            <a:r>
+              <a:t>Objetivo: construir un prototipo funcional desplegado y validado en Azure.</a:t>
+            </a:r>
+          </a:p>
+        </p:txBody>
+      </p:sp>
+      <p:sp>
+        <p:nvSpPr>
+          <p:cNvPr id="7" name="Rounded Rectangle 6"/>
           <p:cNvSpPr/>
           <p:nvPr/>
         </p:nvSpPr>
         <p:spPr>
           <a:xfrm>
-            <a:off x="7040880" y="1600200"/>
-            <a:ext cx="3657600" cy="2560320"/>
+            <a:off x="5897880" y="1508760"/>
+            <a:ext cx="5303520" cy="1005840"/>
           </a:xfrm>
           <a:prstGeom prst="roundRect">
             <a:avLst/>
           </a:prstGeom>
           <a:solidFill>
-            <a:srgbClr val="FFFFFF"/>
+            <a:srgbClr val="F8FBFF"/>
           </a:solidFill>
-          <a:ln>
+          <a:ln w="16510">
             <a:solidFill>
-              <a:srgbClr val="D2E1F0"/>
+              <a:srgbClr val="008A45"/>
             </a:solidFill>
           </a:ln>
         </p:spPr>
@@ -3879,14 +4055,14 @@
       </p:sp>
       <p:sp>
         <p:nvSpPr>
-          <p:cNvPr id="7" name="TextBox 6"/>
+          <p:cNvPr id="8" name="TextBox 7"/>
           <p:cNvSpPr txBox="1"/>
           <p:nvPr/>
         </p:nvSpPr>
         <p:spPr>
           <a:xfrm>
-            <a:off x="7205472" y="1737360"/>
-            <a:ext cx="3328416" cy="274320"/>
+            <a:off x="6062472" y="1618488"/>
+            <a:ext cx="4974336" cy="320040"/>
           </a:xfrm>
           <a:prstGeom prst="rect">
             <a:avLst/>
@@ -3899,27 +4075,109 @@
           </a:bodyPr>
           <a:lstStyle/>
           <a:p>
-            <a:r>
-              <a:rPr sz="1800" b="1">
-                <a:solidFill>
-                  <a:srgbClr val="149496"/>
-                </a:solidFill>
-              </a:rPr>
-              <a:t>Resultado esperado</a:t>
-            </a:r>
-          </a:p>
-        </p:txBody>
-      </p:sp>
-      <p:sp>
-        <p:nvSpPr>
-          <p:cNvPr id="8" name="TextBox 7"/>
+            <a:pPr>
+              <a:defRPr b="1" sz="1500">
+                <a:solidFill>
+                  <a:srgbClr val="008A45"/>
+                </a:solidFill>
+              </a:defRPr>
+            </a:pPr>
+            <a:r>
+              <a:t>Resultado entregado</a:t>
+            </a:r>
+          </a:p>
+        </p:txBody>
+      </p:sp>
+      <p:sp>
+        <p:nvSpPr>
+          <p:cNvPr id="9" name="TextBox 8"/>
           <p:cNvSpPr txBox="1"/>
           <p:nvPr/>
         </p:nvSpPr>
         <p:spPr>
           <a:xfrm>
-            <a:off x="7205472" y="2103120"/>
-            <a:ext cx="3328416" cy="1965960"/>
+            <a:off x="6062472" y="2011680"/>
+            <a:ext cx="4974336" cy="411480"/>
+          </a:xfrm>
+          <a:prstGeom prst="rect">
+            <a:avLst/>
+          </a:prstGeom>
+          <a:noFill/>
+        </p:spPr>
+        <p:txBody>
+          <a:bodyPr wrap="square">
+            <a:spAutoFit/>
+          </a:bodyPr>
+          <a:lstStyle/>
+          <a:p>
+            <a:pPr>
+              <a:defRPr sz="1250">
+                <a:solidFill>
+                  <a:srgbClr val="12304A"/>
+                </a:solidFill>
+              </a:defRPr>
+            </a:pPr>
+            <a:r>
+              <a:t>Portal + API + reglas + Cosmos DB + Key Vault + Logic App + observabilidad.</a:t>
+            </a:r>
+          </a:p>
+        </p:txBody>
+      </p:sp>
+      <p:sp>
+        <p:nvSpPr>
+          <p:cNvPr id="10" name="Rounded Rectangle 9"/>
+          <p:cNvSpPr/>
+          <p:nvPr/>
+        </p:nvSpPr>
+        <p:spPr>
+          <a:xfrm>
+            <a:off x="5897880" y="2788920"/>
+            <a:ext cx="5303520" cy="1005840"/>
+          </a:xfrm>
+          <a:prstGeom prst="roundRect">
+            <a:avLst/>
+          </a:prstGeom>
+          <a:solidFill>
+            <a:srgbClr val="F8FBFF"/>
+          </a:solidFill>
+          <a:ln w="16510">
+            <a:solidFill>
+              <a:srgbClr val="F28B00"/>
+            </a:solidFill>
+          </a:ln>
+        </p:spPr>
+        <p:style>
+          <a:lnRef idx="1">
+            <a:schemeClr val="accent1"/>
+          </a:lnRef>
+          <a:fillRef idx="3">
+            <a:schemeClr val="accent1"/>
+          </a:fillRef>
+          <a:effectRef idx="2">
+            <a:schemeClr val="accent1"/>
+          </a:effectRef>
+          <a:fontRef idx="minor">
+            <a:schemeClr val="lt1"/>
+          </a:fontRef>
+        </p:style>
+        <p:txBody>
+          <a:bodyPr rtlCol="0" anchor="ctr"/>
+          <a:lstStyle/>
+          <a:p>
+            <a:pPr algn="ctr"/>
+          </a:p>
+        </p:txBody>
+      </p:sp>
+      <p:sp>
+        <p:nvSpPr>
+          <p:cNvPr id="11" name="TextBox 10"/>
+          <p:cNvSpPr txBox="1"/>
+          <p:nvPr/>
+        </p:nvSpPr>
+        <p:spPr>
+          <a:xfrm>
+            <a:off x="6062472" y="2898648"/>
+            <a:ext cx="4974336" cy="320040"/>
           </a:xfrm>
           <a:prstGeom prst="rect">
             <a:avLst/>
@@ -3932,27 +4190,109 @@
           </a:bodyPr>
           <a:lstStyle/>
           <a:p>
-            <a:r>
-              <a:rPr sz="1400" b="0">
-                <a:solidFill>
-                  <a:srgbClr val="334155"/>
-                </a:solidFill>
-              </a:rPr>
-              <a:t>Portal, API, Cosmos DB, Key Vault, Logic App, observabilidad y calidad continua integrados en un flujo empresarial.</a:t>
-            </a:r>
-          </a:p>
-        </p:txBody>
-      </p:sp>
-      <p:sp>
-        <p:nvSpPr>
-          <p:cNvPr id="9" name="TextBox 8"/>
+            <a:pPr>
+              <a:defRPr b="1" sz="1500">
+                <a:solidFill>
+                  <a:srgbClr val="F28B00"/>
+                </a:solidFill>
+              </a:defRPr>
+            </a:pPr>
+            <a:r>
+              <a:t>Alcance honesto</a:t>
+            </a:r>
+          </a:p>
+        </p:txBody>
+      </p:sp>
+      <p:sp>
+        <p:nvSpPr>
+          <p:cNvPr id="12" name="TextBox 11"/>
           <p:cNvSpPr txBox="1"/>
           <p:nvPr/>
         </p:nvSpPr>
         <p:spPr>
           <a:xfrm>
-            <a:off x="566928" y="6510528"/>
-            <a:ext cx="8686800" cy="182880"/>
+            <a:off x="6062472" y="3291839"/>
+            <a:ext cx="4974336" cy="411480"/>
+          </a:xfrm>
+          <a:prstGeom prst="rect">
+            <a:avLst/>
+          </a:prstGeom>
+          <a:noFill/>
+        </p:spPr>
+        <p:txBody>
+          <a:bodyPr wrap="square">
+            <a:spAutoFit/>
+          </a:bodyPr>
+          <a:lstStyle/>
+          <a:p>
+            <a:pPr>
+              <a:defRPr sz="1250">
+                <a:solidFill>
+                  <a:srgbClr val="12304A"/>
+                </a:solidFill>
+              </a:defRPr>
+            </a:pPr>
+            <a:r>
+              <a:t>No sustituye a un ITSM comercial; demuestra una solución cloud empresarial completa y defendible.</a:t>
+            </a:r>
+          </a:p>
+        </p:txBody>
+      </p:sp>
+      <p:sp>
+        <p:nvSpPr>
+          <p:cNvPr id="13" name="Rounded Rectangle 12"/>
+          <p:cNvSpPr/>
+          <p:nvPr/>
+        </p:nvSpPr>
+        <p:spPr>
+          <a:xfrm>
+            <a:off x="5897880" y="4069080"/>
+            <a:ext cx="5303520" cy="1005840"/>
+          </a:xfrm>
+          <a:prstGeom prst="roundRect">
+            <a:avLst/>
+          </a:prstGeom>
+          <a:solidFill>
+            <a:srgbClr val="F8FBFF"/>
+          </a:solidFill>
+          <a:ln w="16510">
+            <a:solidFill>
+              <a:srgbClr val="695BD0"/>
+            </a:solidFill>
+          </a:ln>
+        </p:spPr>
+        <p:style>
+          <a:lnRef idx="1">
+            <a:schemeClr val="accent1"/>
+          </a:lnRef>
+          <a:fillRef idx="3">
+            <a:schemeClr val="accent1"/>
+          </a:fillRef>
+          <a:effectRef idx="2">
+            <a:schemeClr val="accent1"/>
+          </a:effectRef>
+          <a:fontRef idx="minor">
+            <a:schemeClr val="lt1"/>
+          </a:fontRef>
+        </p:style>
+        <p:txBody>
+          <a:bodyPr rtlCol="0" anchor="ctr"/>
+          <a:lstStyle/>
+          <a:p>
+            <a:pPr algn="ctr"/>
+          </a:p>
+        </p:txBody>
+      </p:sp>
+      <p:sp>
+        <p:nvSpPr>
+          <p:cNvPr id="14" name="TextBox 13"/>
+          <p:cNvSpPr txBox="1"/>
+          <p:nvPr/>
+        </p:nvSpPr>
+        <p:spPr>
+          <a:xfrm>
+            <a:off x="6062472" y="4178808"/>
+            <a:ext cx="4974336" cy="320040"/>
           </a:xfrm>
           <a:prstGeom prst="rect">
             <a:avLst/>
@@ -3965,27 +4305,29 @@
           </a:bodyPr>
           <a:lstStyle/>
           <a:p>
-            <a:r>
-              <a:rPr sz="1000" b="0">
-                <a:solidFill>
-                  <a:srgbClr val="64748B"/>
-                </a:solidFill>
-              </a:rPr>
-              <a:t>Cloud Computing: servicio empresarial seguro en Microsoft Azure</a:t>
-            </a:r>
-          </a:p>
-        </p:txBody>
-      </p:sp>
-      <p:sp>
-        <p:nvSpPr>
-          <p:cNvPr id="10" name="TextBox 9"/>
+            <a:pPr>
+              <a:defRPr b="1" sz="1500">
+                <a:solidFill>
+                  <a:srgbClr val="695BD0"/>
+                </a:solidFill>
+              </a:defRPr>
+            </a:pPr>
+            <a:r>
+              <a:t>Evidencias</a:t>
+            </a:r>
+          </a:p>
+        </p:txBody>
+      </p:sp>
+      <p:sp>
+        <p:nvSpPr>
+          <p:cNvPr id="15" name="TextBox 14"/>
           <p:cNvSpPr txBox="1"/>
           <p:nvPr/>
         </p:nvSpPr>
         <p:spPr>
           <a:xfrm>
-            <a:off x="11064240" y="6510528"/>
-            <a:ext cx="457200" cy="182880"/>
+            <a:off x="6062472" y="4572000"/>
+            <a:ext cx="4974336" cy="411480"/>
           </a:xfrm>
           <a:prstGeom prst="rect">
             <a:avLst/>
@@ -3993,19 +4335,20 @@
           <a:noFill/>
         </p:spPr>
         <p:txBody>
-          <a:bodyPr wrap="none">
+          <a:bodyPr wrap="square">
             <a:spAutoFit/>
           </a:bodyPr>
           <a:lstStyle/>
           <a:p>
-            <a:pPr algn="r"/>
-            <a:r>
-              <a:rPr sz="1000" b="0">
-                <a:solidFill>
-                  <a:srgbClr val="64748B"/>
-                </a:solidFill>
-              </a:rPr>
-              <a:t>2</a:t>
+            <a:pPr>
+              <a:defRPr sz="1250">
+                <a:solidFill>
+                  <a:srgbClr val="12304A"/>
+                </a:solidFill>
+              </a:defRPr>
+            </a:pPr>
+            <a:r>
+              <a:t>27 pruebas, SonarCloud OK, Zube con 6 sprints, release v1.2.0 y despliegue real.</a:t>
             </a:r>
           </a:p>
         </p:txBody>
@@ -4038,80 +4381,14 @@
       <p:grpSpPr/>
       <p:sp>
         <p:nvSpPr>
-          <p:cNvPr id="2" name="TextBox 1"/>
-          <p:cNvSpPr txBox="1"/>
-          <p:nvPr/>
-        </p:nvSpPr>
-        <p:spPr>
-          <a:xfrm>
-            <a:off x="566928" y="320040"/>
-            <a:ext cx="10058400" cy="502920"/>
-          </a:xfrm>
-          <a:prstGeom prst="rect">
-            <a:avLst/>
-          </a:prstGeom>
-          <a:noFill/>
-        </p:spPr>
-        <p:txBody>
-          <a:bodyPr wrap="none">
-            <a:spAutoFit/>
-          </a:bodyPr>
-          <a:lstStyle/>
-          <a:p>
-            <a:r>
-              <a:rPr sz="3400" b="1">
-                <a:solidFill>
-                  <a:srgbClr val="0F2F4A"/>
-                </a:solidFill>
-              </a:rPr>
-              <a:t>Arquitectura final</a:t>
-            </a:r>
-          </a:p>
-        </p:txBody>
-      </p:sp>
-      <p:sp>
-        <p:nvSpPr>
-          <p:cNvPr id="3" name="TextBox 2"/>
-          <p:cNvSpPr txBox="1"/>
-          <p:nvPr/>
-        </p:nvSpPr>
-        <p:spPr>
-          <a:xfrm>
-            <a:off x="585216" y="841248"/>
-            <a:ext cx="10058400" cy="320040"/>
-          </a:xfrm>
-          <a:prstGeom prst="rect">
-            <a:avLst/>
-          </a:prstGeom>
-          <a:noFill/>
-        </p:spPr>
-        <p:txBody>
-          <a:bodyPr wrap="none">
-            <a:spAutoFit/>
-          </a:bodyPr>
-          <a:lstStyle/>
-          <a:p>
-            <a:r>
-              <a:rPr sz="1700" b="0">
-                <a:solidFill>
-                  <a:srgbClr val="334155"/>
-                </a:solidFill>
-              </a:rPr>
-              <a:t>Vista integral del sistema desplegado</a:t>
-            </a:r>
-          </a:p>
-        </p:txBody>
-      </p:sp>
-      <p:sp>
-        <p:nvSpPr>
-          <p:cNvPr id="4" name="Rectangle 3"/>
+          <p:cNvPr id="2" name="Rectangle 1"/>
           <p:cNvSpPr/>
           <p:nvPr/>
         </p:nvSpPr>
         <p:spPr>
           <a:xfrm>
-            <a:off x="566928" y="1207008"/>
-            <a:ext cx="11064240" cy="27432"/>
+            <a:off x="0" y="0"/>
+            <a:ext cx="12191695" cy="146304"/>
           </a:xfrm>
           <a:prstGeom prst="rect">
             <a:avLst/>
@@ -4145,9 +4422,114 @@
           </a:p>
         </p:txBody>
       </p:sp>
+      <p:sp>
+        <p:nvSpPr>
+          <p:cNvPr id="3" name="TextBox 2"/>
+          <p:cNvSpPr txBox="1"/>
+          <p:nvPr/>
+        </p:nvSpPr>
+        <p:spPr>
+          <a:xfrm>
+            <a:off x="502920" y="6446520"/>
+            <a:ext cx="11155680" cy="228600"/>
+          </a:xfrm>
+          <a:prstGeom prst="rect">
+            <a:avLst/>
+          </a:prstGeom>
+          <a:noFill/>
+        </p:spPr>
+        <p:txBody>
+          <a:bodyPr wrap="none">
+            <a:spAutoFit/>
+          </a:bodyPr>
+          <a:lstStyle/>
+          <a:p>
+            <a:pPr>
+              <a:defRPr sz="800">
+                <a:solidFill>
+                  <a:srgbClr val="788291"/>
+                </a:solidFill>
+              </a:defRPr>
+            </a:pPr>
+            <a:r>
+              <a:t>Cloud Computing: servicio empresarial seguro en Microsoft Azure · Karima Drafli Rico</a:t>
+            </a:r>
+          </a:p>
+        </p:txBody>
+      </p:sp>
+      <p:sp>
+        <p:nvSpPr>
+          <p:cNvPr id="4" name="TextBox 3"/>
+          <p:cNvSpPr txBox="1"/>
+          <p:nvPr/>
+        </p:nvSpPr>
+        <p:spPr>
+          <a:xfrm>
+            <a:off x="502920" y="384048"/>
+            <a:ext cx="10972800" cy="548640"/>
+          </a:xfrm>
+          <a:prstGeom prst="rect">
+            <a:avLst/>
+          </a:prstGeom>
+          <a:noFill/>
+        </p:spPr>
+        <p:txBody>
+          <a:bodyPr wrap="none">
+            <a:spAutoFit/>
+          </a:bodyPr>
+          <a:lstStyle/>
+          <a:p>
+            <a:pPr>
+              <a:defRPr b="1" sz="3000">
+                <a:solidFill>
+                  <a:srgbClr val="12304A"/>
+                </a:solidFill>
+              </a:defRPr>
+            </a:pPr>
+            <a:r>
+              <a:t>Arquitectura final</a:t>
+            </a:r>
+          </a:p>
+        </p:txBody>
+      </p:sp>
+      <p:sp>
+        <p:nvSpPr>
+          <p:cNvPr id="5" name="TextBox 4"/>
+          <p:cNvSpPr txBox="1"/>
+          <p:nvPr/>
+        </p:nvSpPr>
+        <p:spPr>
+          <a:xfrm>
+            <a:off x="530352" y="932688"/>
+            <a:ext cx="10789920" cy="320040"/>
+          </a:xfrm>
+          <a:prstGeom prst="rect">
+            <a:avLst/>
+          </a:prstGeom>
+          <a:noFill/>
+        </p:spPr>
+        <p:txBody>
+          <a:bodyPr wrap="none">
+            <a:spAutoFit/>
+          </a:bodyPr>
+          <a:lstStyle/>
+          <a:p>
+            <a:pPr>
+              <a:defRPr sz="1400">
+                <a:solidFill>
+                  <a:srgbClr val="4E5B6C"/>
+                </a:solidFill>
+              </a:defRPr>
+            </a:pPr>
+            <a:r>
+              <a:t>Servicios Azure y herramientas de proceso</a:t>
+            </a:r>
+          </a:p>
+        </p:txBody>
+      </p:sp>
       <p:pic>
         <p:nvPicPr>
-          <p:cNvPr id="5" name="Picture 4" descr="arquitectura_integral_tfg_azure.png"/>
+          <p:cNvPr id="6" name="Picture 5" descr="arquitectura_integral_tfg_azure.png"/>
           <p:cNvPicPr>
             <a:picLocks noChangeAspect="1"/>
           </p:cNvPicPr>
@@ -4161,81 +4543,14 @@
         </p:blipFill>
         <p:spPr>
           <a:xfrm>
-            <a:off x="411480" y="1417320"/>
-            <a:ext cx="11155680" cy="4754880"/>
+            <a:off x="1651000" y="1234440"/>
+            <a:ext cx="8859520" cy="4983480"/>
           </a:xfrm>
           <a:prstGeom prst="rect">
             <a:avLst/>
           </a:prstGeom>
         </p:spPr>
       </p:pic>
-      <p:sp>
-        <p:nvSpPr>
-          <p:cNvPr id="6" name="TextBox 5"/>
-          <p:cNvSpPr txBox="1"/>
-          <p:nvPr/>
-        </p:nvSpPr>
-        <p:spPr>
-          <a:xfrm>
-            <a:off x="566928" y="6510528"/>
-            <a:ext cx="8686800" cy="182880"/>
-          </a:xfrm>
-          <a:prstGeom prst="rect">
-            <a:avLst/>
-          </a:prstGeom>
-          <a:noFill/>
-        </p:spPr>
-        <p:txBody>
-          <a:bodyPr wrap="none">
-            <a:spAutoFit/>
-          </a:bodyPr>
-          <a:lstStyle/>
-          <a:p>
-            <a:r>
-              <a:rPr sz="1000" b="0">
-                <a:solidFill>
-                  <a:srgbClr val="64748B"/>
-                </a:solidFill>
-              </a:rPr>
-              <a:t>Cloud Computing: servicio empresarial seguro en Microsoft Azure</a:t>
-            </a:r>
-          </a:p>
-        </p:txBody>
-      </p:sp>
-      <p:sp>
-        <p:nvSpPr>
-          <p:cNvPr id="7" name="TextBox 6"/>
-          <p:cNvSpPr txBox="1"/>
-          <p:nvPr/>
-        </p:nvSpPr>
-        <p:spPr>
-          <a:xfrm>
-            <a:off x="11064240" y="6510528"/>
-            <a:ext cx="457200" cy="182880"/>
-          </a:xfrm>
-          <a:prstGeom prst="rect">
-            <a:avLst/>
-          </a:prstGeom>
-          <a:noFill/>
-        </p:spPr>
-        <p:txBody>
-          <a:bodyPr wrap="none">
-            <a:spAutoFit/>
-          </a:bodyPr>
-          <a:lstStyle/>
-          <a:p>
-            <a:pPr algn="r"/>
-            <a:r>
-              <a:rPr sz="1000" b="0">
-                <a:solidFill>
-                  <a:srgbClr val="64748B"/>
-                </a:solidFill>
-              </a:rPr>
-              <a:t>3</a:t>
-            </a:r>
-          </a:p>
-        </p:txBody>
-      </p:sp>
     </p:spTree>
   </p:cSld>
   <p:clrMapOvr>
@@ -4250,7 +4565,7 @@
     <p:bg>
       <p:bgPr>
         <a:solidFill>
-          <a:srgbClr val="F8FAFC"/>
+          <a:srgbClr val="FFFFFF"/>
         </a:solidFill>
         <a:effectLst/>
       </p:bgPr>
@@ -4264,86 +4579,20 @@
       <p:grpSpPr/>
       <p:sp>
         <p:nvSpPr>
-          <p:cNvPr id="2" name="TextBox 1"/>
-          <p:cNvSpPr txBox="1"/>
-          <p:nvPr/>
-        </p:nvSpPr>
-        <p:spPr>
-          <a:xfrm>
-            <a:off x="566928" y="320040"/>
-            <a:ext cx="10058400" cy="502920"/>
-          </a:xfrm>
-          <a:prstGeom prst="rect">
-            <a:avLst/>
-          </a:prstGeom>
-          <a:noFill/>
-        </p:spPr>
-        <p:txBody>
-          <a:bodyPr wrap="none">
-            <a:spAutoFit/>
-          </a:bodyPr>
-          <a:lstStyle/>
-          <a:p>
-            <a:r>
-              <a:rPr sz="3400" b="1">
-                <a:solidFill>
-                  <a:srgbClr val="0F2F4A"/>
-                </a:solidFill>
-              </a:rPr>
-              <a:t>Persistencia con Cosmos DB</a:t>
-            </a:r>
-          </a:p>
-        </p:txBody>
-      </p:sp>
-      <p:sp>
-        <p:nvSpPr>
-          <p:cNvPr id="3" name="TextBox 2"/>
-          <p:cNvSpPr txBox="1"/>
-          <p:nvPr/>
-        </p:nvSpPr>
-        <p:spPr>
-          <a:xfrm>
-            <a:off x="585216" y="841248"/>
-            <a:ext cx="10058400" cy="320040"/>
-          </a:xfrm>
-          <a:prstGeom prst="rect">
-            <a:avLst/>
-          </a:prstGeom>
-          <a:noFill/>
-        </p:spPr>
-        <p:txBody>
-          <a:bodyPr wrap="none">
-            <a:spAutoFit/>
-          </a:bodyPr>
-          <a:lstStyle/>
-          <a:p>
-            <a:r>
-              <a:rPr sz="1700" b="0">
-                <a:solidFill>
-                  <a:srgbClr val="334155"/>
-                </a:solidFill>
-              </a:rPr>
-              <a:t>Mejora final frente al blob JSON inicial</a:t>
-            </a:r>
-          </a:p>
-        </p:txBody>
-      </p:sp>
-      <p:sp>
-        <p:nvSpPr>
-          <p:cNvPr id="4" name="Rectangle 3"/>
+          <p:cNvPr id="2" name="Rectangle 1"/>
           <p:cNvSpPr/>
           <p:nvPr/>
         </p:nvSpPr>
         <p:spPr>
           <a:xfrm>
-            <a:off x="566928" y="1207008"/>
-            <a:ext cx="11064240" cy="27432"/>
+            <a:off x="0" y="0"/>
+            <a:ext cx="12191695" cy="146304"/>
           </a:xfrm>
           <a:prstGeom prst="rect">
             <a:avLst/>
           </a:prstGeom>
           <a:solidFill>
-            <a:srgbClr val="0078D4"/>
+            <a:srgbClr val="008A45"/>
           </a:solidFill>
           <a:ln>
             <a:noFill/>
@@ -4373,24 +4622,201 @@
       </p:sp>
       <p:sp>
         <p:nvSpPr>
-          <p:cNvPr id="5" name="Rounded Rectangle 4"/>
+          <p:cNvPr id="3" name="TextBox 2"/>
+          <p:cNvSpPr txBox="1"/>
+          <p:nvPr/>
+        </p:nvSpPr>
+        <p:spPr>
+          <a:xfrm>
+            <a:off x="502920" y="6446520"/>
+            <a:ext cx="11155680" cy="228600"/>
+          </a:xfrm>
+          <a:prstGeom prst="rect">
+            <a:avLst/>
+          </a:prstGeom>
+          <a:noFill/>
+        </p:spPr>
+        <p:txBody>
+          <a:bodyPr wrap="none">
+            <a:spAutoFit/>
+          </a:bodyPr>
+          <a:lstStyle/>
+          <a:p>
+            <a:pPr>
+              <a:defRPr sz="800">
+                <a:solidFill>
+                  <a:srgbClr val="788291"/>
+                </a:solidFill>
+              </a:defRPr>
+            </a:pPr>
+            <a:r>
+              <a:t>Cloud Computing: servicio empresarial seguro en Microsoft Azure · Karima Drafli Rico</a:t>
+            </a:r>
+          </a:p>
+        </p:txBody>
+      </p:sp>
+      <p:sp>
+        <p:nvSpPr>
+          <p:cNvPr id="4" name="TextBox 3"/>
+          <p:cNvSpPr txBox="1"/>
+          <p:nvPr/>
+        </p:nvSpPr>
+        <p:spPr>
+          <a:xfrm>
+            <a:off x="502920" y="384048"/>
+            <a:ext cx="10972800" cy="548640"/>
+          </a:xfrm>
+          <a:prstGeom prst="rect">
+            <a:avLst/>
+          </a:prstGeom>
+          <a:noFill/>
+        </p:spPr>
+        <p:txBody>
+          <a:bodyPr wrap="none">
+            <a:spAutoFit/>
+          </a:bodyPr>
+          <a:lstStyle/>
+          <a:p>
+            <a:pPr>
+              <a:defRPr b="1" sz="3000">
+                <a:solidFill>
+                  <a:srgbClr val="12304A"/>
+                </a:solidFill>
+              </a:defRPr>
+            </a:pPr>
+            <a:r>
+              <a:t>Producto funcional</a:t>
+            </a:r>
+          </a:p>
+        </p:txBody>
+      </p:sp>
+      <p:sp>
+        <p:nvSpPr>
+          <p:cNvPr id="5" name="TextBox 4"/>
+          <p:cNvSpPr txBox="1"/>
+          <p:nvPr/>
+        </p:nvSpPr>
+        <p:spPr>
+          <a:xfrm>
+            <a:off x="530352" y="932688"/>
+            <a:ext cx="10789920" cy="320040"/>
+          </a:xfrm>
+          <a:prstGeom prst="rect">
+            <a:avLst/>
+          </a:prstGeom>
+          <a:noFill/>
+        </p:spPr>
+        <p:txBody>
+          <a:bodyPr wrap="none">
+            <a:spAutoFit/>
+          </a:bodyPr>
+          <a:lstStyle/>
+          <a:p>
+            <a:pPr>
+              <a:defRPr sz="1400">
+                <a:solidFill>
+                  <a:srgbClr val="4E5B6C"/>
+                </a:solidFill>
+              </a:defRPr>
+            </a:pPr>
+            <a:r>
+              <a:t>Portal web, bandeja TI y centro operativo</a:t>
+            </a:r>
+          </a:p>
+        </p:txBody>
+      </p:sp>
+      <p:pic>
+        <p:nvPicPr>
+          <p:cNvPr id="6" name="Picture 5" descr="portal-solicitud-enviada.png"/>
+          <p:cNvPicPr>
+            <a:picLocks noChangeAspect="1"/>
+          </p:cNvPicPr>
+          <p:nvPr/>
+        </p:nvPicPr>
+        <p:blipFill>
+          <a:blip r:embed="rId2"/>
+          <a:stretch>
+            <a:fillRect/>
+          </a:stretch>
+        </p:blipFill>
+        <p:spPr>
+          <a:xfrm>
+            <a:off x="843432" y="1234440"/>
+            <a:ext cx="2885134" cy="2011680"/>
+          </a:xfrm>
+          <a:prstGeom prst="rect">
+            <a:avLst/>
+          </a:prstGeom>
+        </p:spPr>
+      </p:pic>
+      <p:pic>
+        <p:nvPicPr>
+          <p:cNvPr id="7" name="Picture 6" descr="solicitud-portal-gestionTI-tokenkeyvault.png"/>
+          <p:cNvPicPr>
+            <a:picLocks noChangeAspect="1"/>
+          </p:cNvPicPr>
+          <p:nvPr/>
+        </p:nvPicPr>
+        <p:blipFill>
+          <a:blip r:embed="rId3"/>
+          <a:stretch>
+            <a:fillRect/>
+          </a:stretch>
+        </p:blipFill>
+        <p:spPr>
+          <a:xfrm>
+            <a:off x="4343400" y="1383729"/>
+            <a:ext cx="3566160" cy="1713100"/>
+          </a:xfrm>
+          <a:prstGeom prst="rect">
+            <a:avLst/>
+          </a:prstGeom>
+        </p:spPr>
+      </p:pic>
+      <p:pic>
+        <p:nvPicPr>
+          <p:cNvPr id="8" name="Picture 7" descr="portal-centro-operativo-sla.png"/>
+          <p:cNvPicPr>
+            <a:picLocks noChangeAspect="1"/>
+          </p:cNvPicPr>
+          <p:nvPr/>
+        </p:nvPicPr>
+        <p:blipFill>
+          <a:blip r:embed="rId4"/>
+          <a:stretch>
+            <a:fillRect/>
+          </a:stretch>
+        </p:blipFill>
+        <p:spPr>
+          <a:xfrm>
+            <a:off x="8183879" y="1354473"/>
+            <a:ext cx="3474720" cy="1771613"/>
+          </a:xfrm>
+          <a:prstGeom prst="rect">
+            <a:avLst/>
+          </a:prstGeom>
+        </p:spPr>
+      </p:pic>
+      <p:sp>
+        <p:nvSpPr>
+          <p:cNvPr id="9" name="Rounded Rectangle 8"/>
           <p:cNvSpPr/>
           <p:nvPr/>
         </p:nvSpPr>
         <p:spPr>
           <a:xfrm>
-            <a:off x="640080" y="1554480"/>
-            <a:ext cx="3200400" cy="2194560"/>
+            <a:off x="731520" y="3749039"/>
+            <a:ext cx="3200400" cy="1234440"/>
           </a:xfrm>
           <a:prstGeom prst="roundRect">
             <a:avLst/>
           </a:prstGeom>
           <a:solidFill>
-            <a:srgbClr val="FFFFFF"/>
+            <a:srgbClr val="F8FBFF"/>
           </a:solidFill>
-          <a:ln>
+          <a:ln w="16510">
             <a:solidFill>
-              <a:srgbClr val="D2E1F0"/>
+              <a:srgbClr val="0078D4"/>
             </a:solidFill>
           </a:ln>
         </p:spPr>
@@ -4418,14 +4844,14 @@
       </p:sp>
       <p:sp>
         <p:nvSpPr>
-          <p:cNvPr id="6" name="TextBox 5"/>
+          <p:cNvPr id="10" name="TextBox 9"/>
           <p:cNvSpPr txBox="1"/>
           <p:nvPr/>
         </p:nvSpPr>
         <p:spPr>
           <a:xfrm>
-            <a:off x="804671" y="1691639"/>
-            <a:ext cx="2871216" cy="274320"/>
+            <a:off x="896112" y="3858768"/>
+            <a:ext cx="2871216" cy="320040"/>
           </a:xfrm>
           <a:prstGeom prst="rect">
             <a:avLst/>
@@ -4438,27 +4864,29 @@
           </a:bodyPr>
           <a:lstStyle/>
           <a:p>
-            <a:r>
-              <a:rPr sz="1800" b="1">
+            <a:pPr>
+              <a:defRPr b="1" sz="1500">
                 <a:solidFill>
                   <a:srgbClr val="0078D4"/>
                 </a:solidFill>
-              </a:rPr>
-              <a:t>Por qué se incorporó</a:t>
-            </a:r>
-          </a:p>
-        </p:txBody>
-      </p:sp>
-      <p:sp>
-        <p:nvSpPr>
-          <p:cNvPr id="7" name="TextBox 6"/>
+              </a:defRPr>
+            </a:pPr>
+            <a:r>
+              <a:t>Registro</a:t>
+            </a:r>
+          </a:p>
+        </p:txBody>
+      </p:sp>
+      <p:sp>
+        <p:nvSpPr>
+          <p:cNvPr id="11" name="TextBox 10"/>
           <p:cNvSpPr txBox="1"/>
           <p:nvPr/>
         </p:nvSpPr>
         <p:spPr>
           <a:xfrm>
-            <a:off x="804671" y="2057400"/>
-            <a:ext cx="2871216" cy="1600200"/>
+            <a:off x="896112" y="4251959"/>
+            <a:ext cx="2871216" cy="640080"/>
           </a:xfrm>
           <a:prstGeom prst="rect">
             <a:avLst/>
@@ -4466,42 +4894,44 @@
           <a:noFill/>
         </p:spPr>
         <p:txBody>
-          <a:bodyPr wrap="none">
+          <a:bodyPr wrap="square">
             <a:spAutoFit/>
           </a:bodyPr>
           <a:lstStyle/>
           <a:p>
-            <a:r>
-              <a:rPr sz="1400" b="0">
-                <a:solidFill>
-                  <a:srgbClr val="334155"/>
-                </a:solidFill>
-              </a:rPr>
-              <a:t>El blob único era suficiente para el prototipo inicial, pero limitaba concurrencia, consulta y crecimiento.</a:t>
-            </a:r>
-          </a:p>
-        </p:txBody>
-      </p:sp>
-      <p:sp>
-        <p:nvSpPr>
-          <p:cNvPr id="8" name="Rounded Rectangle 7"/>
+            <a:pPr>
+              <a:defRPr sz="1250">
+                <a:solidFill>
+                  <a:srgbClr val="12304A"/>
+                </a:solidFill>
+              </a:defRPr>
+            </a:pPr>
+            <a:r>
+              <a:t>Validación, clasificación, prioridad, impacto, responsable y SLA.</a:t>
+            </a:r>
+          </a:p>
+        </p:txBody>
+      </p:sp>
+      <p:sp>
+        <p:nvSpPr>
+          <p:cNvPr id="12" name="Rounded Rectangle 11"/>
           <p:cNvSpPr/>
           <p:nvPr/>
         </p:nvSpPr>
         <p:spPr>
           <a:xfrm>
-            <a:off x="4480560" y="1554480"/>
-            <a:ext cx="3200400" cy="2194560"/>
+            <a:off x="4526280" y="3749039"/>
+            <a:ext cx="3200400" cy="1234440"/>
           </a:xfrm>
           <a:prstGeom prst="roundRect">
             <a:avLst/>
           </a:prstGeom>
           <a:solidFill>
-            <a:srgbClr val="FFFFFF"/>
+            <a:srgbClr val="F8FBFF"/>
           </a:solidFill>
-          <a:ln>
+          <a:ln w="16510">
             <a:solidFill>
-              <a:srgbClr val="D2E1F0"/>
+              <a:srgbClr val="008A45"/>
             </a:solidFill>
           </a:ln>
         </p:spPr>
@@ -4529,14 +4959,14 @@
       </p:sp>
       <p:sp>
         <p:nvSpPr>
-          <p:cNvPr id="9" name="TextBox 8"/>
+          <p:cNvPr id="13" name="TextBox 12"/>
           <p:cNvSpPr txBox="1"/>
           <p:nvPr/>
         </p:nvSpPr>
         <p:spPr>
           <a:xfrm>
-            <a:off x="4645152" y="1691639"/>
-            <a:ext cx="2871216" cy="274320"/>
+            <a:off x="4690872" y="3858768"/>
+            <a:ext cx="2871216" cy="320040"/>
           </a:xfrm>
           <a:prstGeom prst="rect">
             <a:avLst/>
@@ -4549,27 +4979,29 @@
           </a:bodyPr>
           <a:lstStyle/>
           <a:p>
-            <a:r>
-              <a:rPr sz="1800" b="1">
-                <a:solidFill>
-                  <a:srgbClr val="149496"/>
-                </a:solidFill>
-              </a:rPr>
-              <a:t>Cómo se migró</a:t>
-            </a:r>
-          </a:p>
-        </p:txBody>
-      </p:sp>
-      <p:sp>
-        <p:nvSpPr>
-          <p:cNvPr id="10" name="TextBox 9"/>
+            <a:pPr>
+              <a:defRPr b="1" sz="1500">
+                <a:solidFill>
+                  <a:srgbClr val="008A45"/>
+                </a:solidFill>
+              </a:defRPr>
+            </a:pPr>
+            <a:r>
+              <a:t>Gestión TI</a:t>
+            </a:r>
+          </a:p>
+        </p:txBody>
+      </p:sp>
+      <p:sp>
+        <p:nvSpPr>
+          <p:cNvPr id="14" name="TextBox 13"/>
           <p:cNvSpPr txBox="1"/>
           <p:nvPr/>
         </p:nvSpPr>
         <p:spPr>
           <a:xfrm>
-            <a:off x="4645152" y="2057400"/>
-            <a:ext cx="2871216" cy="1600200"/>
+            <a:off x="4690872" y="4251959"/>
+            <a:ext cx="2871216" cy="640080"/>
           </a:xfrm>
           <a:prstGeom prst="rect">
             <a:avLst/>
@@ -4577,42 +5009,44 @@
           <a:noFill/>
         </p:spPr>
         <p:txBody>
-          <a:bodyPr wrap="none">
+          <a:bodyPr wrap="square">
             <a:spAutoFit/>
           </a:bodyPr>
           <a:lstStyle/>
           <a:p>
-            <a:r>
-              <a:rPr sz="1400" b="0">
-                <a:solidFill>
-                  <a:srgbClr val="334155"/>
-                </a:solidFill>
-              </a:rPr>
-              <a:t>Se creó Cosmos DB Free Tier, se migraron 20 solicitudes y App Service quedó con STORAGE_MODE=cosmos.</a:t>
-            </a:r>
-          </a:p>
-        </p:txBody>
-      </p:sp>
-      <p:sp>
-        <p:nvSpPr>
-          <p:cNvPr id="11" name="Rounded Rectangle 10"/>
+            <a:pPr>
+              <a:defRPr sz="1250">
+                <a:solidFill>
+                  <a:srgbClr val="12304A"/>
+                </a:solidFill>
+              </a:defRPr>
+            </a:pPr>
+            <a:r>
+              <a:t>Token Bearer, filtros, detalle, aprobación, escalado y cierre.</a:t>
+            </a:r>
+          </a:p>
+        </p:txBody>
+      </p:sp>
+      <p:sp>
+        <p:nvSpPr>
+          <p:cNvPr id="15" name="Rounded Rectangle 14"/>
           <p:cNvSpPr/>
           <p:nvPr/>
         </p:nvSpPr>
         <p:spPr>
           <a:xfrm>
-            <a:off x="8321040" y="1554480"/>
-            <a:ext cx="3200400" cy="2194560"/>
+            <a:off x="8321040" y="3749039"/>
+            <a:ext cx="3017520" cy="1234440"/>
           </a:xfrm>
           <a:prstGeom prst="roundRect">
             <a:avLst/>
           </a:prstGeom>
           <a:solidFill>
-            <a:srgbClr val="FFFFFF"/>
+            <a:srgbClr val="F8FBFF"/>
           </a:solidFill>
-          <a:ln>
+          <a:ln w="16510">
             <a:solidFill>
-              <a:srgbClr val="D2E1F0"/>
+              <a:srgbClr val="F28B00"/>
             </a:solidFill>
           </a:ln>
         </p:spPr>
@@ -4640,14 +5074,14 @@
       </p:sp>
       <p:sp>
         <p:nvSpPr>
-          <p:cNvPr id="12" name="TextBox 11"/>
+          <p:cNvPr id="16" name="TextBox 15"/>
           <p:cNvSpPr txBox="1"/>
           <p:nvPr/>
         </p:nvSpPr>
         <p:spPr>
           <a:xfrm>
-            <a:off x="8485632" y="1691639"/>
-            <a:ext cx="2871216" cy="274320"/>
+            <a:off x="8485632" y="3858768"/>
+            <a:ext cx="2688336" cy="320040"/>
           </a:xfrm>
           <a:prstGeom prst="rect">
             <a:avLst/>
@@ -4660,27 +5094,29 @@
           </a:bodyPr>
           <a:lstStyle/>
           <a:p>
-            <a:r>
-              <a:rPr sz="1800" b="1">
-                <a:solidFill>
-                  <a:srgbClr val="228B53"/>
-                </a:solidFill>
-              </a:rPr>
-              <a:t>Qué mejora</a:t>
-            </a:r>
-          </a:p>
-        </p:txBody>
-      </p:sp>
-      <p:sp>
-        <p:nvSpPr>
-          <p:cNvPr id="13" name="TextBox 12"/>
+            <a:pPr>
+              <a:defRPr b="1" sz="1500">
+                <a:solidFill>
+                  <a:srgbClr val="F28B00"/>
+                </a:solidFill>
+              </a:defRPr>
+            </a:pPr>
+            <a:r>
+              <a:t>Operación</a:t>
+            </a:r>
+          </a:p>
+        </p:txBody>
+      </p:sp>
+      <p:sp>
+        <p:nvSpPr>
+          <p:cNvPr id="17" name="TextBox 16"/>
           <p:cNvSpPr txBox="1"/>
           <p:nvPr/>
         </p:nvSpPr>
         <p:spPr>
           <a:xfrm>
-            <a:off x="8485632" y="2057400"/>
-            <a:ext cx="2871216" cy="1600200"/>
+            <a:off x="8485632" y="4251959"/>
+            <a:ext cx="2688336" cy="640080"/>
           </a:xfrm>
           <a:prstGeom prst="rect">
             <a:avLst/>
@@ -4688,109 +5124,20 @@
           <a:noFill/>
         </p:spPr>
         <p:txBody>
-          <a:bodyPr wrap="none">
+          <a:bodyPr wrap="square">
             <a:spAutoFit/>
           </a:bodyPr>
           <a:lstStyle/>
           <a:p>
-            <a:r>
-              <a:rPr sz="1400" b="0">
-                <a:solidFill>
-                  <a:srgbClr val="334155"/>
-                </a:solidFill>
-              </a:rPr>
-              <a:t>Cada solicitud se almacena como documento independiente en tfg-solicitudes/solicitudes.</a:t>
-            </a:r>
-          </a:p>
-        </p:txBody>
-      </p:sp>
-      <p:pic>
-        <p:nvPicPr>
-          <p:cNvPr id="14" name="Picture 13" descr="base_de_datos_azure_cosmos_db.png"/>
-          <p:cNvPicPr>
-            <a:picLocks noChangeAspect="1"/>
-          </p:cNvPicPr>
-          <p:nvPr/>
-        </p:nvPicPr>
-        <p:blipFill>
-          <a:blip r:embed="rId2"/>
-          <a:stretch>
-            <a:fillRect/>
-          </a:stretch>
-        </p:blipFill>
-        <p:spPr>
-          <a:xfrm>
-            <a:off x="1051560" y="4160520"/>
-            <a:ext cx="10058400" cy="1508760"/>
-          </a:xfrm>
-          <a:prstGeom prst="rect">
-            <a:avLst/>
-          </a:prstGeom>
-        </p:spPr>
-      </p:pic>
-      <p:sp>
-        <p:nvSpPr>
-          <p:cNvPr id="15" name="TextBox 14"/>
-          <p:cNvSpPr txBox="1"/>
-          <p:nvPr/>
-        </p:nvSpPr>
-        <p:spPr>
-          <a:xfrm>
-            <a:off x="566928" y="6510528"/>
-            <a:ext cx="8686800" cy="182880"/>
-          </a:xfrm>
-          <a:prstGeom prst="rect">
-            <a:avLst/>
-          </a:prstGeom>
-          <a:noFill/>
-        </p:spPr>
-        <p:txBody>
-          <a:bodyPr wrap="none">
-            <a:spAutoFit/>
-          </a:bodyPr>
-          <a:lstStyle/>
-          <a:p>
-            <a:r>
-              <a:rPr sz="1000" b="0">
-                <a:solidFill>
-                  <a:srgbClr val="64748B"/>
-                </a:solidFill>
-              </a:rPr>
-              <a:t>Cloud Computing: servicio empresarial seguro en Microsoft Azure</a:t>
-            </a:r>
-          </a:p>
-        </p:txBody>
-      </p:sp>
-      <p:sp>
-        <p:nvSpPr>
-          <p:cNvPr id="16" name="TextBox 15"/>
-          <p:cNvSpPr txBox="1"/>
-          <p:nvPr/>
-        </p:nvSpPr>
-        <p:spPr>
-          <a:xfrm>
-            <a:off x="11064240" y="6510528"/>
-            <a:ext cx="457200" cy="182880"/>
-          </a:xfrm>
-          <a:prstGeom prst="rect">
-            <a:avLst/>
-          </a:prstGeom>
-          <a:noFill/>
-        </p:spPr>
-        <p:txBody>
-          <a:bodyPr wrap="none">
-            <a:spAutoFit/>
-          </a:bodyPr>
-          <a:lstStyle/>
-          <a:p>
-            <a:pPr algn="r"/>
-            <a:r>
-              <a:rPr sz="1000" b="0">
-                <a:solidFill>
-                  <a:srgbClr val="64748B"/>
-                </a:solidFill>
-              </a:rPr>
-              <a:t>4</a:t>
+            <a:pPr>
+              <a:defRPr sz="1250">
+                <a:solidFill>
+                  <a:srgbClr val="12304A"/>
+                </a:solidFill>
+              </a:defRPr>
+            </a:pPr>
+            <a:r>
+              <a:t>Carga, SLA vencido, alertas, métricas y satisfacción.</a:t>
             </a:r>
           </a:p>
         </p:txBody>
@@ -4823,86 +5170,20 @@
       <p:grpSpPr/>
       <p:sp>
         <p:nvSpPr>
-          <p:cNvPr id="2" name="TextBox 1"/>
-          <p:cNvSpPr txBox="1"/>
-          <p:nvPr/>
-        </p:nvSpPr>
-        <p:spPr>
-          <a:xfrm>
-            <a:off x="566928" y="320040"/>
-            <a:ext cx="10058400" cy="502920"/>
-          </a:xfrm>
-          <a:prstGeom prst="rect">
-            <a:avLst/>
-          </a:prstGeom>
-          <a:noFill/>
-        </p:spPr>
-        <p:txBody>
-          <a:bodyPr wrap="none">
-            <a:spAutoFit/>
-          </a:bodyPr>
-          <a:lstStyle/>
-          <a:p>
-            <a:r>
-              <a:rPr sz="3400" b="1">
-                <a:solidFill>
-                  <a:srgbClr val="0F2F4A"/>
-                </a:solidFill>
-              </a:rPr>
-              <a:t>Producto entregado</a:t>
-            </a:r>
-          </a:p>
-        </p:txBody>
-      </p:sp>
-      <p:sp>
-        <p:nvSpPr>
-          <p:cNvPr id="3" name="TextBox 2"/>
-          <p:cNvSpPr txBox="1"/>
-          <p:nvPr/>
-        </p:nvSpPr>
-        <p:spPr>
-          <a:xfrm>
-            <a:off x="585216" y="841248"/>
-            <a:ext cx="10058400" cy="320040"/>
-          </a:xfrm>
-          <a:prstGeom prst="rect">
-            <a:avLst/>
-          </a:prstGeom>
-          <a:noFill/>
-        </p:spPr>
-        <p:txBody>
-          <a:bodyPr wrap="none">
-            <a:spAutoFit/>
-          </a:bodyPr>
-          <a:lstStyle/>
-          <a:p>
-            <a:r>
-              <a:rPr sz="1700" b="0">
-                <a:solidFill>
-                  <a:srgbClr val="334155"/>
-                </a:solidFill>
-              </a:rPr>
-              <a:t>Funcionalidades demostrables</a:t>
-            </a:r>
-          </a:p>
-        </p:txBody>
-      </p:sp>
-      <p:sp>
-        <p:nvSpPr>
-          <p:cNvPr id="4" name="Rectangle 3"/>
+          <p:cNvPr id="2" name="Rectangle 1"/>
           <p:cNvSpPr/>
           <p:nvPr/>
         </p:nvSpPr>
         <p:spPr>
           <a:xfrm>
-            <a:off x="566928" y="1207008"/>
-            <a:ext cx="11064240" cy="27432"/>
+            <a:off x="0" y="0"/>
+            <a:ext cx="12191695" cy="146304"/>
           </a:xfrm>
           <a:prstGeom prst="rect">
             <a:avLst/>
           </a:prstGeom>
           <a:solidFill>
-            <a:srgbClr val="0078D4"/>
+            <a:srgbClr val="695BD0"/>
           </a:solidFill>
           <a:ln>
             <a:noFill/>
@@ -4932,14 +5213,14 @@
       </p:sp>
       <p:sp>
         <p:nvSpPr>
-          <p:cNvPr id="5" name="TextBox 4"/>
+          <p:cNvPr id="3" name="TextBox 2"/>
           <p:cNvSpPr txBox="1"/>
           <p:nvPr/>
         </p:nvSpPr>
         <p:spPr>
           <a:xfrm>
-            <a:off x="868680" y="1554480"/>
-            <a:ext cx="10058400" cy="3840480"/>
+            <a:off x="502920" y="6446520"/>
+            <a:ext cx="11155680" cy="228600"/>
           </a:xfrm>
           <a:prstGeom prst="rect">
             <a:avLst/>
@@ -4952,67 +5233,29 @@
           </a:bodyPr>
           <a:lstStyle/>
           <a:p>
-            <a:r>
-              <a:rPr sz="2200">
-                <a:solidFill>
-                  <a:srgbClr val="334155"/>
-                </a:solidFill>
-              </a:rPr>
-              <a:t>• Alta de solicitudes TI desde portal web y desde Logic App.</a:t>
-            </a:r>
-          </a:p>
-          <a:p>
-            <a:r>
-              <a:rPr sz="2200">
-                <a:solidFill>
-                  <a:srgbClr val="334155"/>
-                </a:solidFill>
-              </a:rPr>
-              <a:t>• Clasificación automática de prioridad, categoría, SLA y responsable.</a:t>
-            </a:r>
-          </a:p>
-          <a:p>
-            <a:r>
-              <a:rPr sz="2200">
-                <a:solidFill>
-                  <a:srgbClr val="334155"/>
-                </a:solidFill>
-              </a:rPr>
-              <a:t>• Bandeja de gestión protegida con filtros, detalle y cambios de estado.</a:t>
-            </a:r>
-          </a:p>
-          <a:p>
-            <a:r>
-              <a:rPr sz="2200">
-                <a:solidFill>
-                  <a:srgbClr val="334155"/>
-                </a:solidFill>
-              </a:rPr>
-              <a:t>• Catálogo de servicios y activos para contextualizar impacto.</a:t>
-            </a:r>
-          </a:p>
-          <a:p>
-            <a:r>
-              <a:rPr sz="2200">
-                <a:solidFill>
-                  <a:srgbClr val="334155"/>
-                </a:solidFill>
-              </a:rPr>
-              <a:t>• Exportación CSV, métricas operativas, health check y OpenAPI.</a:t>
-            </a:r>
-          </a:p>
-        </p:txBody>
-      </p:sp>
-      <p:sp>
-        <p:nvSpPr>
-          <p:cNvPr id="6" name="TextBox 5"/>
+            <a:pPr>
+              <a:defRPr sz="800">
+                <a:solidFill>
+                  <a:srgbClr val="788291"/>
+                </a:solidFill>
+              </a:defRPr>
+            </a:pPr>
+            <a:r>
+              <a:t>Cloud Computing: servicio empresarial seguro en Microsoft Azure · Karima Drafli Rico</a:t>
+            </a:r>
+          </a:p>
+        </p:txBody>
+      </p:sp>
+      <p:sp>
+        <p:nvSpPr>
+          <p:cNvPr id="4" name="TextBox 3"/>
           <p:cNvSpPr txBox="1"/>
           <p:nvPr/>
         </p:nvSpPr>
         <p:spPr>
           <a:xfrm>
-            <a:off x="566928" y="6510528"/>
-            <a:ext cx="8686800" cy="182880"/>
+            <a:off x="502920" y="384048"/>
+            <a:ext cx="10972800" cy="548640"/>
           </a:xfrm>
           <a:prstGeom prst="rect">
             <a:avLst/>
@@ -5025,27 +5268,29 @@
           </a:bodyPr>
           <a:lstStyle/>
           <a:p>
-            <a:r>
-              <a:rPr sz="1000" b="0">
-                <a:solidFill>
-                  <a:srgbClr val="64748B"/>
-                </a:solidFill>
-              </a:rPr>
-              <a:t>Cloud Computing: servicio empresarial seguro en Microsoft Azure</a:t>
-            </a:r>
-          </a:p>
-        </p:txBody>
-      </p:sp>
-      <p:sp>
-        <p:nvSpPr>
-          <p:cNvPr id="7" name="TextBox 6"/>
+            <a:pPr>
+              <a:defRPr b="1" sz="3000">
+                <a:solidFill>
+                  <a:srgbClr val="12304A"/>
+                </a:solidFill>
+              </a:defRPr>
+            </a:pPr>
+            <a:r>
+              <a:t>Datos y seguridad</a:t>
+            </a:r>
+          </a:p>
+        </p:txBody>
+      </p:sp>
+      <p:sp>
+        <p:nvSpPr>
+          <p:cNvPr id="5" name="TextBox 4"/>
           <p:cNvSpPr txBox="1"/>
           <p:nvPr/>
         </p:nvSpPr>
         <p:spPr>
           <a:xfrm>
-            <a:off x="11064240" y="6510528"/>
-            <a:ext cx="457200" cy="182880"/>
+            <a:off x="530352" y="932688"/>
+            <a:ext cx="10789920" cy="320040"/>
           </a:xfrm>
           <a:prstGeom prst="rect">
             <a:avLst/>
@@ -5058,14 +5303,237 @@
           </a:bodyPr>
           <a:lstStyle/>
           <a:p>
-            <a:pPr algn="r"/>
-            <a:r>
-              <a:rPr sz="1000" b="0">
-                <a:solidFill>
-                  <a:srgbClr val="64748B"/>
-                </a:solidFill>
-              </a:rPr>
-              <a:t>5</a:t>
+            <a:pPr>
+              <a:defRPr sz="1400">
+                <a:solidFill>
+                  <a:srgbClr val="4E5B6C"/>
+                </a:solidFill>
+              </a:defRPr>
+            </a:pPr>
+            <a:r>
+              <a:t>Evolución desde Blob Storage a Cosmos DB</a:t>
+            </a:r>
+          </a:p>
+        </p:txBody>
+      </p:sp>
+      <p:pic>
+        <p:nvPicPr>
+          <p:cNvPr id="6" name="Picture 5" descr="base-de-datos-azure-cosmos-db.png"/>
+          <p:cNvPicPr>
+            <a:picLocks noChangeAspect="1"/>
+          </p:cNvPicPr>
+          <p:nvPr/>
+        </p:nvPicPr>
+        <p:blipFill>
+          <a:blip r:embed="rId2"/>
+          <a:stretch>
+            <a:fillRect/>
+          </a:stretch>
+        </p:blipFill>
+        <p:spPr>
+          <a:xfrm>
+            <a:off x="1052066" y="1325880"/>
+            <a:ext cx="4113787" cy="2926080"/>
+          </a:xfrm>
+          <a:prstGeom prst="rect">
+            <a:avLst/>
+          </a:prstGeom>
+        </p:spPr>
+      </p:pic>
+      <p:sp>
+        <p:nvSpPr>
+          <p:cNvPr id="7" name="TextBox 6"/>
+          <p:cNvSpPr txBox="1"/>
+          <p:nvPr/>
+        </p:nvSpPr>
+        <p:spPr>
+          <a:xfrm>
+            <a:off x="5989320" y="1417320"/>
+            <a:ext cx="5394960" cy="2926080"/>
+          </a:xfrm>
+          <a:prstGeom prst="rect">
+            <a:avLst/>
+          </a:prstGeom>
+          <a:noFill/>
+        </p:spPr>
+        <p:txBody>
+          <a:bodyPr wrap="square">
+            <a:spAutoFit/>
+          </a:bodyPr>
+          <a:lstStyle/>
+          <a:p>
+            <a:pPr>
+              <a:spcAft>
+                <a:spcPts val="700"/>
+              </a:spcAft>
+              <a:defRPr sz="1600">
+                <a:solidFill>
+                  <a:srgbClr val="12304A"/>
+                </a:solidFill>
+              </a:defRPr>
+            </a:pPr>
+            <a:r>
+              <a:t>Cosmos DB: cuenta cosmos-tfg-kdr-2026, BD tfg-solicitudes, contenedor solicitudes.</a:t>
+            </a:r>
+          </a:p>
+          <a:p>
+            <a:pPr>
+              <a:spcAft>
+                <a:spcPts val="700"/>
+              </a:spcAft>
+              <a:defRPr sz="1600">
+                <a:solidFill>
+                  <a:srgbClr val="12304A"/>
+                </a:solidFill>
+              </a:defRPr>
+            </a:pPr>
+            <a:r>
+              <a:t>Partición /tipo_solicitud y documentos JSON independientes por solicitud.</a:t>
+            </a:r>
+          </a:p>
+          <a:p>
+            <a:pPr>
+              <a:spcAft>
+                <a:spcPts val="700"/>
+              </a:spcAft>
+              <a:defRPr sz="1600">
+                <a:solidFill>
+                  <a:srgbClr val="12304A"/>
+                </a:solidFill>
+              </a:defRPr>
+            </a:pPr>
+            <a:r>
+              <a:t>Migración de 20 solicitudes existentes desde Blob Storage.</a:t>
+            </a:r>
+          </a:p>
+          <a:p>
+            <a:pPr>
+              <a:spcAft>
+                <a:spcPts val="700"/>
+              </a:spcAft>
+              <a:defRPr sz="1600">
+                <a:solidFill>
+                  <a:srgbClr val="12304A"/>
+                </a:solidFill>
+              </a:defRPr>
+            </a:pPr>
+            <a:r>
+              <a:t>Key Vault conserva api-key y App Service accede mediante Managed Identity.</a:t>
+            </a:r>
+          </a:p>
+        </p:txBody>
+      </p:sp>
+      <p:sp>
+        <p:nvSpPr>
+          <p:cNvPr id="8" name="Rounded Rectangle 7"/>
+          <p:cNvSpPr/>
+          <p:nvPr/>
+        </p:nvSpPr>
+        <p:spPr>
+          <a:xfrm>
+            <a:off x="822960" y="4709160"/>
+            <a:ext cx="10515600" cy="777240"/>
+          </a:xfrm>
+          <a:prstGeom prst="roundRect">
+            <a:avLst/>
+          </a:prstGeom>
+          <a:solidFill>
+            <a:srgbClr val="F8FBFF"/>
+          </a:solidFill>
+          <a:ln w="16510">
+            <a:solidFill>
+              <a:srgbClr val="008A45"/>
+            </a:solidFill>
+          </a:ln>
+        </p:spPr>
+        <p:style>
+          <a:lnRef idx="1">
+            <a:schemeClr val="accent1"/>
+          </a:lnRef>
+          <a:fillRef idx="3">
+            <a:schemeClr val="accent1"/>
+          </a:fillRef>
+          <a:effectRef idx="2">
+            <a:schemeClr val="accent1"/>
+          </a:effectRef>
+          <a:fontRef idx="minor">
+            <a:schemeClr val="lt1"/>
+          </a:fontRef>
+        </p:style>
+        <p:txBody>
+          <a:bodyPr rtlCol="0" anchor="ctr"/>
+          <a:lstStyle/>
+          <a:p>
+            <a:pPr algn="ctr"/>
+          </a:p>
+        </p:txBody>
+      </p:sp>
+      <p:sp>
+        <p:nvSpPr>
+          <p:cNvPr id="9" name="TextBox 8"/>
+          <p:cNvSpPr txBox="1"/>
+          <p:nvPr/>
+        </p:nvSpPr>
+        <p:spPr>
+          <a:xfrm>
+            <a:off x="987552" y="4818888"/>
+            <a:ext cx="10186416" cy="320040"/>
+          </a:xfrm>
+          <a:prstGeom prst="rect">
+            <a:avLst/>
+          </a:prstGeom>
+          <a:noFill/>
+        </p:spPr>
+        <p:txBody>
+          <a:bodyPr wrap="none">
+            <a:spAutoFit/>
+          </a:bodyPr>
+          <a:lstStyle/>
+          <a:p>
+            <a:pPr>
+              <a:defRPr b="1" sz="1500">
+                <a:solidFill>
+                  <a:srgbClr val="008A45"/>
+                </a:solidFill>
+              </a:defRPr>
+            </a:pPr>
+            <a:r>
+              <a:t>Validación real</a:t>
+            </a:r>
+          </a:p>
+        </p:txBody>
+      </p:sp>
+      <p:sp>
+        <p:nvSpPr>
+          <p:cNvPr id="10" name="TextBox 9"/>
+          <p:cNvSpPr txBox="1"/>
+          <p:nvPr/>
+        </p:nvSpPr>
+        <p:spPr>
+          <a:xfrm>
+            <a:off x="987552" y="5212080"/>
+            <a:ext cx="10186416" cy="182879"/>
+          </a:xfrm>
+          <a:prstGeom prst="rect">
+            <a:avLst/>
+          </a:prstGeom>
+          <a:noFill/>
+        </p:spPr>
+        <p:txBody>
+          <a:bodyPr wrap="square">
+            <a:spAutoFit/>
+          </a:bodyPr>
+          <a:lstStyle/>
+          <a:p>
+            <a:pPr>
+              <a:defRPr sz="1250">
+                <a:solidFill>
+                  <a:srgbClr val="12304A"/>
+                </a:solidFill>
+              </a:defRPr>
+            </a:pPr>
+            <a:r>
+              <a:t>/health confirma storage_mode: cosmos; la API crea, lista y calcula métricas sobre la persistencia final.</a:t>
             </a:r>
           </a:p>
         </p:txBody>
@@ -5084,7 +5552,7 @@
     <p:bg>
       <p:bgPr>
         <a:solidFill>
-          <a:srgbClr val="F8FAFC"/>
+          <a:srgbClr val="FFFFFF"/>
         </a:solidFill>
         <a:effectLst/>
       </p:bgPr>
@@ -5098,86 +5566,20 @@
       <p:grpSpPr/>
       <p:sp>
         <p:nvSpPr>
-          <p:cNvPr id="2" name="TextBox 1"/>
-          <p:cNvSpPr txBox="1"/>
-          <p:nvPr/>
-        </p:nvSpPr>
-        <p:spPr>
-          <a:xfrm>
-            <a:off x="566928" y="320040"/>
-            <a:ext cx="10058400" cy="502920"/>
-          </a:xfrm>
-          <a:prstGeom prst="rect">
-            <a:avLst/>
-          </a:prstGeom>
-          <a:noFill/>
-        </p:spPr>
-        <p:txBody>
-          <a:bodyPr wrap="none">
-            <a:spAutoFit/>
-          </a:bodyPr>
-          <a:lstStyle/>
-          <a:p>
-            <a:r>
-              <a:rPr sz="3400" b="1">
-                <a:solidFill>
-                  <a:srgbClr val="0F2F4A"/>
-                </a:solidFill>
-              </a:rPr>
-              <a:t>Seguridad y datos</a:t>
-            </a:r>
-          </a:p>
-        </p:txBody>
-      </p:sp>
-      <p:sp>
-        <p:nvSpPr>
-          <p:cNvPr id="3" name="TextBox 2"/>
-          <p:cNvSpPr txBox="1"/>
-          <p:nvPr/>
-        </p:nvSpPr>
-        <p:spPr>
-          <a:xfrm>
-            <a:off x="585216" y="841248"/>
-            <a:ext cx="10058400" cy="320040"/>
-          </a:xfrm>
-          <a:prstGeom prst="rect">
-            <a:avLst/>
-          </a:prstGeom>
-          <a:noFill/>
-        </p:spPr>
-        <p:txBody>
-          <a:bodyPr wrap="none">
-            <a:spAutoFit/>
-          </a:bodyPr>
-          <a:lstStyle/>
-          <a:p>
-            <a:r>
-              <a:rPr sz="1700" b="0">
-                <a:solidFill>
-                  <a:srgbClr val="334155"/>
-                </a:solidFill>
-              </a:rPr>
-              <a:t>Separación entre acceso, secretos y persistencia</a:t>
-            </a:r>
-          </a:p>
-        </p:txBody>
-      </p:sp>
-      <p:sp>
-        <p:nvSpPr>
-          <p:cNvPr id="4" name="Rectangle 3"/>
+          <p:cNvPr id="2" name="Rectangle 1"/>
           <p:cNvSpPr/>
           <p:nvPr/>
         </p:nvSpPr>
         <p:spPr>
           <a:xfrm>
-            <a:off x="566928" y="1207008"/>
-            <a:ext cx="11064240" cy="27432"/>
+            <a:off x="0" y="0"/>
+            <a:ext cx="12191695" cy="146304"/>
           </a:xfrm>
           <a:prstGeom prst="rect">
             <a:avLst/>
           </a:prstGeom>
           <a:solidFill>
-            <a:srgbClr val="0078D4"/>
+            <a:srgbClr val="F28B00"/>
           </a:solidFill>
           <a:ln>
             <a:noFill/>
@@ -5207,59 +5609,14 @@
       </p:sp>
       <p:sp>
         <p:nvSpPr>
-          <p:cNvPr id="5" name="Rounded Rectangle 4"/>
-          <p:cNvSpPr/>
-          <p:nvPr/>
-        </p:nvSpPr>
-        <p:spPr>
-          <a:xfrm>
-            <a:off x="685800" y="1600200"/>
-            <a:ext cx="3154680" cy="2514600"/>
-          </a:xfrm>
-          <a:prstGeom prst="roundRect">
-            <a:avLst/>
-          </a:prstGeom>
-          <a:solidFill>
-            <a:srgbClr val="FFFFFF"/>
-          </a:solidFill>
-          <a:ln>
-            <a:solidFill>
-              <a:srgbClr val="D2E1F0"/>
-            </a:solidFill>
-          </a:ln>
-        </p:spPr>
-        <p:style>
-          <a:lnRef idx="1">
-            <a:schemeClr val="accent1"/>
-          </a:lnRef>
-          <a:fillRef idx="3">
-            <a:schemeClr val="accent1"/>
-          </a:fillRef>
-          <a:effectRef idx="2">
-            <a:schemeClr val="accent1"/>
-          </a:effectRef>
-          <a:fontRef idx="minor">
-            <a:schemeClr val="lt1"/>
-          </a:fontRef>
-        </p:style>
-        <p:txBody>
-          <a:bodyPr rtlCol="0" anchor="ctr"/>
-          <a:lstStyle/>
-          <a:p>
-            <a:pPr algn="ctr"/>
-          </a:p>
-        </p:txBody>
-      </p:sp>
-      <p:sp>
-        <p:nvSpPr>
-          <p:cNvPr id="6" name="TextBox 5"/>
+          <p:cNvPr id="3" name="TextBox 2"/>
           <p:cNvSpPr txBox="1"/>
           <p:nvPr/>
         </p:nvSpPr>
         <p:spPr>
           <a:xfrm>
-            <a:off x="850392" y="1737360"/>
-            <a:ext cx="2825496" cy="274320"/>
+            <a:off x="502920" y="6446520"/>
+            <a:ext cx="11155680" cy="228600"/>
           </a:xfrm>
           <a:prstGeom prst="rect">
             <a:avLst/>
@@ -5272,27 +5629,29 @@
           </a:bodyPr>
           <a:lstStyle/>
           <a:p>
-            <a:r>
-              <a:rPr sz="1800" b="1">
-                <a:solidFill>
-                  <a:srgbClr val="0078D4"/>
-                </a:solidFill>
-              </a:rPr>
-              <a:t>Autenticación</a:t>
-            </a:r>
-          </a:p>
-        </p:txBody>
-      </p:sp>
-      <p:sp>
-        <p:nvSpPr>
-          <p:cNvPr id="7" name="TextBox 6"/>
+            <a:pPr>
+              <a:defRPr sz="800">
+                <a:solidFill>
+                  <a:srgbClr val="788291"/>
+                </a:solidFill>
+              </a:defRPr>
+            </a:pPr>
+            <a:r>
+              <a:t>Cloud Computing: servicio empresarial seguro en Microsoft Azure · Karima Drafli Rico</a:t>
+            </a:r>
+          </a:p>
+        </p:txBody>
+      </p:sp>
+      <p:sp>
+        <p:nvSpPr>
+          <p:cNvPr id="4" name="TextBox 3"/>
           <p:cNvSpPr txBox="1"/>
           <p:nvPr/>
         </p:nvSpPr>
         <p:spPr>
           <a:xfrm>
-            <a:off x="850392" y="2103120"/>
-            <a:ext cx="2825496" cy="1920240"/>
+            <a:off x="502920" y="384048"/>
+            <a:ext cx="10972800" cy="548640"/>
           </a:xfrm>
           <a:prstGeom prst="rect">
             <a:avLst/>
@@ -5305,72 +5664,29 @@
           </a:bodyPr>
           <a:lstStyle/>
           <a:p>
-            <a:r>
-              <a:rPr sz="1400" b="0">
-                <a:solidFill>
-                  <a:srgbClr val="334155"/>
-                </a:solidFill>
-              </a:rPr>
-              <a:t>Los endpoints operativos requieren Bearer token. La clave se custodia en Key Vault.</a:t>
-            </a:r>
-          </a:p>
-        </p:txBody>
-      </p:sp>
-      <p:sp>
-        <p:nvSpPr>
-          <p:cNvPr id="8" name="Rounded Rectangle 7"/>
-          <p:cNvSpPr/>
-          <p:nvPr/>
-        </p:nvSpPr>
-        <p:spPr>
-          <a:xfrm>
-            <a:off x="4480560" y="1600200"/>
-            <a:ext cx="3154680" cy="2514600"/>
-          </a:xfrm>
-          <a:prstGeom prst="roundRect">
-            <a:avLst/>
-          </a:prstGeom>
-          <a:solidFill>
-            <a:srgbClr val="FFFFFF"/>
-          </a:solidFill>
-          <a:ln>
-            <a:solidFill>
-              <a:srgbClr val="D2E1F0"/>
-            </a:solidFill>
-          </a:ln>
-        </p:spPr>
-        <p:style>
-          <a:lnRef idx="1">
-            <a:schemeClr val="accent1"/>
-          </a:lnRef>
-          <a:fillRef idx="3">
-            <a:schemeClr val="accent1"/>
-          </a:fillRef>
-          <a:effectRef idx="2">
-            <a:schemeClr val="accent1"/>
-          </a:effectRef>
-          <a:fontRef idx="minor">
-            <a:schemeClr val="lt1"/>
-          </a:fontRef>
-        </p:style>
-        <p:txBody>
-          <a:bodyPr rtlCol="0" anchor="ctr"/>
-          <a:lstStyle/>
-          <a:p>
-            <a:pPr algn="ctr"/>
-          </a:p>
-        </p:txBody>
-      </p:sp>
-      <p:sp>
-        <p:nvSpPr>
-          <p:cNvPr id="9" name="TextBox 8"/>
+            <a:pPr>
+              <a:defRPr b="1" sz="3000">
+                <a:solidFill>
+                  <a:srgbClr val="12304A"/>
+                </a:solidFill>
+              </a:defRPr>
+            </a:pPr>
+            <a:r>
+              <a:t>Automatización e integración</a:t>
+            </a:r>
+          </a:p>
+        </p:txBody>
+      </p:sp>
+      <p:sp>
+        <p:nvSpPr>
+          <p:cNvPr id="5" name="TextBox 4"/>
           <p:cNvSpPr txBox="1"/>
           <p:nvPr/>
         </p:nvSpPr>
         <p:spPr>
           <a:xfrm>
-            <a:off x="4645152" y="1737360"/>
-            <a:ext cx="2825496" cy="274320"/>
+            <a:off x="530352" y="932688"/>
+            <a:ext cx="10789920" cy="320040"/>
           </a:xfrm>
           <a:prstGeom prst="rect">
             <a:avLst/>
@@ -5383,27 +5699,53 @@
           </a:bodyPr>
           <a:lstStyle/>
           <a:p>
-            <a:r>
-              <a:rPr sz="1800" b="1">
-                <a:solidFill>
-                  <a:srgbClr val="149496"/>
-                </a:solidFill>
-              </a:rPr>
-              <a:t>Identidad administrada</a:t>
-            </a:r>
-          </a:p>
-        </p:txBody>
-      </p:sp>
-      <p:sp>
-        <p:nvSpPr>
-          <p:cNvPr id="10" name="TextBox 9"/>
+            <a:pPr>
+              <a:defRPr sz="1400">
+                <a:solidFill>
+                  <a:srgbClr val="4E5B6C"/>
+                </a:solidFill>
+              </a:defRPr>
+            </a:pPr>
+            <a:r>
+              <a:t>Logic App como entrada desde sistemas externos</a:t>
+            </a:r>
+          </a:p>
+        </p:txBody>
+      </p:sp>
+      <p:pic>
+        <p:nvPicPr>
+          <p:cNvPr id="6" name="Picture 5" descr="logic-app-created-request.png"/>
+          <p:cNvPicPr>
+            <a:picLocks noChangeAspect="1"/>
+          </p:cNvPicPr>
+          <p:nvPr/>
+        </p:nvPicPr>
+        <p:blipFill>
+          <a:blip r:embed="rId2"/>
+          <a:stretch>
+            <a:fillRect/>
+          </a:stretch>
+        </p:blipFill>
+        <p:spPr>
+          <a:xfrm>
+            <a:off x="640080" y="1247262"/>
+            <a:ext cx="5303520" cy="3174755"/>
+          </a:xfrm>
+          <a:prstGeom prst="rect">
+            <a:avLst/>
+          </a:prstGeom>
+        </p:spPr>
+      </p:pic>
+      <p:sp>
+        <p:nvSpPr>
+          <p:cNvPr id="7" name="TextBox 6"/>
           <p:cNvSpPr txBox="1"/>
           <p:nvPr/>
         </p:nvSpPr>
         <p:spPr>
           <a:xfrm>
-            <a:off x="4645152" y="2103120"/>
-            <a:ext cx="2825496" cy="1920240"/>
+            <a:off x="6309360" y="1325880"/>
+            <a:ext cx="4983480" cy="3017520"/>
           </a:xfrm>
           <a:prstGeom prst="rect">
             <a:avLst/>
@@ -5411,196 +5753,68 @@
           <a:noFill/>
         </p:spPr>
         <p:txBody>
-          <a:bodyPr wrap="none">
+          <a:bodyPr wrap="square">
             <a:spAutoFit/>
           </a:bodyPr>
           <a:lstStyle/>
           <a:p>
-            <a:r>
-              <a:rPr sz="1400" b="0">
-                <a:solidFill>
-                  <a:srgbClr val="334155"/>
-                </a:solidFill>
-              </a:rPr>
-              <a:t>App Service accede a secretos sin credenciales cloud embebidas en el código.</a:t>
-            </a:r>
-          </a:p>
-        </p:txBody>
-      </p:sp>
-      <p:sp>
-        <p:nvSpPr>
-          <p:cNvPr id="11" name="Rounded Rectangle 10"/>
-          <p:cNvSpPr/>
-          <p:nvPr/>
-        </p:nvSpPr>
-        <p:spPr>
-          <a:xfrm>
-            <a:off x="8275320" y="1600200"/>
-            <a:ext cx="3154680" cy="2514600"/>
-          </a:xfrm>
-          <a:prstGeom prst="roundRect">
-            <a:avLst/>
-          </a:prstGeom>
-          <a:solidFill>
-            <a:srgbClr val="FFFFFF"/>
-          </a:solidFill>
-          <a:ln>
-            <a:solidFill>
-              <a:srgbClr val="D2E1F0"/>
-            </a:solidFill>
-          </a:ln>
-        </p:spPr>
-        <p:style>
-          <a:lnRef idx="1">
-            <a:schemeClr val="accent1"/>
-          </a:lnRef>
-          <a:fillRef idx="3">
-            <a:schemeClr val="accent1"/>
-          </a:fillRef>
-          <a:effectRef idx="2">
-            <a:schemeClr val="accent1"/>
-          </a:effectRef>
-          <a:fontRef idx="minor">
-            <a:schemeClr val="lt1"/>
-          </a:fontRef>
-        </p:style>
-        <p:txBody>
-          <a:bodyPr rtlCol="0" anchor="ctr"/>
-          <a:lstStyle/>
-          <a:p>
-            <a:pPr algn="ctr"/>
-          </a:p>
-        </p:txBody>
-      </p:sp>
-      <p:sp>
-        <p:nvSpPr>
-          <p:cNvPr id="12" name="TextBox 11"/>
-          <p:cNvSpPr txBox="1"/>
-          <p:nvPr/>
-        </p:nvSpPr>
-        <p:spPr>
-          <a:xfrm>
-            <a:off x="8439912" y="1737360"/>
-            <a:ext cx="2825496" cy="274320"/>
-          </a:xfrm>
-          <a:prstGeom prst="rect">
-            <a:avLst/>
-          </a:prstGeom>
-          <a:noFill/>
-        </p:spPr>
-        <p:txBody>
-          <a:bodyPr wrap="none">
-            <a:spAutoFit/>
-          </a:bodyPr>
-          <a:lstStyle/>
-          <a:p>
-            <a:r>
-              <a:rPr sz="1800" b="1">
-                <a:solidFill>
-                  <a:srgbClr val="228B53"/>
-                </a:solidFill>
-              </a:rPr>
-              <a:t>Cosmos DB</a:t>
-            </a:r>
-          </a:p>
-        </p:txBody>
-      </p:sp>
-      <p:sp>
-        <p:nvSpPr>
-          <p:cNvPr id="13" name="TextBox 12"/>
-          <p:cNvSpPr txBox="1"/>
-          <p:nvPr/>
-        </p:nvSpPr>
-        <p:spPr>
-          <a:xfrm>
-            <a:off x="8439912" y="2103120"/>
-            <a:ext cx="2825496" cy="1920240"/>
-          </a:xfrm>
-          <a:prstGeom prst="rect">
-            <a:avLst/>
-          </a:prstGeom>
-          <a:noFill/>
-        </p:spPr>
-        <p:txBody>
-          <a:bodyPr wrap="none">
-            <a:spAutoFit/>
-          </a:bodyPr>
-          <a:lstStyle/>
-          <a:p>
-            <a:r>
-              <a:rPr sz="1400" b="0">
-                <a:solidFill>
-                  <a:srgbClr val="334155"/>
-                </a:solidFill>
-              </a:rPr>
-              <a:t>El portal y la Logic App no acceden directamente a la base de datos; toda la lógica pasa por la API.</a:t>
-            </a:r>
-          </a:p>
-        </p:txBody>
-      </p:sp>
-      <p:sp>
-        <p:nvSpPr>
-          <p:cNvPr id="14" name="TextBox 13"/>
-          <p:cNvSpPr txBox="1"/>
-          <p:nvPr/>
-        </p:nvSpPr>
-        <p:spPr>
-          <a:xfrm>
-            <a:off x="566928" y="6510528"/>
-            <a:ext cx="8686800" cy="182880"/>
-          </a:xfrm>
-          <a:prstGeom prst="rect">
-            <a:avLst/>
-          </a:prstGeom>
-          <a:noFill/>
-        </p:spPr>
-        <p:txBody>
-          <a:bodyPr wrap="none">
-            <a:spAutoFit/>
-          </a:bodyPr>
-          <a:lstStyle/>
-          <a:p>
-            <a:r>
-              <a:rPr sz="1000" b="0">
-                <a:solidFill>
-                  <a:srgbClr val="64748B"/>
-                </a:solidFill>
-              </a:rPr>
-              <a:t>Cloud Computing: servicio empresarial seguro en Microsoft Azure</a:t>
-            </a:r>
-          </a:p>
-        </p:txBody>
-      </p:sp>
-      <p:sp>
-        <p:nvSpPr>
-          <p:cNvPr id="15" name="TextBox 14"/>
-          <p:cNvSpPr txBox="1"/>
-          <p:nvPr/>
-        </p:nvSpPr>
-        <p:spPr>
-          <a:xfrm>
-            <a:off x="11064240" y="6510528"/>
-            <a:ext cx="457200" cy="182880"/>
-          </a:xfrm>
-          <a:prstGeom prst="rect">
-            <a:avLst/>
-          </a:prstGeom>
-          <a:noFill/>
-        </p:spPr>
-        <p:txBody>
-          <a:bodyPr wrap="none">
-            <a:spAutoFit/>
-          </a:bodyPr>
-          <a:lstStyle/>
-          <a:p>
-            <a:pPr algn="r"/>
-            <a:r>
-              <a:rPr sz="1000" b="0">
-                <a:solidFill>
-                  <a:srgbClr val="64748B"/>
-                </a:solidFill>
-              </a:rPr>
-              <a:t>6</a:t>
+            <a:pPr>
+              <a:spcAft>
+                <a:spcPts val="700"/>
+              </a:spcAft>
+              <a:defRPr sz="1700">
+                <a:solidFill>
+                  <a:srgbClr val="12304A"/>
+                </a:solidFill>
+              </a:defRPr>
+            </a:pPr>
+            <a:r>
+              <a:t>Un sistema externo envía una petición HTTP a la Logic App.</a:t>
+            </a:r>
+          </a:p>
+          <a:p>
+            <a:pPr>
+              <a:spcAft>
+                <a:spcPts val="700"/>
+              </a:spcAft>
+              <a:defRPr sz="1700">
+                <a:solidFill>
+                  <a:srgbClr val="12304A"/>
+                </a:solidFill>
+              </a:defRPr>
+            </a:pPr>
+            <a:r>
+              <a:t>La Logic App invoca POST /solicitudes en la API desplegada.</a:t>
+            </a:r>
+          </a:p>
+          <a:p>
+            <a:pPr>
+              <a:spcAft>
+                <a:spcPts val="700"/>
+              </a:spcAft>
+              <a:defRPr sz="1700">
+                <a:solidFill>
+                  <a:srgbClr val="12304A"/>
+                </a:solidFill>
+              </a:defRPr>
+            </a:pPr>
+            <a:r>
+              <a:t>La API mantiene la responsabilidad de validar, clasificar y persistir.</a:t>
+            </a:r>
+          </a:p>
+          <a:p>
+            <a:pPr>
+              <a:spcAft>
+                <a:spcPts val="700"/>
+              </a:spcAft>
+              <a:defRPr sz="1700">
+                <a:solidFill>
+                  <a:srgbClr val="12304A"/>
+                </a:solidFill>
+              </a:defRPr>
+            </a:pPr>
+            <a:r>
+              <a:t>El flujo permite automatización sin exponer Cosmos DB ni duplicar reglas.</a:t>
             </a:r>
           </a:p>
         </p:txBody>
@@ -5633,80 +5847,14 @@
       <p:grpSpPr/>
       <p:sp>
         <p:nvSpPr>
-          <p:cNvPr id="2" name="TextBox 1"/>
-          <p:cNvSpPr txBox="1"/>
-          <p:nvPr/>
-        </p:nvSpPr>
-        <p:spPr>
-          <a:xfrm>
-            <a:off x="566928" y="320040"/>
-            <a:ext cx="10058400" cy="502920"/>
-          </a:xfrm>
-          <a:prstGeom prst="rect">
-            <a:avLst/>
-          </a:prstGeom>
-          <a:noFill/>
-        </p:spPr>
-        <p:txBody>
-          <a:bodyPr wrap="none">
-            <a:spAutoFit/>
-          </a:bodyPr>
-          <a:lstStyle/>
-          <a:p>
-            <a:r>
-              <a:rPr sz="3400" b="1">
-                <a:solidFill>
-                  <a:srgbClr val="0F2F4A"/>
-                </a:solidFill>
-              </a:rPr>
-              <a:t>Proceso de desarrollo</a:t>
-            </a:r>
-          </a:p>
-        </p:txBody>
-      </p:sp>
-      <p:sp>
-        <p:nvSpPr>
-          <p:cNvPr id="3" name="TextBox 2"/>
-          <p:cNvSpPr txBox="1"/>
-          <p:nvPr/>
-        </p:nvSpPr>
-        <p:spPr>
-          <a:xfrm>
-            <a:off x="585216" y="841248"/>
-            <a:ext cx="10058400" cy="320040"/>
-          </a:xfrm>
-          <a:prstGeom prst="rect">
-            <a:avLst/>
-          </a:prstGeom>
-          <a:noFill/>
-        </p:spPr>
-        <p:txBody>
-          <a:bodyPr wrap="none">
-            <a:spAutoFit/>
-          </a:bodyPr>
-          <a:lstStyle/>
-          <a:p>
-            <a:r>
-              <a:rPr sz="1700" b="0">
-                <a:solidFill>
-                  <a:srgbClr val="334155"/>
-                </a:solidFill>
-              </a:rPr>
-              <a:t>Cinco sprints cerrados y trazabilidad en Zube/GitHub</a:t>
-            </a:r>
-          </a:p>
-        </p:txBody>
-      </p:sp>
-      <p:sp>
-        <p:nvSpPr>
-          <p:cNvPr id="4" name="Rectangle 3"/>
+          <p:cNvPr id="2" name="Rectangle 1"/>
           <p:cNvSpPr/>
           <p:nvPr/>
         </p:nvSpPr>
         <p:spPr>
           <a:xfrm>
-            <a:off x="566928" y="1207008"/>
-            <a:ext cx="11064240" cy="27432"/>
+            <a:off x="0" y="0"/>
+            <a:ext cx="12191695" cy="146304"/>
           </a:xfrm>
           <a:prstGeom prst="rect">
             <a:avLst/>
@@ -5740,44 +5888,238 @@
           </a:p>
         </p:txBody>
       </p:sp>
-      <p:graphicFrame>
-        <p:nvGraphicFramePr>
-          <p:cNvPr id="5" name="Chart 4"/>
-          <p:cNvGraphicFramePr>
-            <a:graphicFrameLocks noGrp="1"/>
-          </p:cNvGraphicFramePr>
-          <p:nvPr/>
-        </p:nvGraphicFramePr>
-        <p:xfrm>
-          <a:off x="822960" y="1600200"/>
-          <a:ext cx="6949440" cy="3063240"/>
-        </p:xfrm>
-        <a:graphic>
-          <a:graphicData uri="http://schemas.openxmlformats.org/drawingml/2006/chart">
-            <c:chart xmlns:c="http://schemas.openxmlformats.org/drawingml/2006/chart" r:id="rId2"/>
-          </a:graphicData>
-        </a:graphic>
-      </p:graphicFrame>
-      <p:sp>
-        <p:nvSpPr>
-          <p:cNvPr id="6" name="Rounded Rectangle 5"/>
+      <p:sp>
+        <p:nvSpPr>
+          <p:cNvPr id="3" name="TextBox 2"/>
+          <p:cNvSpPr txBox="1"/>
+          <p:nvPr/>
+        </p:nvSpPr>
+        <p:spPr>
+          <a:xfrm>
+            <a:off x="502920" y="6446520"/>
+            <a:ext cx="11155680" cy="228600"/>
+          </a:xfrm>
+          <a:prstGeom prst="rect">
+            <a:avLst/>
+          </a:prstGeom>
+          <a:noFill/>
+        </p:spPr>
+        <p:txBody>
+          <a:bodyPr wrap="none">
+            <a:spAutoFit/>
+          </a:bodyPr>
+          <a:lstStyle/>
+          <a:p>
+            <a:pPr>
+              <a:defRPr sz="800">
+                <a:solidFill>
+                  <a:srgbClr val="788291"/>
+                </a:solidFill>
+              </a:defRPr>
+            </a:pPr>
+            <a:r>
+              <a:t>Cloud Computing: servicio empresarial seguro en Microsoft Azure · Karima Drafli Rico</a:t>
+            </a:r>
+          </a:p>
+        </p:txBody>
+      </p:sp>
+      <p:sp>
+        <p:nvSpPr>
+          <p:cNvPr id="4" name="TextBox 3"/>
+          <p:cNvSpPr txBox="1"/>
+          <p:nvPr/>
+        </p:nvSpPr>
+        <p:spPr>
+          <a:xfrm>
+            <a:off x="502920" y="384048"/>
+            <a:ext cx="10972800" cy="548640"/>
+          </a:xfrm>
+          <a:prstGeom prst="rect">
+            <a:avLst/>
+          </a:prstGeom>
+          <a:noFill/>
+        </p:spPr>
+        <p:txBody>
+          <a:bodyPr wrap="none">
+            <a:spAutoFit/>
+          </a:bodyPr>
+          <a:lstStyle/>
+          <a:p>
+            <a:pPr>
+              <a:defRPr b="1" sz="3000">
+                <a:solidFill>
+                  <a:srgbClr val="12304A"/>
+                </a:solidFill>
+              </a:defRPr>
+            </a:pPr>
+            <a:r>
+              <a:t>Proceso de desarrollo</a:t>
+            </a:r>
+          </a:p>
+        </p:txBody>
+      </p:sp>
+      <p:sp>
+        <p:nvSpPr>
+          <p:cNvPr id="5" name="TextBox 4"/>
+          <p:cNvSpPr txBox="1"/>
+          <p:nvPr/>
+        </p:nvSpPr>
+        <p:spPr>
+          <a:xfrm>
+            <a:off x="530352" y="932688"/>
+            <a:ext cx="10789920" cy="320040"/>
+          </a:xfrm>
+          <a:prstGeom prst="rect">
+            <a:avLst/>
+          </a:prstGeom>
+          <a:noFill/>
+        </p:spPr>
+        <p:txBody>
+          <a:bodyPr wrap="none">
+            <a:spAutoFit/>
+          </a:bodyPr>
+          <a:lstStyle/>
+          <a:p>
+            <a:pPr>
+              <a:defRPr sz="1400">
+                <a:solidFill>
+                  <a:srgbClr val="4E5B6C"/>
+                </a:solidFill>
+              </a:defRPr>
+            </a:pPr>
+            <a:r>
+              <a:t>Seis sprints, trazabilidad y release final</a:t>
+            </a:r>
+          </a:p>
+        </p:txBody>
+      </p:sp>
+      <p:pic>
+        <p:nvPicPr>
+          <p:cNvPr id="6" name="Picture 5" descr="sprints-total-6.png"/>
+          <p:cNvPicPr>
+            <a:picLocks noChangeAspect="1"/>
+          </p:cNvPicPr>
+          <p:nvPr/>
+        </p:nvPicPr>
+        <p:blipFill>
+          <a:blip r:embed="rId2"/>
+          <a:stretch>
+            <a:fillRect/>
+          </a:stretch>
+        </p:blipFill>
+        <p:spPr>
+          <a:xfrm>
+            <a:off x="931707" y="1234440"/>
+            <a:ext cx="4903144" cy="3977639"/>
+          </a:xfrm>
+          <a:prstGeom prst="rect">
+            <a:avLst/>
+          </a:prstGeom>
+        </p:spPr>
+      </p:pic>
+      <p:sp>
+        <p:nvSpPr>
+          <p:cNvPr id="7" name="TextBox 6"/>
+          <p:cNvSpPr txBox="1"/>
+          <p:nvPr/>
+        </p:nvSpPr>
+        <p:spPr>
+          <a:xfrm>
+            <a:off x="6537960" y="1417320"/>
+            <a:ext cx="4754880" cy="3200400"/>
+          </a:xfrm>
+          <a:prstGeom prst="rect">
+            <a:avLst/>
+          </a:prstGeom>
+          <a:noFill/>
+        </p:spPr>
+        <p:txBody>
+          <a:bodyPr wrap="square">
+            <a:spAutoFit/>
+          </a:bodyPr>
+          <a:lstStyle/>
+          <a:p>
+            <a:pPr>
+              <a:spcAft>
+                <a:spcPts val="700"/>
+              </a:spcAft>
+              <a:defRPr sz="1700">
+                <a:solidFill>
+                  <a:srgbClr val="12304A"/>
+                </a:solidFill>
+              </a:defRPr>
+            </a:pPr>
+            <a:r>
+              <a:t>6 sprints cerrados en Zube.</a:t>
+            </a:r>
+          </a:p>
+          <a:p>
+            <a:pPr>
+              <a:spcAft>
+                <a:spcPts val="700"/>
+              </a:spcAft>
+              <a:defRPr sz="1700">
+                <a:solidFill>
+                  <a:srgbClr val="12304A"/>
+                </a:solidFill>
+              </a:defRPr>
+            </a:pPr>
+            <a:r>
+              <a:t>145 puntos estimados: 127 cerrados y 18 retirados/replanificados.</a:t>
+            </a:r>
+          </a:p>
+          <a:p>
+            <a:pPr>
+              <a:spcAft>
+                <a:spcPts val="700"/>
+              </a:spcAft>
+              <a:defRPr sz="1700">
+                <a:solidFill>
+                  <a:srgbClr val="12304A"/>
+                </a:solidFill>
+              </a:defRPr>
+            </a:pPr>
+            <a:r>
+              <a:t>Sprint 6: mejora final de persistencia con Cosmos DB.</a:t>
+            </a:r>
+          </a:p>
+          <a:p>
+            <a:pPr>
+              <a:spcAft>
+                <a:spcPts val="700"/>
+              </a:spcAft>
+              <a:defRPr sz="1700">
+                <a:solidFill>
+                  <a:srgbClr val="12304A"/>
+                </a:solidFill>
+              </a:defRPr>
+            </a:pPr>
+            <a:r>
+              <a:t>Release final v1.2.0 publicada en GitHub.</a:t>
+            </a:r>
+          </a:p>
+        </p:txBody>
+      </p:sp>
+      <p:sp>
+        <p:nvSpPr>
+          <p:cNvPr id="8" name="Rounded Rectangle 7"/>
           <p:cNvSpPr/>
           <p:nvPr/>
         </p:nvSpPr>
         <p:spPr>
           <a:xfrm>
-            <a:off x="8321040" y="1737360"/>
-            <a:ext cx="2560320" cy="2331720"/>
+            <a:off x="6583680" y="4754880"/>
+            <a:ext cx="4389120" cy="731520"/>
           </a:xfrm>
           <a:prstGeom prst="roundRect">
             <a:avLst/>
           </a:prstGeom>
           <a:solidFill>
-            <a:srgbClr val="FFFFFF"/>
+            <a:srgbClr val="F8FBFF"/>
           </a:solidFill>
-          <a:ln>
+          <a:ln w="16510">
             <a:solidFill>
-              <a:srgbClr val="D2E1F0"/>
+              <a:srgbClr val="695BD0"/>
             </a:solidFill>
           </a:ln>
         </p:spPr>
@@ -5805,14 +6147,14 @@
       </p:sp>
       <p:sp>
         <p:nvSpPr>
-          <p:cNvPr id="7" name="TextBox 6"/>
+          <p:cNvPr id="9" name="TextBox 8"/>
           <p:cNvSpPr txBox="1"/>
           <p:nvPr/>
         </p:nvSpPr>
         <p:spPr>
           <a:xfrm>
-            <a:off x="8485632" y="1874519"/>
-            <a:ext cx="2231136" cy="274320"/>
+            <a:off x="6748272" y="4864608"/>
+            <a:ext cx="4059935" cy="320040"/>
           </a:xfrm>
           <a:prstGeom prst="rect">
             <a:avLst/>
@@ -5825,27 +6167,29 @@
           </a:bodyPr>
           <a:lstStyle/>
           <a:p>
-            <a:r>
-              <a:rPr sz="1800" b="1">
-                <a:solidFill>
-                  <a:srgbClr val="149496"/>
-                </a:solidFill>
-              </a:rPr>
-              <a:t>Seguimiento</a:t>
-            </a:r>
-          </a:p>
-        </p:txBody>
-      </p:sp>
-      <p:sp>
-        <p:nvSpPr>
-          <p:cNvPr id="8" name="TextBox 7"/>
+            <a:pPr>
+              <a:defRPr b="1" sz="1500">
+                <a:solidFill>
+                  <a:srgbClr val="695BD0"/>
+                </a:solidFill>
+              </a:defRPr>
+            </a:pPr>
+            <a:r>
+              <a:t>Buena práctica</a:t>
+            </a:r>
+          </a:p>
+        </p:txBody>
+      </p:sp>
+      <p:sp>
+        <p:nvSpPr>
+          <p:cNvPr id="10" name="TextBox 9"/>
           <p:cNvSpPr txBox="1"/>
           <p:nvPr/>
         </p:nvSpPr>
         <p:spPr>
           <a:xfrm>
-            <a:off x="8485632" y="2240280"/>
-            <a:ext cx="2231136" cy="1737360"/>
+            <a:off x="6748272" y="5257800"/>
+            <a:ext cx="4059935" cy="137160"/>
           </a:xfrm>
           <a:prstGeom prst="rect">
             <a:avLst/>
@@ -5853,85 +6197,20 @@
           <a:noFill/>
         </p:spPr>
         <p:txBody>
-          <a:bodyPr wrap="none">
+          <a:bodyPr wrap="square">
             <a:spAutoFit/>
           </a:bodyPr>
           <a:lstStyle/>
           <a:p>
-            <a:r>
-              <a:rPr sz="1400" b="0">
-                <a:solidFill>
-                  <a:srgbClr val="334155"/>
-                </a:solidFill>
-              </a:rPr>
-              <a:t>Zube recoge sprints, HU, prioridades y story points. GitHub aporta commits y releases.</a:t>
-            </a:r>
-          </a:p>
-        </p:txBody>
-      </p:sp>
-      <p:sp>
-        <p:nvSpPr>
-          <p:cNvPr id="9" name="TextBox 8"/>
-          <p:cNvSpPr txBox="1"/>
-          <p:nvPr/>
-        </p:nvSpPr>
-        <p:spPr>
-          <a:xfrm>
-            <a:off x="566928" y="6510528"/>
-            <a:ext cx="8686800" cy="182880"/>
-          </a:xfrm>
-          <a:prstGeom prst="rect">
-            <a:avLst/>
-          </a:prstGeom>
-          <a:noFill/>
-        </p:spPr>
-        <p:txBody>
-          <a:bodyPr wrap="none">
-            <a:spAutoFit/>
-          </a:bodyPr>
-          <a:lstStyle/>
-          <a:p>
-            <a:r>
-              <a:rPr sz="1000" b="0">
-                <a:solidFill>
-                  <a:srgbClr val="64748B"/>
-                </a:solidFill>
-              </a:rPr>
-              <a:t>Cloud Computing: servicio empresarial seguro en Microsoft Azure</a:t>
-            </a:r>
-          </a:p>
-        </p:txBody>
-      </p:sp>
-      <p:sp>
-        <p:nvSpPr>
-          <p:cNvPr id="10" name="TextBox 9"/>
-          <p:cNvSpPr txBox="1"/>
-          <p:nvPr/>
-        </p:nvSpPr>
-        <p:spPr>
-          <a:xfrm>
-            <a:off x="11064240" y="6510528"/>
-            <a:ext cx="457200" cy="182880"/>
-          </a:xfrm>
-          <a:prstGeom prst="rect">
-            <a:avLst/>
-          </a:prstGeom>
-          <a:noFill/>
-        </p:spPr>
-        <p:txBody>
-          <a:bodyPr wrap="none">
-            <a:spAutoFit/>
-          </a:bodyPr>
-          <a:lstStyle/>
-          <a:p>
-            <a:pPr algn="r"/>
-            <a:r>
-              <a:rPr sz="1000" b="0">
-                <a:solidFill>
-                  <a:srgbClr val="64748B"/>
-                </a:solidFill>
-              </a:rPr>
-              <a:t>7</a:t>
+            <a:pPr>
+              <a:defRPr sz="1250">
+                <a:solidFill>
+                  <a:srgbClr val="12304A"/>
+                </a:solidFill>
+              </a:defRPr>
+            </a:pPr>
+            <a:r>
+              <a:t>El seguimiento se apoya en Zube, commits, releases, evidencias y pruebas.</a:t>
             </a:r>
           </a:p>
         </p:txBody>
@@ -5950,7 +6229,7 @@
     <p:bg>
       <p:bgPr>
         <a:solidFill>
-          <a:srgbClr val="F8FAFC"/>
+          <a:srgbClr val="FFFFFF"/>
         </a:solidFill>
         <a:effectLst/>
       </p:bgPr>
@@ -5964,86 +6243,20 @@
       <p:grpSpPr/>
       <p:sp>
         <p:nvSpPr>
-          <p:cNvPr id="2" name="TextBox 1"/>
-          <p:cNvSpPr txBox="1"/>
-          <p:nvPr/>
-        </p:nvSpPr>
-        <p:spPr>
-          <a:xfrm>
-            <a:off x="566928" y="320040"/>
-            <a:ext cx="10058400" cy="502920"/>
-          </a:xfrm>
-          <a:prstGeom prst="rect">
-            <a:avLst/>
-          </a:prstGeom>
-          <a:noFill/>
-        </p:spPr>
-        <p:txBody>
-          <a:bodyPr wrap="none">
-            <a:spAutoFit/>
-          </a:bodyPr>
-          <a:lstStyle/>
-          <a:p>
-            <a:r>
-              <a:rPr sz="3400" b="1">
-                <a:solidFill>
-                  <a:srgbClr val="0F2F4A"/>
-                </a:solidFill>
-              </a:rPr>
-              <a:t>Calidad y validación</a:t>
-            </a:r>
-          </a:p>
-        </p:txBody>
-      </p:sp>
-      <p:sp>
-        <p:nvSpPr>
-          <p:cNvPr id="3" name="TextBox 2"/>
-          <p:cNvSpPr txBox="1"/>
-          <p:nvPr/>
-        </p:nvSpPr>
-        <p:spPr>
-          <a:xfrm>
-            <a:off x="585216" y="841248"/>
-            <a:ext cx="10058400" cy="320040"/>
-          </a:xfrm>
-          <a:prstGeom prst="rect">
-            <a:avLst/>
-          </a:prstGeom>
-          <a:noFill/>
-        </p:spPr>
-        <p:txBody>
-          <a:bodyPr wrap="none">
-            <a:spAutoFit/>
-          </a:bodyPr>
-          <a:lstStyle/>
-          <a:p>
-            <a:r>
-              <a:rPr sz="1700" b="0">
-                <a:solidFill>
-                  <a:srgbClr val="334155"/>
-                </a:solidFill>
-              </a:rPr>
-              <a:t>Pruebas, SonarCloud y despliegue verificado</a:t>
-            </a:r>
-          </a:p>
-        </p:txBody>
-      </p:sp>
-      <p:sp>
-        <p:nvSpPr>
-          <p:cNvPr id="4" name="Rectangle 3"/>
+          <p:cNvPr id="2" name="Rectangle 1"/>
           <p:cNvSpPr/>
           <p:nvPr/>
         </p:nvSpPr>
         <p:spPr>
           <a:xfrm>
-            <a:off x="566928" y="1207008"/>
-            <a:ext cx="11064240" cy="27432"/>
+            <a:off x="0" y="0"/>
+            <a:ext cx="12191695" cy="146304"/>
           </a:xfrm>
           <a:prstGeom prst="rect">
             <a:avLst/>
           </a:prstGeom>
           <a:solidFill>
-            <a:srgbClr val="0078D4"/>
+            <a:srgbClr val="008A45"/>
           </a:solidFill>
           <a:ln>
             <a:noFill/>
@@ -6073,24 +6286,153 @@
       </p:sp>
       <p:sp>
         <p:nvSpPr>
-          <p:cNvPr id="5" name="Rounded Rectangle 4"/>
+          <p:cNvPr id="3" name="TextBox 2"/>
+          <p:cNvSpPr txBox="1"/>
+          <p:nvPr/>
+        </p:nvSpPr>
+        <p:spPr>
+          <a:xfrm>
+            <a:off x="502920" y="6446520"/>
+            <a:ext cx="11155680" cy="228600"/>
+          </a:xfrm>
+          <a:prstGeom prst="rect">
+            <a:avLst/>
+          </a:prstGeom>
+          <a:noFill/>
+        </p:spPr>
+        <p:txBody>
+          <a:bodyPr wrap="none">
+            <a:spAutoFit/>
+          </a:bodyPr>
+          <a:lstStyle/>
+          <a:p>
+            <a:pPr>
+              <a:defRPr sz="800">
+                <a:solidFill>
+                  <a:srgbClr val="788291"/>
+                </a:solidFill>
+              </a:defRPr>
+            </a:pPr>
+            <a:r>
+              <a:t>Cloud Computing: servicio empresarial seguro en Microsoft Azure · Karima Drafli Rico</a:t>
+            </a:r>
+          </a:p>
+        </p:txBody>
+      </p:sp>
+      <p:sp>
+        <p:nvSpPr>
+          <p:cNvPr id="4" name="TextBox 3"/>
+          <p:cNvSpPr txBox="1"/>
+          <p:nvPr/>
+        </p:nvSpPr>
+        <p:spPr>
+          <a:xfrm>
+            <a:off x="502920" y="384048"/>
+            <a:ext cx="10972800" cy="548640"/>
+          </a:xfrm>
+          <a:prstGeom prst="rect">
+            <a:avLst/>
+          </a:prstGeom>
+          <a:noFill/>
+        </p:spPr>
+        <p:txBody>
+          <a:bodyPr wrap="none">
+            <a:spAutoFit/>
+          </a:bodyPr>
+          <a:lstStyle/>
+          <a:p>
+            <a:pPr>
+              <a:defRPr b="1" sz="3000">
+                <a:solidFill>
+                  <a:srgbClr val="12304A"/>
+                </a:solidFill>
+              </a:defRPr>
+            </a:pPr>
+            <a:r>
+              <a:t>Calidad y validación</a:t>
+            </a:r>
+          </a:p>
+        </p:txBody>
+      </p:sp>
+      <p:sp>
+        <p:nvSpPr>
+          <p:cNvPr id="5" name="TextBox 4"/>
+          <p:cNvSpPr txBox="1"/>
+          <p:nvPr/>
+        </p:nvSpPr>
+        <p:spPr>
+          <a:xfrm>
+            <a:off x="530352" y="932688"/>
+            <a:ext cx="10789920" cy="320040"/>
+          </a:xfrm>
+          <a:prstGeom prst="rect">
+            <a:avLst/>
+          </a:prstGeom>
+          <a:noFill/>
+        </p:spPr>
+        <p:txBody>
+          <a:bodyPr wrap="none">
+            <a:spAutoFit/>
+          </a:bodyPr>
+          <a:lstStyle/>
+          <a:p>
+            <a:pPr>
+              <a:defRPr sz="1400">
+                <a:solidFill>
+                  <a:srgbClr val="4E5B6C"/>
+                </a:solidFill>
+              </a:defRPr>
+            </a:pPr>
+            <a:r>
+              <a:t>Pruebas, SonarCloud y verificación en Azure</a:t>
+            </a:r>
+          </a:p>
+        </p:txBody>
+      </p:sp>
+      <p:pic>
+        <p:nvPicPr>
+          <p:cNvPr id="6" name="Picture 5" descr="sonarcloud-quality-gate-final-30junio.png"/>
+          <p:cNvPicPr>
+            <a:picLocks noChangeAspect="1"/>
+          </p:cNvPicPr>
+          <p:nvPr/>
+        </p:nvPicPr>
+        <p:blipFill>
+          <a:blip r:embed="rId2"/>
+          <a:stretch>
+            <a:fillRect/>
+          </a:stretch>
+        </p:blipFill>
+        <p:spPr>
+          <a:xfrm>
+            <a:off x="1997171" y="1234440"/>
+            <a:ext cx="2315017" cy="3017520"/>
+          </a:xfrm>
+          <a:prstGeom prst="rect">
+            <a:avLst/>
+          </a:prstGeom>
+        </p:spPr>
+      </p:pic>
+      <p:sp>
+        <p:nvSpPr>
+          <p:cNvPr id="7" name="Rounded Rectangle 6"/>
           <p:cNvSpPr/>
           <p:nvPr/>
         </p:nvSpPr>
         <p:spPr>
           <a:xfrm>
-            <a:off x="731520" y="1600200"/>
-            <a:ext cx="2926080" cy="2148840"/>
+            <a:off x="6080760" y="1325880"/>
+            <a:ext cx="2377440" cy="1051560"/>
           </a:xfrm>
           <a:prstGeom prst="roundRect">
             <a:avLst/>
           </a:prstGeom>
           <a:solidFill>
-            <a:srgbClr val="FFFFFF"/>
+            <a:srgbClr val="F8FBFF"/>
           </a:solidFill>
-          <a:ln>
+          <a:ln w="16510">
             <a:solidFill>
-              <a:srgbClr val="D2E1F0"/>
+              <a:srgbClr val="0078D4"/>
             </a:solidFill>
           </a:ln>
         </p:spPr>
@@ -6118,14 +6460,14 @@
       </p:sp>
       <p:sp>
         <p:nvSpPr>
-          <p:cNvPr id="6" name="TextBox 5"/>
+          <p:cNvPr id="8" name="TextBox 7"/>
           <p:cNvSpPr txBox="1"/>
           <p:nvPr/>
         </p:nvSpPr>
         <p:spPr>
           <a:xfrm>
-            <a:off x="896112" y="1737360"/>
-            <a:ext cx="2596896" cy="274320"/>
+            <a:off x="6245352" y="1435607"/>
+            <a:ext cx="2048256" cy="320040"/>
           </a:xfrm>
           <a:prstGeom prst="rect">
             <a:avLst/>
@@ -6138,27 +6480,29 @@
           </a:bodyPr>
           <a:lstStyle/>
           <a:p>
-            <a:r>
-              <a:rPr sz="1800" b="1">
-                <a:solidFill>
-                  <a:srgbClr val="228B53"/>
-                </a:solidFill>
-              </a:rPr>
-              <a:t>Pruebas</a:t>
-            </a:r>
-          </a:p>
-        </p:txBody>
-      </p:sp>
-      <p:sp>
-        <p:nvSpPr>
-          <p:cNvPr id="7" name="TextBox 6"/>
+            <a:pPr>
+              <a:defRPr b="1" sz="1500">
+                <a:solidFill>
+                  <a:srgbClr val="0078D4"/>
+                </a:solidFill>
+              </a:defRPr>
+            </a:pPr>
+            <a:r>
+              <a:t>27 pruebas</a:t>
+            </a:r>
+          </a:p>
+        </p:txBody>
+      </p:sp>
+      <p:sp>
+        <p:nvSpPr>
+          <p:cNvPr id="9" name="TextBox 8"/>
           <p:cNvSpPr txBox="1"/>
           <p:nvPr/>
         </p:nvSpPr>
         <p:spPr>
           <a:xfrm>
-            <a:off x="896112" y="2103120"/>
-            <a:ext cx="2596896" cy="1554480"/>
+            <a:off x="6245352" y="1828800"/>
+            <a:ext cx="2048256" cy="457199"/>
           </a:xfrm>
           <a:prstGeom prst="rect">
             <a:avLst/>
@@ -6166,42 +6510,44 @@
           <a:noFill/>
         </p:spPr>
         <p:txBody>
-          <a:bodyPr wrap="none">
+          <a:bodyPr wrap="square">
             <a:spAutoFit/>
           </a:bodyPr>
           <a:lstStyle/>
           <a:p>
-            <a:r>
-              <a:rPr sz="1400" b="0">
-                <a:solidFill>
-                  <a:srgbClr val="334155"/>
-                </a:solidFill>
-              </a:rPr>
-              <a:t>27 pruebas automáticas cubren API, validación, clasificación, storage local y backend Cosmos simulado.</a:t>
-            </a:r>
-          </a:p>
-        </p:txBody>
-      </p:sp>
-      <p:sp>
-        <p:nvSpPr>
-          <p:cNvPr id="8" name="Rounded Rectangle 7"/>
+            <a:pPr>
+              <a:defRPr sz="1250">
+                <a:solidFill>
+                  <a:srgbClr val="12304A"/>
+                </a:solidFill>
+              </a:defRPr>
+            </a:pPr>
+            <a:r>
+              <a:t>unittest sobre API, reglas, seguridad, portal y persistencia.</a:t>
+            </a:r>
+          </a:p>
+        </p:txBody>
+      </p:sp>
+      <p:sp>
+        <p:nvSpPr>
+          <p:cNvPr id="10" name="Rounded Rectangle 9"/>
           <p:cNvSpPr/>
           <p:nvPr/>
         </p:nvSpPr>
         <p:spPr>
           <a:xfrm>
-            <a:off x="4526280" y="1600200"/>
-            <a:ext cx="2926080" cy="2148840"/>
+            <a:off x="8823960" y="1325880"/>
+            <a:ext cx="2377440" cy="1051560"/>
           </a:xfrm>
           <a:prstGeom prst="roundRect">
             <a:avLst/>
           </a:prstGeom>
           <a:solidFill>
-            <a:srgbClr val="FFFFFF"/>
+            <a:srgbClr val="F8FBFF"/>
           </a:solidFill>
-          <a:ln>
+          <a:ln w="16510">
             <a:solidFill>
-              <a:srgbClr val="D2E1F0"/>
+              <a:srgbClr val="008A45"/>
             </a:solidFill>
           </a:ln>
         </p:spPr>
@@ -6229,14 +6575,14 @@
       </p:sp>
       <p:sp>
         <p:nvSpPr>
-          <p:cNvPr id="9" name="TextBox 8"/>
+          <p:cNvPr id="11" name="TextBox 10"/>
           <p:cNvSpPr txBox="1"/>
           <p:nvPr/>
         </p:nvSpPr>
         <p:spPr>
           <a:xfrm>
-            <a:off x="4690872" y="1737360"/>
-            <a:ext cx="2596896" cy="274320"/>
+            <a:off x="8988552" y="1435607"/>
+            <a:ext cx="2048256" cy="320040"/>
           </a:xfrm>
           <a:prstGeom prst="rect">
             <a:avLst/>
@@ -6249,12 +6595,14 @@
           </a:bodyPr>
           <a:lstStyle/>
           <a:p>
-            <a:r>
-              <a:rPr sz="1800" b="1">
-                <a:solidFill>
-                  <a:srgbClr val="0078D4"/>
-                </a:solidFill>
-              </a:rPr>
+            <a:pPr>
+              <a:defRPr b="1" sz="1500">
+                <a:solidFill>
+                  <a:srgbClr val="008A45"/>
+                </a:solidFill>
+              </a:defRPr>
+            </a:pPr>
+            <a:r>
               <a:t>SonarCloud</a:t>
             </a:r>
           </a:p>
@@ -6262,14 +6610,14 @@
       </p:sp>
       <p:sp>
         <p:nvSpPr>
-          <p:cNvPr id="10" name="TextBox 9"/>
+          <p:cNvPr id="12" name="TextBox 11"/>
           <p:cNvSpPr txBox="1"/>
           <p:nvPr/>
         </p:nvSpPr>
         <p:spPr>
           <a:xfrm>
-            <a:off x="4690872" y="2103120"/>
-            <a:ext cx="2596896" cy="1554480"/>
+            <a:off x="8988552" y="1828800"/>
+            <a:ext cx="2048256" cy="457199"/>
           </a:xfrm>
           <a:prstGeom prst="rect">
             <a:avLst/>
@@ -6277,42 +6625,44 @@
           <a:noFill/>
         </p:spPr>
         <p:txBody>
-          <a:bodyPr wrap="none">
+          <a:bodyPr wrap="square">
             <a:spAutoFit/>
           </a:bodyPr>
           <a:lstStyle/>
           <a:p>
-            <a:r>
-              <a:rPr sz="1400" b="0">
-                <a:solidFill>
-                  <a:srgbClr val="334155"/>
-                </a:solidFill>
-              </a:rPr>
-              <a:t>Quality Gate aprobado en el análisis final del 30 de junio.</a:t>
-            </a:r>
-          </a:p>
-        </p:txBody>
-      </p:sp>
-      <p:sp>
-        <p:nvSpPr>
-          <p:cNvPr id="11" name="Rounded Rectangle 10"/>
+            <a:pPr>
+              <a:defRPr sz="1250">
+                <a:solidFill>
+                  <a:srgbClr val="12304A"/>
+                </a:solidFill>
+              </a:defRPr>
+            </a:pPr>
+            <a:r>
+              <a:t>Quality Gate aprobado, 0 issues y 0,0 % duplicación.</a:t>
+            </a:r>
+          </a:p>
+        </p:txBody>
+      </p:sp>
+      <p:sp>
+        <p:nvSpPr>
+          <p:cNvPr id="13" name="Rounded Rectangle 12"/>
           <p:cNvSpPr/>
           <p:nvPr/>
         </p:nvSpPr>
         <p:spPr>
           <a:xfrm>
-            <a:off x="8321040" y="1600200"/>
-            <a:ext cx="2926080" cy="2148840"/>
+            <a:off x="6080760" y="2743200"/>
+            <a:ext cx="2377440" cy="1051560"/>
           </a:xfrm>
           <a:prstGeom prst="roundRect">
             <a:avLst/>
           </a:prstGeom>
           <a:solidFill>
-            <a:srgbClr val="FFFFFF"/>
+            <a:srgbClr val="F8FBFF"/>
           </a:solidFill>
-          <a:ln>
+          <a:ln w="16510">
             <a:solidFill>
-              <a:srgbClr val="D2E1F0"/>
+              <a:srgbClr val="F28B00"/>
             </a:solidFill>
           </a:ln>
         </p:spPr>
@@ -6340,14 +6690,14 @@
       </p:sp>
       <p:sp>
         <p:nvSpPr>
-          <p:cNvPr id="12" name="TextBox 11"/>
+          <p:cNvPr id="14" name="TextBox 13"/>
           <p:cNvSpPr txBox="1"/>
           <p:nvPr/>
         </p:nvSpPr>
         <p:spPr>
           <a:xfrm>
-            <a:off x="8485632" y="1737360"/>
-            <a:ext cx="2596896" cy="274320"/>
+            <a:off x="6245352" y="2852928"/>
+            <a:ext cx="2048256" cy="320040"/>
           </a:xfrm>
           <a:prstGeom prst="rect">
             <a:avLst/>
@@ -6360,12 +6710,14 @@
           </a:bodyPr>
           <a:lstStyle/>
           <a:p>
-            <a:r>
-              <a:rPr sz="1800" b="1">
-                <a:solidFill>
-                  <a:srgbClr val="149496"/>
-                </a:solidFill>
-              </a:rPr>
+            <a:pPr>
+              <a:defRPr b="1" sz="1500">
+                <a:solidFill>
+                  <a:srgbClr val="F28B00"/>
+                </a:solidFill>
+              </a:defRPr>
+            </a:pPr>
+            <a:r>
               <a:t>Azure</a:t>
             </a:r>
           </a:p>
@@ -6373,14 +6725,94 @@
       </p:sp>
       <p:sp>
         <p:nvSpPr>
-          <p:cNvPr id="13" name="TextBox 12"/>
+          <p:cNvPr id="15" name="TextBox 14"/>
           <p:cNvSpPr txBox="1"/>
           <p:nvPr/>
         </p:nvSpPr>
         <p:spPr>
           <a:xfrm>
-            <a:off x="8485632" y="2103120"/>
-            <a:ext cx="2596896" cy="1554480"/>
+            <a:off x="6245352" y="3246120"/>
+            <a:ext cx="2048256" cy="457199"/>
+          </a:xfrm>
+          <a:prstGeom prst="rect">
+            <a:avLst/>
+          </a:prstGeom>
+          <a:noFill/>
+        </p:spPr>
+        <p:txBody>
+          <a:bodyPr wrap="square">
+            <a:spAutoFit/>
+          </a:bodyPr>
+          <a:lstStyle/>
+          <a:p>
+            <a:pPr>
+              <a:defRPr sz="1250">
+                <a:solidFill>
+                  <a:srgbClr val="12304A"/>
+                </a:solidFill>
+              </a:defRPr>
+            </a:pPr>
+            <a:r>
+              <a:t>Verificación real de health, creación, listado y métricas.</a:t>
+            </a:r>
+          </a:p>
+        </p:txBody>
+      </p:sp>
+      <p:sp>
+        <p:nvSpPr>
+          <p:cNvPr id="16" name="Rounded Rectangle 15"/>
+          <p:cNvSpPr/>
+          <p:nvPr/>
+        </p:nvSpPr>
+        <p:spPr>
+          <a:xfrm>
+            <a:off x="8823960" y="2743200"/>
+            <a:ext cx="2377440" cy="1051560"/>
+          </a:xfrm>
+          <a:prstGeom prst="roundRect">
+            <a:avLst/>
+          </a:prstGeom>
+          <a:solidFill>
+            <a:srgbClr val="F8FBFF"/>
+          </a:solidFill>
+          <a:ln w="16510">
+            <a:solidFill>
+              <a:srgbClr val="695BD0"/>
+            </a:solidFill>
+          </a:ln>
+        </p:spPr>
+        <p:style>
+          <a:lnRef idx="1">
+            <a:schemeClr val="accent1"/>
+          </a:lnRef>
+          <a:fillRef idx="3">
+            <a:schemeClr val="accent1"/>
+          </a:fillRef>
+          <a:effectRef idx="2">
+            <a:schemeClr val="accent1"/>
+          </a:effectRef>
+          <a:fontRef idx="minor">
+            <a:schemeClr val="lt1"/>
+          </a:fontRef>
+        </p:style>
+        <p:txBody>
+          <a:bodyPr rtlCol="0" anchor="ctr"/>
+          <a:lstStyle/>
+          <a:p>
+            <a:pPr algn="ctr"/>
+          </a:p>
+        </p:txBody>
+      </p:sp>
+      <p:sp>
+        <p:nvSpPr>
+          <p:cNvPr id="17" name="TextBox 16"/>
+          <p:cNvSpPr txBox="1"/>
+          <p:nvPr/>
+        </p:nvSpPr>
+        <p:spPr>
+          <a:xfrm>
+            <a:off x="8988552" y="2852928"/>
+            <a:ext cx="2048256" cy="320040"/>
           </a:xfrm>
           <a:prstGeom prst="rect">
             <a:avLst/>
@@ -6393,108 +6825,78 @@
           </a:bodyPr>
           <a:lstStyle/>
           <a:p>
-            <a:r>
-              <a:rPr sz="1400" b="0">
-                <a:solidFill>
-                  <a:srgbClr val="334155"/>
-                </a:solidFill>
-              </a:rPr>
-              <a:t>/health confirma storage_mode=cosmos y los endpoints responden en la nube.</a:t>
+            <a:pPr>
+              <a:defRPr b="1" sz="1500">
+                <a:solidFill>
+                  <a:srgbClr val="695BD0"/>
+                </a:solidFill>
+              </a:defRPr>
+            </a:pPr>
+            <a:r>
+              <a:t>OpenAPI</a:t>
+            </a:r>
+          </a:p>
+        </p:txBody>
+      </p:sp>
+      <p:sp>
+        <p:nvSpPr>
+          <p:cNvPr id="18" name="TextBox 17"/>
+          <p:cNvSpPr txBox="1"/>
+          <p:nvPr/>
+        </p:nvSpPr>
+        <p:spPr>
+          <a:xfrm>
+            <a:off x="8988552" y="3246120"/>
+            <a:ext cx="2048256" cy="457199"/>
+          </a:xfrm>
+          <a:prstGeom prst="rect">
+            <a:avLst/>
+          </a:prstGeom>
+          <a:noFill/>
+        </p:spPr>
+        <p:txBody>
+          <a:bodyPr wrap="square">
+            <a:spAutoFit/>
+          </a:bodyPr>
+          <a:lstStyle/>
+          <a:p>
+            <a:pPr>
+              <a:defRPr sz="1250">
+                <a:solidFill>
+                  <a:srgbClr val="12304A"/>
+                </a:solidFill>
+              </a:defRPr>
+            </a:pPr>
+            <a:r>
+              <a:t>Contrato interactivo para revisar endpoints.</a:t>
             </a:r>
           </a:p>
         </p:txBody>
       </p:sp>
       <p:pic>
         <p:nvPicPr>
-          <p:cNvPr id="14" name="Picture 13" descr="sonarcloud-quality-gate-final-30junio.png"/>
+          <p:cNvPr id="19" name="Picture 18" descr="documentacion-interactiva-de-API.png"/>
           <p:cNvPicPr>
             <a:picLocks noChangeAspect="1"/>
           </p:cNvPicPr>
           <p:nvPr/>
         </p:nvPicPr>
         <p:blipFill>
-          <a:blip r:embed="rId2"/>
+          <a:blip r:embed="rId3"/>
           <a:stretch>
             <a:fillRect/>
           </a:stretch>
         </p:blipFill>
         <p:spPr>
           <a:xfrm>
-            <a:off x="2560320" y="4206240"/>
-            <a:ext cx="6858000" cy="1417320"/>
+            <a:off x="7901982" y="4160520"/>
+            <a:ext cx="1432474" cy="1508760"/>
           </a:xfrm>
           <a:prstGeom prst="rect">
             <a:avLst/>
           </a:prstGeom>
         </p:spPr>
       </p:pic>
-      <p:sp>
-        <p:nvSpPr>
-          <p:cNvPr id="15" name="TextBox 14"/>
-          <p:cNvSpPr txBox="1"/>
-          <p:nvPr/>
-        </p:nvSpPr>
-        <p:spPr>
-          <a:xfrm>
-            <a:off x="566928" y="6510528"/>
-            <a:ext cx="8686800" cy="182880"/>
-          </a:xfrm>
-          <a:prstGeom prst="rect">
-            <a:avLst/>
-          </a:prstGeom>
-          <a:noFill/>
-        </p:spPr>
-        <p:txBody>
-          <a:bodyPr wrap="none">
-            <a:spAutoFit/>
-          </a:bodyPr>
-          <a:lstStyle/>
-          <a:p>
-            <a:r>
-              <a:rPr sz="1000" b="0">
-                <a:solidFill>
-                  <a:srgbClr val="64748B"/>
-                </a:solidFill>
-              </a:rPr>
-              <a:t>Cloud Computing: servicio empresarial seguro en Microsoft Azure</a:t>
-            </a:r>
-          </a:p>
-        </p:txBody>
-      </p:sp>
-      <p:sp>
-        <p:nvSpPr>
-          <p:cNvPr id="16" name="TextBox 15"/>
-          <p:cNvSpPr txBox="1"/>
-          <p:nvPr/>
-        </p:nvSpPr>
-        <p:spPr>
-          <a:xfrm>
-            <a:off x="11064240" y="6510528"/>
-            <a:ext cx="457200" cy="182880"/>
-          </a:xfrm>
-          <a:prstGeom prst="rect">
-            <a:avLst/>
-          </a:prstGeom>
-          <a:noFill/>
-        </p:spPr>
-        <p:txBody>
-          <a:bodyPr wrap="none">
-            <a:spAutoFit/>
-          </a:bodyPr>
-          <a:lstStyle/>
-          <a:p>
-            <a:pPr algn="r"/>
-            <a:r>
-              <a:rPr sz="1000" b="0">
-                <a:solidFill>
-                  <a:srgbClr val="64748B"/>
-                </a:solidFill>
-              </a:rPr>
-              <a:t>8</a:t>
-            </a:r>
-          </a:p>
-        </p:txBody>
-      </p:sp>
     </p:spTree>
   </p:cSld>
   <p:clrMapOvr>
@@ -6523,86 +6925,20 @@
       <p:grpSpPr/>
       <p:sp>
         <p:nvSpPr>
-          <p:cNvPr id="2" name="TextBox 1"/>
-          <p:cNvSpPr txBox="1"/>
-          <p:nvPr/>
-        </p:nvSpPr>
-        <p:spPr>
-          <a:xfrm>
-            <a:off x="566928" y="320040"/>
-            <a:ext cx="10058400" cy="502920"/>
-          </a:xfrm>
-          <a:prstGeom prst="rect">
-            <a:avLst/>
-          </a:prstGeom>
-          <a:noFill/>
-        </p:spPr>
-        <p:txBody>
-          <a:bodyPr wrap="none">
-            <a:spAutoFit/>
-          </a:bodyPr>
-          <a:lstStyle/>
-          <a:p>
-            <a:r>
-              <a:rPr sz="3400" b="1">
-                <a:solidFill>
-                  <a:srgbClr val="0F2F4A"/>
-                </a:solidFill>
-              </a:rPr>
-              <a:t>Costes y buenas prácticas</a:t>
-            </a:r>
-          </a:p>
-        </p:txBody>
-      </p:sp>
-      <p:sp>
-        <p:nvSpPr>
-          <p:cNvPr id="3" name="TextBox 2"/>
-          <p:cNvSpPr txBox="1"/>
-          <p:nvPr/>
-        </p:nvSpPr>
-        <p:spPr>
-          <a:xfrm>
-            <a:off x="585216" y="841248"/>
-            <a:ext cx="10058400" cy="320040"/>
-          </a:xfrm>
-          <a:prstGeom prst="rect">
-            <a:avLst/>
-          </a:prstGeom>
-          <a:noFill/>
-        </p:spPr>
-        <p:txBody>
-          <a:bodyPr wrap="none">
-            <a:spAutoFit/>
-          </a:bodyPr>
-          <a:lstStyle/>
-          <a:p>
-            <a:r>
-              <a:rPr sz="1700" b="0">
-                <a:solidFill>
-                  <a:srgbClr val="334155"/>
-                </a:solidFill>
-              </a:rPr>
-              <a:t>Alcance académico con recursos controlados</a:t>
-            </a:r>
-          </a:p>
-        </p:txBody>
-      </p:sp>
-      <p:sp>
-        <p:nvSpPr>
-          <p:cNvPr id="4" name="Rectangle 3"/>
+          <p:cNvPr id="2" name="Rectangle 1"/>
           <p:cNvSpPr/>
           <p:nvPr/>
         </p:nvSpPr>
         <p:spPr>
           <a:xfrm>
-            <a:off x="566928" y="1207008"/>
-            <a:ext cx="11064240" cy="27432"/>
+            <a:off x="0" y="0"/>
+            <a:ext cx="12191695" cy="146304"/>
           </a:xfrm>
           <a:prstGeom prst="rect">
             <a:avLst/>
           </a:prstGeom>
           <a:solidFill>
-            <a:srgbClr val="0078D4"/>
+            <a:srgbClr val="695BD0"/>
           </a:solidFill>
           <a:ln>
             <a:noFill/>
@@ -6630,9 +6966,114 @@
           </a:p>
         </p:txBody>
       </p:sp>
+      <p:sp>
+        <p:nvSpPr>
+          <p:cNvPr id="3" name="TextBox 2"/>
+          <p:cNvSpPr txBox="1"/>
+          <p:nvPr/>
+        </p:nvSpPr>
+        <p:spPr>
+          <a:xfrm>
+            <a:off x="502920" y="6446520"/>
+            <a:ext cx="11155680" cy="228600"/>
+          </a:xfrm>
+          <a:prstGeom prst="rect">
+            <a:avLst/>
+          </a:prstGeom>
+          <a:noFill/>
+        </p:spPr>
+        <p:txBody>
+          <a:bodyPr wrap="none">
+            <a:spAutoFit/>
+          </a:bodyPr>
+          <a:lstStyle/>
+          <a:p>
+            <a:pPr>
+              <a:defRPr sz="800">
+                <a:solidFill>
+                  <a:srgbClr val="788291"/>
+                </a:solidFill>
+              </a:defRPr>
+            </a:pPr>
+            <a:r>
+              <a:t>Cloud Computing: servicio empresarial seguro en Microsoft Azure · Karima Drafli Rico</a:t>
+            </a:r>
+          </a:p>
+        </p:txBody>
+      </p:sp>
+      <p:sp>
+        <p:nvSpPr>
+          <p:cNvPr id="4" name="TextBox 3"/>
+          <p:cNvSpPr txBox="1"/>
+          <p:nvPr/>
+        </p:nvSpPr>
+        <p:spPr>
+          <a:xfrm>
+            <a:off x="502920" y="384048"/>
+            <a:ext cx="10972800" cy="548640"/>
+          </a:xfrm>
+          <a:prstGeom prst="rect">
+            <a:avLst/>
+          </a:prstGeom>
+          <a:noFill/>
+        </p:spPr>
+        <p:txBody>
+          <a:bodyPr wrap="none">
+            <a:spAutoFit/>
+          </a:bodyPr>
+          <a:lstStyle/>
+          <a:p>
+            <a:pPr>
+              <a:defRPr b="1" sz="3000">
+                <a:solidFill>
+                  <a:srgbClr val="12304A"/>
+                </a:solidFill>
+              </a:defRPr>
+            </a:pPr>
+            <a:r>
+              <a:t>Viabilidad</a:t>
+            </a:r>
+          </a:p>
+        </p:txBody>
+      </p:sp>
+      <p:sp>
+        <p:nvSpPr>
+          <p:cNvPr id="5" name="TextBox 4"/>
+          <p:cNvSpPr txBox="1"/>
+          <p:nvPr/>
+        </p:nvSpPr>
+        <p:spPr>
+          <a:xfrm>
+            <a:off x="530352" y="932688"/>
+            <a:ext cx="10789920" cy="320040"/>
+          </a:xfrm>
+          <a:prstGeom prst="rect">
+            <a:avLst/>
+          </a:prstGeom>
+          <a:noFill/>
+        </p:spPr>
+        <p:txBody>
+          <a:bodyPr wrap="none">
+            <a:spAutoFit/>
+          </a:bodyPr>
+          <a:lstStyle/>
+          <a:p>
+            <a:pPr>
+              <a:defRPr sz="1400">
+                <a:solidFill>
+                  <a:srgbClr val="4E5B6C"/>
+                </a:solidFill>
+              </a:defRPr>
+            </a:pPr>
+            <a:r>
+              <a:t>Costes, licencias y protección de datos</a:t>
+            </a:r>
+          </a:p>
+        </p:txBody>
+      </p:sp>
       <p:pic>
         <p:nvPicPr>
-          <p:cNvPr id="5" name="Picture 4" descr="grafico_costes_estimados.png"/>
+          <p:cNvPr id="6" name="Picture 5" descr="grafico_costes_estimados.png"/>
           <p:cNvPicPr>
             <a:picLocks noChangeAspect="1"/>
           </p:cNvPicPr>
@@ -6646,8 +7087,8 @@
         </p:blipFill>
         <p:spPr>
           <a:xfrm>
-            <a:off x="502920" y="1325880"/>
-            <a:ext cx="10972800" cy="4892040"/>
+            <a:off x="594360" y="1445078"/>
+            <a:ext cx="5029200" cy="3053442"/>
           </a:xfrm>
           <a:prstGeom prst="rect">
             <a:avLst/>
@@ -6656,14 +7097,14 @@
       </p:pic>
       <p:sp>
         <p:nvSpPr>
-          <p:cNvPr id="6" name="TextBox 5"/>
+          <p:cNvPr id="7" name="TextBox 6"/>
           <p:cNvSpPr txBox="1"/>
           <p:nvPr/>
         </p:nvSpPr>
         <p:spPr>
           <a:xfrm>
-            <a:off x="566928" y="6510528"/>
-            <a:ext cx="8686800" cy="182880"/>
+            <a:off x="5989320" y="1325880"/>
+            <a:ext cx="5303520" cy="3383280"/>
           </a:xfrm>
           <a:prstGeom prst="rect">
             <a:avLst/>
@@ -6671,52 +7112,68 @@
           <a:noFill/>
         </p:spPr>
         <p:txBody>
-          <a:bodyPr wrap="none">
+          <a:bodyPr wrap="square">
             <a:spAutoFit/>
           </a:bodyPr>
           <a:lstStyle/>
           <a:p>
-            <a:r>
-              <a:rPr sz="1000" b="0">
-                <a:solidFill>
-                  <a:srgbClr val="64748B"/>
-                </a:solidFill>
-              </a:rPr>
-              <a:t>Cloud Computing: servicio empresarial seguro en Microsoft Azure</a:t>
-            </a:r>
-          </a:p>
-        </p:txBody>
-      </p:sp>
-      <p:sp>
-        <p:nvSpPr>
-          <p:cNvPr id="7" name="TextBox 6"/>
-          <p:cNvSpPr txBox="1"/>
-          <p:nvPr/>
-        </p:nvSpPr>
-        <p:spPr>
-          <a:xfrm>
-            <a:off x="11064240" y="6510528"/>
-            <a:ext cx="457200" cy="182880"/>
-          </a:xfrm>
-          <a:prstGeom prst="rect">
-            <a:avLst/>
-          </a:prstGeom>
-          <a:noFill/>
-        </p:spPr>
-        <p:txBody>
-          <a:bodyPr wrap="none">
-            <a:spAutoFit/>
-          </a:bodyPr>
-          <a:lstStyle/>
-          <a:p>
-            <a:pPr algn="r"/>
-            <a:r>
-              <a:rPr sz="1000" b="0">
-                <a:solidFill>
-                  <a:srgbClr val="64748B"/>
-                </a:solidFill>
-              </a:rPr>
-              <a:t>9</a:t>
+            <a:pPr>
+              <a:spcAft>
+                <a:spcPts val="700"/>
+              </a:spcAft>
+              <a:defRPr sz="1600">
+                <a:solidFill>
+                  <a:srgbClr val="12304A"/>
+                </a:solidFill>
+              </a:defRPr>
+            </a:pPr>
+            <a:r>
+              <a:t>Coste estimado: 300 h de trabajo y costes empresariales asociados.</a:t>
+            </a:r>
+          </a:p>
+          <a:p>
+            <a:pPr>
+              <a:spcAft>
+                <a:spcPts val="700"/>
+              </a:spcAft>
+              <a:defRPr sz="1600">
+                <a:solidFill>
+                  <a:srgbClr val="12304A"/>
+                </a:solidFill>
+              </a:defRPr>
+            </a:pPr>
+            <a:r>
+              <a:t>Cosmos DB Free Tier y Azure for Students reducen el coste cloud del prototipo.</a:t>
+            </a:r>
+          </a:p>
+          <a:p>
+            <a:pPr>
+              <a:spcAft>
+                <a:spcPts val="700"/>
+              </a:spcAft>
+              <a:defRPr sz="1600">
+                <a:solidFill>
+                  <a:srgbClr val="12304A"/>
+                </a:solidFill>
+              </a:defRPr>
+            </a:pPr>
+            <a:r>
+              <a:t>Licencia MIT para el código propio y revisión de licencias de dependencias.</a:t>
+            </a:r>
+          </a:p>
+          <a:p>
+            <a:pPr>
+              <a:spcAft>
+                <a:spcPts val="700"/>
+              </a:spcAft>
+              <a:defRPr sz="1600">
+                <a:solidFill>
+                  <a:srgbClr val="12304A"/>
+                </a:solidFill>
+              </a:defRPr>
+            </a:pPr>
+            <a:r>
+              <a:t>Datos de prueba ficticios; en producción se aplicarían RGPD, roles, retención y auditoría.</a:t>
             </a:r>
           </a:p>
         </p:txBody>

--- a/docs/entrega/presentacion-defensa-tfg.pptx
+++ b/docs/entrega/presentacion-defensa-tfg.pptx
@@ -12200,7 +12200,7 @@
                 <a:cs typeface="Calibri"/>
                 <a:sym typeface="Calibri"/>
               </a:rPr>
-              <a:t>Versión final v1.2.0 · Memoria y anexos generados · Pendiente solo de incorporar las URLs de vídeo al PDF de enlaces.</a:t>
+              <a:t>Versión final v1.2.0 · Memoria, anexos, release y evidencias finales generadas.</a:t>
             </a:r>
             <a:endParaRPr/>
           </a:p>
